--- a/assets/decks/episodio-02-gold-nao-e-semantica.pptx
+++ b/assets/decks/episodio-02-gold-nao-e-semantica.pptx
@@ -2,33 +2,33 @@
 <file path=ppt/presentation.xml><?xml version="1.0" encoding="utf-8"?>
 <p:presentation xmlns:p="http://schemas.openxmlformats.org/presentationml/2006/main">
   <p:sldMasterIdLst>
-    <p:sldMasterId xmlns:r="http://schemas.openxmlformats.org/officeDocument/2006/relationships" id="2147483648" r:id="Rd03157db1e1343fe"/>
-    <p:sldMasterId xmlns:r="http://schemas.openxmlformats.org/officeDocument/2006/relationships" id="2147483650" r:id="Rac11c898274e4e86"/>
+    <p:sldMasterId xmlns:r="http://schemas.openxmlformats.org/officeDocument/2006/relationships" id="2147483648" r:id="Rc3fa8cb7ccdd4546"/>
+    <p:sldMasterId xmlns:r="http://schemas.openxmlformats.org/officeDocument/2006/relationships" id="2147483650" r:id="R13d88186bf274a63"/>
   </p:sldMasterIdLst>
   <p:notesMasterIdLst>
-    <p:notesMasterId xmlns:r="http://schemas.openxmlformats.org/officeDocument/2006/relationships" r:id="Rffc2d2c25b2f4b1a"/>
+    <p:notesMasterId xmlns:r="http://schemas.openxmlformats.org/officeDocument/2006/relationships" r:id="R6dbc110e7fdc4c72"/>
   </p:notesMasterIdLst>
   <p:sldIdLst>
-    <p:sldId xmlns:r="http://schemas.openxmlformats.org/officeDocument/2006/relationships" id="256" r:id="Rc5b63da75ad540c0"/>
-    <p:sldId xmlns:r="http://schemas.openxmlformats.org/officeDocument/2006/relationships" id="257" r:id="Re810a16f9f87479f"/>
-    <p:sldId xmlns:r="http://schemas.openxmlformats.org/officeDocument/2006/relationships" id="258" r:id="R71b14251ac844176"/>
-    <p:sldId xmlns:r="http://schemas.openxmlformats.org/officeDocument/2006/relationships" id="259" r:id="R7686e39e3dbc4586"/>
-    <p:sldId xmlns:r="http://schemas.openxmlformats.org/officeDocument/2006/relationships" id="260" r:id="R87449a2c7a864bb6"/>
-    <p:sldId xmlns:r="http://schemas.openxmlformats.org/officeDocument/2006/relationships" id="261" r:id="Rcf54b58ba2a44694"/>
-    <p:sldId xmlns:r="http://schemas.openxmlformats.org/officeDocument/2006/relationships" id="262" r:id="R443d2796c2ee438d"/>
-    <p:sldId xmlns:r="http://schemas.openxmlformats.org/officeDocument/2006/relationships" id="263" r:id="R70a9adda1de34659"/>
-    <p:sldId xmlns:r="http://schemas.openxmlformats.org/officeDocument/2006/relationships" id="264" r:id="Rc3e0373e1d5b4567"/>
-    <p:sldId xmlns:r="http://schemas.openxmlformats.org/officeDocument/2006/relationships" id="265" r:id="R2567b8c64da54d4a"/>
-    <p:sldId xmlns:r="http://schemas.openxmlformats.org/officeDocument/2006/relationships" id="266" r:id="Rb65c26856db447cd"/>
-    <p:sldId xmlns:r="http://schemas.openxmlformats.org/officeDocument/2006/relationships" id="267" r:id="R0ef1deb4da5745b8"/>
-    <p:sldId xmlns:r="http://schemas.openxmlformats.org/officeDocument/2006/relationships" id="268" r:id="R80c66bb817e8447e"/>
-    <p:sldId xmlns:r="http://schemas.openxmlformats.org/officeDocument/2006/relationships" id="269" r:id="R147f042a601e4f75"/>
-    <p:sldId xmlns:r="http://schemas.openxmlformats.org/officeDocument/2006/relationships" id="270" r:id="R40dd03e307264eb4"/>
-    <p:sldId xmlns:r="http://schemas.openxmlformats.org/officeDocument/2006/relationships" id="271" r:id="Rc64a3428559e49fe"/>
-    <p:sldId xmlns:r="http://schemas.openxmlformats.org/officeDocument/2006/relationships" id="272" r:id="R8566b30baff745aa"/>
-    <p:sldId xmlns:r="http://schemas.openxmlformats.org/officeDocument/2006/relationships" id="273" r:id="R55820827e8da4d7b"/>
-    <p:sldId xmlns:r="http://schemas.openxmlformats.org/officeDocument/2006/relationships" id="274" r:id="Rdae483cc06fa4a6a"/>
-    <p:sldId xmlns:r="http://schemas.openxmlformats.org/officeDocument/2006/relationships" id="275" r:id="Rad2754ecf4124c4b"/>
+    <p:sldId xmlns:r="http://schemas.openxmlformats.org/officeDocument/2006/relationships" id="256" r:id="R7202760d7ce24bd6"/>
+    <p:sldId xmlns:r="http://schemas.openxmlformats.org/officeDocument/2006/relationships" id="257" r:id="Rba0351aba05148d8"/>
+    <p:sldId xmlns:r="http://schemas.openxmlformats.org/officeDocument/2006/relationships" id="258" r:id="R3326e609bd10472b"/>
+    <p:sldId xmlns:r="http://schemas.openxmlformats.org/officeDocument/2006/relationships" id="259" r:id="R222296769681453e"/>
+    <p:sldId xmlns:r="http://schemas.openxmlformats.org/officeDocument/2006/relationships" id="260" r:id="Re674599788234236"/>
+    <p:sldId xmlns:r="http://schemas.openxmlformats.org/officeDocument/2006/relationships" id="261" r:id="R3acde0f1cb5d44c9"/>
+    <p:sldId xmlns:r="http://schemas.openxmlformats.org/officeDocument/2006/relationships" id="262" r:id="R9ca4bf2a235e4f5f"/>
+    <p:sldId xmlns:r="http://schemas.openxmlformats.org/officeDocument/2006/relationships" id="263" r:id="R960c67cbd7134998"/>
+    <p:sldId xmlns:r="http://schemas.openxmlformats.org/officeDocument/2006/relationships" id="264" r:id="Re46c286c274844a5"/>
+    <p:sldId xmlns:r="http://schemas.openxmlformats.org/officeDocument/2006/relationships" id="265" r:id="Ra9c079736ba241f7"/>
+    <p:sldId xmlns:r="http://schemas.openxmlformats.org/officeDocument/2006/relationships" id="266" r:id="R66ebfe113d204cf6"/>
+    <p:sldId xmlns:r="http://schemas.openxmlformats.org/officeDocument/2006/relationships" id="267" r:id="Rff0b335f96b24c20"/>
+    <p:sldId xmlns:r="http://schemas.openxmlformats.org/officeDocument/2006/relationships" id="268" r:id="R507b4fc3e082498b"/>
+    <p:sldId xmlns:r="http://schemas.openxmlformats.org/officeDocument/2006/relationships" id="269" r:id="Rcc2cf582b3d54684"/>
+    <p:sldId xmlns:r="http://schemas.openxmlformats.org/officeDocument/2006/relationships" id="270" r:id="R48b795e831254ccc"/>
+    <p:sldId xmlns:r="http://schemas.openxmlformats.org/officeDocument/2006/relationships" id="271" r:id="Rbfe51c2fe2aa4beb"/>
+    <p:sldId xmlns:r="http://schemas.openxmlformats.org/officeDocument/2006/relationships" id="272" r:id="R0d6490f4771844c6"/>
+    <p:sldId xmlns:r="http://schemas.openxmlformats.org/officeDocument/2006/relationships" id="273" r:id="Rd38b64a8e10b476b"/>
+    <p:sldId xmlns:r="http://schemas.openxmlformats.org/officeDocument/2006/relationships" id="274" r:id="R5d7be5424e1d449c"/>
+    <p:sldId xmlns:r="http://schemas.openxmlformats.org/officeDocument/2006/relationships" id="275" r:id="R9e6fffdddda14880"/>
   </p:sldIdLst>
   <p:sldSz cx="12192000" cy="6858000"/>
   <p:notesSz cx="6858000" cy="9144000"/>
@@ -462,7 +462,57 @@
           <a:lstStyle xmlns:a="http://schemas.openxmlformats.org/drawingml/2006/main"/>
           <a:p xmlns:a="http://schemas.openxmlformats.org/drawingml/2006/main">
             <a:r>
-              <a:t>Apresente o objetivo do EPISÓDIO 2 e conecte-o ao checkpoint executável. Duas tabelas Gold corretas ainda podem responder receita com números diferentes.</a:t>
+              <a:t>[Roteiro recomendado]</a:t>
+            </a:r>
+          </a:p>
+          <a:p xmlns:a="http://schemas.openxmlformats.org/drawingml/2006/main">
+            <a:r>
+              <a:t>[Tempo sugerido: 00:45]</a:t>
+            </a:r>
+          </a:p>
+          <a:p xmlns:a="http://schemas.openxmlformats.org/drawingml/2006/main">
+            <a:r>
+              <a:t/>
+            </a:r>
+          </a:p>
+          <a:p xmlns:a="http://schemas.openxmlformats.org/drawingml/2006/main">
+            <a:r>
+              <a:t>Fala sugerida:</a:t>
+            </a:r>
+          </a:p>
+          <a:p xmlns:a="http://schemas.openxmlformats.org/drawingml/2006/main">
+            <a:r>
+              <a:t>Bem-vindo ao episódio 2 do dbt Moderno na Prática. Hoje vamos trabalhar o tema “Gold não é camada semântica”. Dados preparados não garantem significado compartilhado. O objetivo não é apenas conhecer o conceito: vamos conectá-lo ao laboratório e terminar com uma evidência que você consegue reproduzir no seu próprio ambiente. Ao longo da aula, separe sempre o que é recurso aberto e estável daquilo que aparecerá apenas no Radar.</a:t>
+            </a:r>
+          </a:p>
+          <a:p xmlns:a="http://schemas.openxmlformats.org/drawingml/2006/main">
+            <a:r>
+              <a:t/>
+            </a:r>
+          </a:p>
+          <a:p xmlns:a="http://schemas.openxmlformats.org/drawingml/2006/main">
+            <a:r>
+              <a:t>O que destacar:</a:t>
+            </a:r>
+          </a:p>
+          <a:p xmlns:a="http://schemas.openxmlformats.org/drawingml/2006/main">
+            <a:r>
+              <a:t>- Apresente o título, situe o checkpoint 02 e deixe claro que a aula faz parte da trilha open/stable.</a:t>
+            </a:r>
+          </a:p>
+          <a:p xmlns:a="http://schemas.openxmlformats.org/drawingml/2006/main">
+            <a:r>
+              <a:t/>
+            </a:r>
+          </a:p>
+          <a:p xmlns:a="http://schemas.openxmlformats.org/drawingml/2006/main">
+            <a:r>
+              <a:t>Transição:</a:t>
+            </a:r>
+          </a:p>
+          <a:p xmlns:a="http://schemas.openxmlformats.org/drawingml/2006/main">
+            <a:r>
+              <a:t>Com esse ponto estabelecido, avance para “Duas tabelas Gold corretas ainda podem responder receita com números diferentes.”.</a:t>
             </a:r>
           </a:p>
           <a:p xmlns:a="http://schemas.openxmlformats.org/drawingml/2006/main">
@@ -577,7 +627,57 @@
           <a:lstStyle xmlns:a="http://schemas.openxmlformats.org/drawingml/2006/main"/>
           <a:p xmlns:a="http://schemas.openxmlformats.org/drawingml/2006/main">
             <a:r>
-              <a:t>Use a composição para explicar visualmente: Entidades e relações precisam anteceder a agregação. Chave primária real Relações verificáveis Agregação antes do join</a:t>
+              <a:t>[Roteiro recomendado]</a:t>
+            </a:r>
+          </a:p>
+          <a:p xmlns:a="http://schemas.openxmlformats.org/drawingml/2006/main">
+            <a:r>
+              <a:t>[Tempo sugerido: 00:55]</a:t>
+            </a:r>
+          </a:p>
+          <a:p xmlns:a="http://schemas.openxmlformats.org/drawingml/2006/main">
+            <a:r>
+              <a:t/>
+            </a:r>
+          </a:p>
+          <a:p xmlns:a="http://schemas.openxmlformats.org/drawingml/2006/main">
+            <a:r>
+              <a:t>Fala sugerida:</a:t>
+            </a:r>
+          </a:p>
+          <a:p xmlns:a="http://schemas.openxmlformats.org/drawingml/2006/main">
+            <a:r>
+              <a:t>Agora vamos ler a ideia visualmente. Entidades e relações precisam anteceder a agregação. Siga a composição na ordem mostrada e conecte os elementos principais. A imagem ou o fluxo não cria uma regra nova; ele torna visível a relação que acabamos de explicar. A figura é identificada como figura oficial da documentação dbt — Apache 2.0</a:t>
+            </a:r>
+          </a:p>
+          <a:p xmlns:a="http://schemas.openxmlformats.org/drawingml/2006/main">
+            <a:r>
+              <a:t/>
+            </a:r>
+          </a:p>
+          <a:p xmlns:a="http://schemas.openxmlformats.org/drawingml/2006/main">
+            <a:r>
+              <a:t>O que destacar:</a:t>
+            </a:r>
+          </a:p>
+          <a:p xmlns:a="http://schemas.openxmlformats.org/drawingml/2006/main">
+            <a:r>
+              <a:t>- Aponte a legenda e deixe explícito quando a figura é oficial; as anotações do curso ficam fora da imagem.</a:t>
+            </a:r>
+          </a:p>
+          <a:p xmlns:a="http://schemas.openxmlformats.org/drawingml/2006/main">
+            <a:r>
+              <a:t/>
+            </a:r>
+          </a:p>
+          <a:p xmlns:a="http://schemas.openxmlformats.org/drawingml/2006/main">
+            <a:r>
+              <a:t>Transição:</a:t>
+            </a:r>
+          </a:p>
+          <a:p xmlns:a="http://schemas.openxmlformats.org/drawingml/2006/main">
+            <a:r>
+              <a:t>Com esse ponto estabelecido, avance para “Métricas válidas precisam de nomes distintos”.</a:t>
             </a:r>
           </a:p>
           <a:p xmlns:a="http://schemas.openxmlformats.org/drawingml/2006/main">
@@ -697,7 +797,57 @@
           <a:lstStyle xmlns:a="http://schemas.openxmlformats.org/drawingml/2006/main"/>
           <a:p xmlns:a="http://schemas.openxmlformats.org/drawingml/2006/main">
             <a:r>
-              <a:t>Receita bruta e receita entregue respondem perguntas diferentes. Desenvolva os pontos: orders; gross_revenue; delivered_revenue; average_order_value.</a:t>
+              <a:t>[Roteiro recomendado]</a:t>
+            </a:r>
+          </a:p>
+          <a:p xmlns:a="http://schemas.openxmlformats.org/drawingml/2006/main">
+            <a:r>
+              <a:t>[Tempo sugerido: 01:10]</a:t>
+            </a:r>
+          </a:p>
+          <a:p xmlns:a="http://schemas.openxmlformats.org/drawingml/2006/main">
+            <a:r>
+              <a:t/>
+            </a:r>
+          </a:p>
+          <a:p xmlns:a="http://schemas.openxmlformats.org/drawingml/2006/main">
+            <a:r>
+              <a:t>Fala sugerida:</a:t>
+            </a:r>
+          </a:p>
+          <a:p xmlns:a="http://schemas.openxmlformats.org/drawingml/2006/main">
+            <a:r>
+              <a:t>A mensagem principal deste slide é: Receita bruta e receita entregue respondem perguntas diferentes. Para tornar isso concreto, observe orders, gross_revenue, delivered_revenue e average_order_value. Esses pontos devem ser entendidos em conjunto; não são funcionalidades isoladas. No projeto, essa combinação transforma uma convenção informal em algo que pode ser revisado, testado ou consumido de maneira consistente.</a:t>
+            </a:r>
+          </a:p>
+          <a:p xmlns:a="http://schemas.openxmlformats.org/drawingml/2006/main">
+            <a:r>
+              <a:t/>
+            </a:r>
+          </a:p>
+          <a:p xmlns:a="http://schemas.openxmlformats.org/drawingml/2006/main">
+            <a:r>
+              <a:t>O que destacar:</a:t>
+            </a:r>
+          </a:p>
+          <a:p xmlns:a="http://schemas.openxmlformats.org/drawingml/2006/main">
+            <a:r>
+              <a:t>- Comece pelo título, leia a afirmação abaixo dele e depois desenvolva os itens sem repetir o texto palavra por palavra.</a:t>
+            </a:r>
+          </a:p>
+          <a:p xmlns:a="http://schemas.openxmlformats.org/drawingml/2006/main">
+            <a:r>
+              <a:t/>
+            </a:r>
+          </a:p>
+          <a:p xmlns:a="http://schemas.openxmlformats.org/drawingml/2006/main">
+            <a:r>
+              <a:t>Transição:</a:t>
+            </a:r>
+          </a:p>
+          <a:p xmlns:a="http://schemas.openxmlformats.org/drawingml/2006/main">
+            <a:r>
+              <a:t>Com esse ponto estabelecido, avance para “Métricas válidas precisam de nomes distintos”.</a:t>
             </a:r>
           </a:p>
           <a:p xmlns:a="http://schemas.openxmlformats.org/drawingml/2006/main">
@@ -812,7 +962,57 @@
           <a:lstStyle xmlns:a="http://schemas.openxmlformats.org/drawingml/2006/main"/>
           <a:p xmlns:a="http://schemas.openxmlformats.org/drawingml/2006/main">
             <a:r>
-              <a:t>Use a composição para explicar visualmente: Receita bruta e receita entregue respondem perguntas diferentes. orders gross_revenue delivered_revenue average_order_value</a:t>
+              <a:t>[Roteiro recomendado]</a:t>
+            </a:r>
+          </a:p>
+          <a:p xmlns:a="http://schemas.openxmlformats.org/drawingml/2006/main">
+            <a:r>
+              <a:t>[Tempo sugerido: 00:55]</a:t>
+            </a:r>
+          </a:p>
+          <a:p xmlns:a="http://schemas.openxmlformats.org/drawingml/2006/main">
+            <a:r>
+              <a:t/>
+            </a:r>
+          </a:p>
+          <a:p xmlns:a="http://schemas.openxmlformats.org/drawingml/2006/main">
+            <a:r>
+              <a:t>Fala sugerida:</a:t>
+            </a:r>
+          </a:p>
+          <a:p xmlns:a="http://schemas.openxmlformats.org/drawingml/2006/main">
+            <a:r>
+              <a:t>Agora vamos ler a ideia visualmente. Receita bruta e receita entregue respondem perguntas diferentes. Siga a composição na ordem mostrada e conecte receita bruta, Receita entregue, orders, gross_revenue, delivered_revenue e average_order_value. A imagem ou o fluxo não cria uma regra nova; ele torna visível a relação que acabamos de explicar. Use a disposição dos elementos para reforçar causa, dependência ou comparação.</a:t>
+            </a:r>
+          </a:p>
+          <a:p xmlns:a="http://schemas.openxmlformats.org/drawingml/2006/main">
+            <a:r>
+              <a:t/>
+            </a:r>
+          </a:p>
+          <a:p xmlns:a="http://schemas.openxmlformats.org/drawingml/2006/main">
+            <a:r>
+              <a:t>O que destacar:</a:t>
+            </a:r>
+          </a:p>
+          <a:p xmlns:a="http://schemas.openxmlformats.org/drawingml/2006/main">
+            <a:r>
+              <a:t>- Acompanhe o fluxo ou a comparação com o cursor e preserve a ordem de leitura do slide.</a:t>
+            </a:r>
+          </a:p>
+          <a:p xmlns:a="http://schemas.openxmlformats.org/drawingml/2006/main">
+            <a:r>
+              <a:t/>
+            </a:r>
+          </a:p>
+          <a:p xmlns:a="http://schemas.openxmlformats.org/drawingml/2006/main">
+            <a:r>
+              <a:t>Transição:</a:t>
+            </a:r>
+          </a:p>
+          <a:p xmlns:a="http://schemas.openxmlformats.org/drawingml/2006/main">
+            <a:r>
+              <a:t>Com esse ponto estabelecido, avance para “Demonstração — execute”.</a:t>
             </a:r>
           </a:p>
           <a:p xmlns:a="http://schemas.openxmlformats.org/drawingml/2006/main">
@@ -927,7 +1127,57 @@
           <a:lstStyle xmlns:a="http://schemas.openxmlformats.org/drawingml/2006/main"/>
           <a:p xmlns:a="http://schemas.openxmlformats.org/drawingml/2006/main">
             <a:r>
-              <a:t>Execute python course.py checkpoint 02. Pause para o aluno acompanhar o terminal.</a:t>
+              <a:t>[Roteiro recomendado]</a:t>
+            </a:r>
+          </a:p>
+          <a:p xmlns:a="http://schemas.openxmlformats.org/drawingml/2006/main">
+            <a:r>
+              <a:t>[Tempo sugerido: 01:20]</a:t>
+            </a:r>
+          </a:p>
+          <a:p xmlns:a="http://schemas.openxmlformats.org/drawingml/2006/main">
+            <a:r>
+              <a:t/>
+            </a:r>
+          </a:p>
+          <a:p xmlns:a="http://schemas.openxmlformats.org/drawingml/2006/main">
+            <a:r>
+              <a:t>Fala sugerida:</a:t>
+            </a:r>
+          </a:p>
+          <a:p xmlns:a="http://schemas.openxmlformats.org/drawingml/2006/main">
+            <a:r>
+              <a:t>Agora vamos sair da explicação e comprovar o comportamento. Execute os comandos exatamente como aparecem: python course.py checkpoint 02. Não é necessário ativar o ambiente virtual manualmente; o launcher do curso seleciona o ambiente correto. Antes de avançar, confirme que o comando iniciou sem erro e dê tempo para o aluno acompanhar a mesma etapa.</a:t>
+            </a:r>
+          </a:p>
+          <a:p xmlns:a="http://schemas.openxmlformats.org/drawingml/2006/main">
+            <a:r>
+              <a:t/>
+            </a:r>
+          </a:p>
+          <a:p xmlns:a="http://schemas.openxmlformats.org/drawingml/2006/main">
+            <a:r>
+              <a:t>O que destacar:</a:t>
+            </a:r>
+          </a:p>
+          <a:p xmlns:a="http://schemas.openxmlformats.org/drawingml/2006/main">
+            <a:r>
+              <a:t>- Mostre o comando completo, execute uma linha por vez quando houver mais de uma e mantenha o terminal visível.</a:t>
+            </a:r>
+          </a:p>
+          <a:p xmlns:a="http://schemas.openxmlformats.org/drawingml/2006/main">
+            <a:r>
+              <a:t/>
+            </a:r>
+          </a:p>
+          <a:p xmlns:a="http://schemas.openxmlformats.org/drawingml/2006/main">
+            <a:r>
+              <a:t>Transição:</a:t>
+            </a:r>
+          </a:p>
+          <a:p xmlns:a="http://schemas.openxmlformats.org/drawingml/2006/main">
+            <a:r>
+              <a:t>Com esse ponto estabelecido, avance para “Demonstração — observe”.</a:t>
             </a:r>
           </a:p>
           <a:p xmlns:a="http://schemas.openxmlformats.org/drawingml/2006/main">
@@ -1042,7 +1292,57 @@
           <a:lstStyle xmlns:a="http://schemas.openxmlformats.org/drawingml/2006/main"/>
           <a:p xmlns:a="http://schemas.openxmlformats.org/drawingml/2006/main">
             <a:r>
-              <a:t>Durante a execução, destaque: Gold no grão pedido; Fachada commerce_orders; 10 respostas reconciliadas.</a:t>
+              <a:t>[Roteiro recomendado]</a:t>
+            </a:r>
+          </a:p>
+          <a:p xmlns:a="http://schemas.openxmlformats.org/drawingml/2006/main">
+            <a:r>
+              <a:t>[Tempo sugerido: 01:10]</a:t>
+            </a:r>
+          </a:p>
+          <a:p xmlns:a="http://schemas.openxmlformats.org/drawingml/2006/main">
+            <a:r>
+              <a:t/>
+            </a:r>
+          </a:p>
+          <a:p xmlns:a="http://schemas.openxmlformats.org/drawingml/2006/main">
+            <a:r>
+              <a:t>Fala sugerida:</a:t>
+            </a:r>
+          </a:p>
+          <a:p xmlns:a="http://schemas.openxmlformats.org/drawingml/2006/main">
+            <a:r>
+              <a:t>Enquanto a execução acontece, não olhe apenas para a mensagem final. Observe gold no grão pedido, Fachada commerce_orders e 10 respostas reconciliadas. Cada sinal responde a uma pergunta diferente sobre o pipeline. Se um deles divergir, interrompa a demonstração e investigue; o objetivo do hands-on é produzir evidência, não apenas chegar rapidamente a uma tela verde.</a:t>
+            </a:r>
+          </a:p>
+          <a:p xmlns:a="http://schemas.openxmlformats.org/drawingml/2006/main">
+            <a:r>
+              <a:t/>
+            </a:r>
+          </a:p>
+          <a:p xmlns:a="http://schemas.openxmlformats.org/drawingml/2006/main">
+            <a:r>
+              <a:t>O que destacar:</a:t>
+            </a:r>
+          </a:p>
+          <a:p xmlns:a="http://schemas.openxmlformats.org/drawingml/2006/main">
+            <a:r>
+              <a:t>- Marque cada observação quando ela aparecer no terminal ou no artifact correspondente.</a:t>
+            </a:r>
+          </a:p>
+          <a:p xmlns:a="http://schemas.openxmlformats.org/drawingml/2006/main">
+            <a:r>
+              <a:t/>
+            </a:r>
+          </a:p>
+          <a:p xmlns:a="http://schemas.openxmlformats.org/drawingml/2006/main">
+            <a:r>
+              <a:t>Transição:</a:t>
+            </a:r>
+          </a:p>
+          <a:p xmlns:a="http://schemas.openxmlformats.org/drawingml/2006/main">
+            <a:r>
+              <a:t>Com esse ponto estabelecido, avance para “RESULTADO ESPERADO”.</a:t>
             </a:r>
           </a:p>
           <a:p xmlns:a="http://schemas.openxmlformats.org/drawingml/2006/main">
@@ -1157,7 +1457,57 @@
           <a:lstStyle xmlns:a="http://schemas.openxmlformats.org/drawingml/2006/main"/>
           <a:p xmlns:a="http://schemas.openxmlformats.org/drawingml/2006/main">
             <a:r>
-              <a:t>Confirme o resultado esperado: Ground truth OK: 10 perguntas. Se o valor divergir, não avance sem investigar.</a:t>
+              <a:t>[Roteiro recomendado]</a:t>
+            </a:r>
+          </a:p>
+          <a:p xmlns:a="http://schemas.openxmlformats.org/drawingml/2006/main">
+            <a:r>
+              <a:t>[Tempo sugerido: 00:45]</a:t>
+            </a:r>
+          </a:p>
+          <a:p xmlns:a="http://schemas.openxmlformats.org/drawingml/2006/main">
+            <a:r>
+              <a:t/>
+            </a:r>
+          </a:p>
+          <a:p xmlns:a="http://schemas.openxmlformats.org/drawingml/2006/main">
+            <a:r>
+              <a:t>Fala sugerida:</a:t>
+            </a:r>
+          </a:p>
+          <a:p xmlns:a="http://schemas.openxmlformats.org/drawingml/2006/main">
+            <a:r>
+              <a:t>Este é o ponto de parada da demonstração: Ground truth OK: 10 perguntas. Esse resultado confirma que a etapa executada produziu a evidência esperada para o checkpoint 02. Se o valor, o status ou o artifact estiver diferente, não trate a divergência como detalhe de ambiente. Use o diagnóstico do curso e só avance quando a causa estiver compreendida.</a:t>
+            </a:r>
+          </a:p>
+          <a:p xmlns:a="http://schemas.openxmlformats.org/drawingml/2006/main">
+            <a:r>
+              <a:t/>
+            </a:r>
+          </a:p>
+          <a:p xmlns:a="http://schemas.openxmlformats.org/drawingml/2006/main">
+            <a:r>
+              <a:t>O que destacar:</a:t>
+            </a:r>
+          </a:p>
+          <a:p xmlns:a="http://schemas.openxmlformats.org/drawingml/2006/main">
+            <a:r>
+              <a:t>- Compare o resultado do terminal com a frase central do slide e registre a evidência antes de continuar.</a:t>
+            </a:r>
+          </a:p>
+          <a:p xmlns:a="http://schemas.openxmlformats.org/drawingml/2006/main">
+            <a:r>
+              <a:t/>
+            </a:r>
+          </a:p>
+          <a:p xmlns:a="http://schemas.openxmlformats.org/drawingml/2006/main">
+            <a:r>
+              <a:t>Transição:</a:t>
+            </a:r>
+          </a:p>
+          <a:p xmlns:a="http://schemas.openxmlformats.org/drawingml/2006/main">
+            <a:r>
+              <a:t>Com esse ponto estabelecido, avance para “O mesmo recurso afeta três decisões”.</a:t>
             </a:r>
           </a:p>
           <a:p xmlns:a="http://schemas.openxmlformats.org/drawingml/2006/main">
@@ -1272,7 +1622,57 @@
           <a:lstStyle xmlns:a="http://schemas.openxmlformats.org/drawingml/2006/main"/>
           <a:p xmlns:a="http://schemas.openxmlformats.org/drawingml/2006/main">
             <a:r>
-              <a:t>Conecte a técnica aos efeitos: Governança: nomes e owners; FinOps: menos joins exploratórios; IA: menos decisões probabilísticas. Não prometa economia sem medição.</a:t>
+              <a:t>[Roteiro recomendado]</a:t>
+            </a:r>
+          </a:p>
+          <a:p xmlns:a="http://schemas.openxmlformats.org/drawingml/2006/main">
+            <a:r>
+              <a:t>[Tempo sugerido: 01:00]</a:t>
+            </a:r>
+          </a:p>
+          <a:p xmlns:a="http://schemas.openxmlformats.org/drawingml/2006/main">
+            <a:r>
+              <a:t/>
+            </a:r>
+          </a:p>
+          <a:p xmlns:a="http://schemas.openxmlformats.org/drawingml/2006/main">
+            <a:r>
+              <a:t>Fala sugerida:</a:t>
+            </a:r>
+          </a:p>
+          <a:p xmlns:a="http://schemas.openxmlformats.org/drawingml/2006/main">
+            <a:r>
+              <a:t>Antes de seguir, conecte a técnica às decisões que ela afeta: Governança: nomes e owners, FinOps: menos joins exploratórios e IA: menos decisões probabilísticas. Governança define responsabilidade e consistência; FinOps pergunta quanto trabalho estamos repetindo; e IA depende do contexto que decidimos expor. A mesma implementação pode melhorar os três eixos, mas os ganhos devem ser medidos separadamente.</a:t>
+            </a:r>
+          </a:p>
+          <a:p xmlns:a="http://schemas.openxmlformats.org/drawingml/2006/main">
+            <a:r>
+              <a:t/>
+            </a:r>
+          </a:p>
+          <a:p xmlns:a="http://schemas.openxmlformats.org/drawingml/2006/main">
+            <a:r>
+              <a:t>O que destacar:</a:t>
+            </a:r>
+          </a:p>
+          <a:p xmlns:a="http://schemas.openxmlformats.org/drawingml/2006/main">
+            <a:r>
+              <a:t>- Percorra os três eixos e evite apresentar economia ou acurácia como consequência automática.</a:t>
+            </a:r>
+          </a:p>
+          <a:p xmlns:a="http://schemas.openxmlformats.org/drawingml/2006/main">
+            <a:r>
+              <a:t/>
+            </a:r>
+          </a:p>
+          <a:p xmlns:a="http://schemas.openxmlformats.org/drawingml/2006/main">
+            <a:r>
+              <a:t>Transição:</a:t>
+            </a:r>
+          </a:p>
+          <a:p xmlns:a="http://schemas.openxmlformats.org/drawingml/2006/main">
+            <a:r>
+              <a:t>Com esse ponto estabelecido, avance para “83 métricas”.</a:t>
             </a:r>
           </a:p>
           <a:p xmlns:a="http://schemas.openxmlformats.org/drawingml/2006/main">
@@ -1387,7 +1787,57 @@
           <a:lstStyle xmlns:a="http://schemas.openxmlformats.org/drawingml/2006/main"/>
           <a:p xmlns:a="http://schemas.openxmlformats.org/drawingml/2006/main">
             <a:r>
-              <a:t>83 métricas: centralizadas pela Inventa. 90% de redução de manutenção reportada pela empresa/dbt Labs.</a:t>
+              <a:t>[Roteiro recomendado]</a:t>
+            </a:r>
+          </a:p>
+          <a:p xmlns:a="http://schemas.openxmlformats.org/drawingml/2006/main">
+            <a:r>
+              <a:t>[Tempo sugerido: 00:55]</a:t>
+            </a:r>
+          </a:p>
+          <a:p xmlns:a="http://schemas.openxmlformats.org/drawingml/2006/main">
+            <a:r>
+              <a:t/>
+            </a:r>
+          </a:p>
+          <a:p xmlns:a="http://schemas.openxmlformats.org/drawingml/2006/main">
+            <a:r>
+              <a:t>Fala sugerida:</a:t>
+            </a:r>
+          </a:p>
+          <a:p xmlns:a="http://schemas.openxmlformats.org/drawingml/2006/main">
+            <a:r>
+              <a:t>Aqui temos 83 métricas: centralizadas pela Inventa. O número ajuda a dimensionar o exemplo, mas precisa ser lido com a ressalva correta. 90% de redução de manutenção reportada pela empresa/dbt Labs. Use o case como evidência contextual e não como promessa de que outro projeto repetirá o mesmo resultado sem as mesmas condições.</a:t>
+            </a:r>
+          </a:p>
+          <a:p xmlns:a="http://schemas.openxmlformats.org/drawingml/2006/main">
+            <a:r>
+              <a:t/>
+            </a:r>
+          </a:p>
+          <a:p xmlns:a="http://schemas.openxmlformats.org/drawingml/2006/main">
+            <a:r>
+              <a:t>O que destacar:</a:t>
+            </a:r>
+          </a:p>
+          <a:p xmlns:a="http://schemas.openxmlformats.org/drawingml/2006/main">
+            <a:r>
+              <a:t>- Apresente primeiro o número, depois a definição e termine obrigatoriamente com a ressalva.</a:t>
+            </a:r>
+          </a:p>
+          <a:p xmlns:a="http://schemas.openxmlformats.org/drawingml/2006/main">
+            <a:r>
+              <a:t/>
+            </a:r>
+          </a:p>
+          <a:p xmlns:a="http://schemas.openxmlformats.org/drawingml/2006/main">
+            <a:r>
+              <a:t>Transição:</a:t>
+            </a:r>
+          </a:p>
+          <a:p xmlns:a="http://schemas.openxmlformats.org/drawingml/2006/main">
+            <a:r>
+              <a:t>Com esse ponto estabelecido, avance para “Limitações que precisam permanecer visíveis”.</a:t>
             </a:r>
           </a:p>
           <a:p xmlns:a="http://schemas.openxmlformats.org/drawingml/2006/main">
@@ -1502,7 +1952,57 @@
           <a:lstStyle xmlns:a="http://schemas.openxmlformats.org/drawingml/2006/main"/>
           <a:p xmlns:a="http://schemas.openxmlformats.org/drawingml/2006/main">
             <a:r>
-              <a:t>Apresente os limites sem minimizá-los: YAML não resolve desacordo de negócio; Semântica não corrige fonte atrasada; Distinct não é cura para cardinalidade.</a:t>
+              <a:t>[Roteiro recomendado]</a:t>
+            </a:r>
+          </a:p>
+          <a:p xmlns:a="http://schemas.openxmlformats.org/drawingml/2006/main">
+            <a:r>
+              <a:t>[Tempo sugerido: 01:00]</a:t>
+            </a:r>
+          </a:p>
+          <a:p xmlns:a="http://schemas.openxmlformats.org/drawingml/2006/main">
+            <a:r>
+              <a:t/>
+            </a:r>
+          </a:p>
+          <a:p xmlns:a="http://schemas.openxmlformats.org/drawingml/2006/main">
+            <a:r>
+              <a:t>Fala sugerida:</a:t>
+            </a:r>
+          </a:p>
+          <a:p xmlns:a="http://schemas.openxmlformats.org/drawingml/2006/main">
+            <a:r>
+              <a:t>Também precisamos declarar os limites da recomendação. Neste cenário, considere YAML não resolve desacordo de negócio, Semântica não corrige fonte atrasada e Distinct não é cura para cardinalidade. Esses pontos não anulam a técnica; eles delimitam onde a demonstração é válida e quais condições precisam ser verificadas antes de levar o padrão para produção. Tratar limites como parte do design evita transformar uma boa prática em regra universal.</a:t>
+            </a:r>
+          </a:p>
+          <a:p xmlns:a="http://schemas.openxmlformats.org/drawingml/2006/main">
+            <a:r>
+              <a:t/>
+            </a:r>
+          </a:p>
+          <a:p xmlns:a="http://schemas.openxmlformats.org/drawingml/2006/main">
+            <a:r>
+              <a:t>O que destacar:</a:t>
+            </a:r>
+          </a:p>
+          <a:p xmlns:a="http://schemas.openxmlformats.org/drawingml/2006/main">
+            <a:r>
+              <a:t>- Leia os limites com o mesmo peso dado aos benefícios e diferencie restrição do laboratório de restrição do produto.</a:t>
+            </a:r>
+          </a:p>
+          <a:p xmlns:a="http://schemas.openxmlformats.org/drawingml/2006/main">
+            <a:r>
+              <a:t/>
+            </a:r>
+          </a:p>
+          <a:p xmlns:a="http://schemas.openxmlformats.org/drawingml/2006/main">
+            <a:r>
+              <a:t>Transição:</a:t>
+            </a:r>
+          </a:p>
+          <a:p xmlns:a="http://schemas.openxmlformats.org/drawingml/2006/main">
+            <a:r>
+              <a:t>Com esse ponto estabelecido, avance para “RADAR”.</a:t>
             </a:r>
           </a:p>
           <a:p xmlns:a="http://schemas.openxmlformats.org/drawingml/2006/main">
@@ -1617,7 +2117,57 @@
           <a:lstStyle xmlns:a="http://schemas.openxmlformats.org/drawingml/2006/main"/>
           <a:p xmlns:a="http://schemas.openxmlformats.org/drawingml/2006/main">
             <a:r>
-              <a:t>A sintaxe executada é a spec suportada no Core 1.12; cross-project futuro fica no Radar. Reforce que beta e preview não fazem parte da aceitação.</a:t>
+              <a:t>[Roteiro recomendado]</a:t>
+            </a:r>
+          </a:p>
+          <a:p xmlns:a="http://schemas.openxmlformats.org/drawingml/2006/main">
+            <a:r>
+              <a:t>[Tempo sugerido: 00:55]</a:t>
+            </a:r>
+          </a:p>
+          <a:p xmlns:a="http://schemas.openxmlformats.org/drawingml/2006/main">
+            <a:r>
+              <a:t/>
+            </a:r>
+          </a:p>
+          <a:p xmlns:a="http://schemas.openxmlformats.org/drawingml/2006/main">
+            <a:r>
+              <a:t>Fala sugerida:</a:t>
+            </a:r>
+          </a:p>
+          <a:p xmlns:a="http://schemas.openxmlformats.org/drawingml/2006/main">
+            <a:r>
+              <a:t>Este é o nosso Radar: A sintaxe executada é a spec suportada no Core 1.12; cross-project futuro fica no Radar. A intenção é mostrar a direção da ferramenta sem misturar preview com o caminho suportado da aula. Novidade observada não é recomendação de produção. Para adotar qualquer recurso futuro, confirme maturidade, adaptador, documentação e impacto sobre o projeto antes de alterar o baseline estável.</a:t>
+            </a:r>
+          </a:p>
+          <a:p xmlns:a="http://schemas.openxmlformats.org/drawingml/2006/main">
+            <a:r>
+              <a:t/>
+            </a:r>
+          </a:p>
+          <a:p xmlns:a="http://schemas.openxmlformats.org/drawingml/2006/main">
+            <a:r>
+              <a:t>O que destacar:</a:t>
+            </a:r>
+          </a:p>
+          <a:p xmlns:a="http://schemas.openxmlformats.org/drawingml/2006/main">
+            <a:r>
+              <a:t>- Reforce visualmente a regra do rodapé e não execute comandos beta ou preview como parte obrigatória da aula.</a:t>
+            </a:r>
+          </a:p>
+          <a:p xmlns:a="http://schemas.openxmlformats.org/drawingml/2006/main">
+            <a:r>
+              <a:t/>
+            </a:r>
+          </a:p>
+          <a:p xmlns:a="http://schemas.openxmlformats.org/drawingml/2006/main">
+            <a:r>
+              <a:t>Transição:</a:t>
+            </a:r>
+          </a:p>
+          <a:p xmlns:a="http://schemas.openxmlformats.org/drawingml/2006/main">
+            <a:r>
+              <a:t>Com esse ponto estabelecido, avance para “PRÓXIMO PASSO”.</a:t>
             </a:r>
           </a:p>
           <a:p xmlns:a="http://schemas.openxmlformats.org/drawingml/2006/main">
@@ -1732,7 +2282,57 @@
           <a:lstStyle xmlns:a="http://schemas.openxmlformats.org/drawingml/2006/main"/>
           <a:p xmlns:a="http://schemas.openxmlformats.org/drawingml/2006/main">
             <a:r>
-              <a:t>Duas tabelas Gold corretas ainda podem responder receita com números diferentes. Use o diagrama para antecipar o problema que será comprovado no laboratório.</a:t>
+              <a:t>[Roteiro recomendado]</a:t>
+            </a:r>
+          </a:p>
+          <a:p xmlns:a="http://schemas.openxmlformats.org/drawingml/2006/main">
+            <a:r>
+              <a:t>[Tempo sugerido: 01:00]</a:t>
+            </a:r>
+          </a:p>
+          <a:p xmlns:a="http://schemas.openxmlformats.org/drawingml/2006/main">
+            <a:r>
+              <a:t/>
+            </a:r>
+          </a:p>
+          <a:p xmlns:a="http://schemas.openxmlformats.org/drawingml/2006/main">
+            <a:r>
+              <a:t>Fala sugerida:</a:t>
+            </a:r>
+          </a:p>
+          <a:p xmlns:a="http://schemas.openxmlformats.org/drawingml/2006/main">
+            <a:r>
+              <a:t>Quero começar com uma provocação: Duas tabelas Gold corretas ainda podem responder receita com números diferentes. Essa pergunta orienta toda a aula. Em vez de aceitar uma afirmação porque ela parece correta, vamos procurar uma definição verificável e uma demonstração executável. Guarde essa tensão, porque voltaremos a ela quando compararmos o conceito com o resultado do laboratório.</a:t>
+            </a:r>
+          </a:p>
+          <a:p xmlns:a="http://schemas.openxmlformats.org/drawingml/2006/main">
+            <a:r>
+              <a:t/>
+            </a:r>
+          </a:p>
+          <a:p xmlns:a="http://schemas.openxmlformats.org/drawingml/2006/main">
+            <a:r>
+              <a:t>O que destacar:</a:t>
+            </a:r>
+          </a:p>
+          <a:p xmlns:a="http://schemas.openxmlformats.org/drawingml/2006/main">
+            <a:r>
+              <a:t>- Dê uma pausa depois da provocação e use o diagrama como mapa do problema, sem explicar todas as etapas ainda.</a:t>
+            </a:r>
+          </a:p>
+          <a:p xmlns:a="http://schemas.openxmlformats.org/drawingml/2006/main">
+            <a:r>
+              <a:t/>
+            </a:r>
+          </a:p>
+          <a:p xmlns:a="http://schemas.openxmlformats.org/drawingml/2006/main">
+            <a:r>
+              <a:t>Transição:</a:t>
+            </a:r>
+          </a:p>
+          <a:p xmlns:a="http://schemas.openxmlformats.org/drawingml/2006/main">
+            <a:r>
+              <a:t>Com esse ponto estabelecido, avance para “Ao final, você consegue...”.</a:t>
             </a:r>
           </a:p>
           <a:p xmlns:a="http://schemas.openxmlformats.org/drawingml/2006/main">
@@ -1847,7 +2447,57 @@
           <a:lstStyle xmlns:a="http://schemas.openxmlformats.org/drawingml/2006/main"/>
           <a:p xmlns:a="http://schemas.openxmlformats.org/drawingml/2006/main">
             <a:r>
-              <a:t>Documente nome, pergunta, grão, filtro, data e owner de três métricas. Encerre conectando a aula ao próximo checkpoint.</a:t>
+              <a:t>[Roteiro recomendado]</a:t>
+            </a:r>
+          </a:p>
+          <a:p xmlns:a="http://schemas.openxmlformats.org/drawingml/2006/main">
+            <a:r>
+              <a:t>[Tempo sugerido: 00:40]</a:t>
+            </a:r>
+          </a:p>
+          <a:p xmlns:a="http://schemas.openxmlformats.org/drawingml/2006/main">
+            <a:r>
+              <a:t/>
+            </a:r>
+          </a:p>
+          <a:p xmlns:a="http://schemas.openxmlformats.org/drawingml/2006/main">
+            <a:r>
+              <a:t>Fala sugerida:</a:t>
+            </a:r>
+          </a:p>
+          <a:p xmlns:a="http://schemas.openxmlformats.org/drawingml/2006/main">
+            <a:r>
+              <a:t>Documente nome, pergunta, grão, filtro, data e owner de três métricas. Faça essa etapa antes de seguir para o próximo episódio, porque o curso é cumulativo e o checkpoint atual se torna a base da aula seguinte. Se houver divergência, use o relatório de suporte e registre o que foi observado. O objetivo é avançar com um estado conhecido e reproduzível, não apenas assistir ao conteúdo.</a:t>
+            </a:r>
+          </a:p>
+          <a:p xmlns:a="http://schemas.openxmlformats.org/drawingml/2006/main">
+            <a:r>
+              <a:t/>
+            </a:r>
+          </a:p>
+          <a:p xmlns:a="http://schemas.openxmlformats.org/drawingml/2006/main">
+            <a:r>
+              <a:t>O que destacar:</a:t>
+            </a:r>
+          </a:p>
+          <a:p xmlns:a="http://schemas.openxmlformats.org/drawingml/2006/main">
+            <a:r>
+              <a:t>- Mostre o checkpoint e indique no repositório onde ficam o roteiro, os comandos e as referências da aula.</a:t>
+            </a:r>
+          </a:p>
+          <a:p xmlns:a="http://schemas.openxmlformats.org/drawingml/2006/main">
+            <a:r>
+              <a:t/>
+            </a:r>
+          </a:p>
+          <a:p xmlns:a="http://schemas.openxmlformats.org/drawingml/2006/main">
+            <a:r>
+              <a:t>Transição:</a:t>
+            </a:r>
+          </a:p>
+          <a:p xmlns:a="http://schemas.openxmlformats.org/drawingml/2006/main">
+            <a:r>
+              <a:t>Encerre retomando a pergunta inicial e confirme que o aluno sabe qual ação executar depois do episódio 2.</a:t>
             </a:r>
           </a:p>
           <a:p xmlns:a="http://schemas.openxmlformats.org/drawingml/2006/main">
@@ -1962,7 +2612,57 @@
           <a:lstStyle xmlns:a="http://schemas.openxmlformats.org/drawingml/2006/main"/>
           <a:p xmlns:a="http://schemas.openxmlformats.org/drawingml/2006/main">
             <a:r>
-              <a:t>Explique os três resultados observáveis da aula: Separar Gold e semântica; Proteger o grão de pedido; Nomear métricas sem ambiguidade.</a:t>
+              <a:t>[Roteiro recomendado]</a:t>
+            </a:r>
+          </a:p>
+          <a:p xmlns:a="http://schemas.openxmlformats.org/drawingml/2006/main">
+            <a:r>
+              <a:t>[Tempo sugerido: 01:00]</a:t>
+            </a:r>
+          </a:p>
+          <a:p xmlns:a="http://schemas.openxmlformats.org/drawingml/2006/main">
+            <a:r>
+              <a:t/>
+            </a:r>
+          </a:p>
+          <a:p xmlns:a="http://schemas.openxmlformats.org/drawingml/2006/main">
+            <a:r>
+              <a:t>Fala sugerida:</a:t>
+            </a:r>
+          </a:p>
+          <a:p xmlns:a="http://schemas.openxmlformats.org/drawingml/2006/main">
+            <a:r>
+              <a:t>Ao final desta aula, você deverá conseguir separar Gold e semântica, Proteger o grão de pedido e Nomear métricas sem ambiguidade. Esses resultados formam uma sequência: primeiro entendemos a regra, depois observamos sua representação no projeto e, por fim, comprovamos o comportamento no checkpoint. Se alguma dessas três partes não estiver clara, volte ao slide correspondente antes de executar a demonstração.</a:t>
+            </a:r>
+          </a:p>
+          <a:p xmlns:a="http://schemas.openxmlformats.org/drawingml/2006/main">
+            <a:r>
+              <a:t/>
+            </a:r>
+          </a:p>
+          <a:p xmlns:a="http://schemas.openxmlformats.org/drawingml/2006/main">
+            <a:r>
+              <a:t>O que destacar:</a:t>
+            </a:r>
+          </a:p>
+          <a:p xmlns:a="http://schemas.openxmlformats.org/drawingml/2006/main">
+            <a:r>
+              <a:t>- Percorra os objetivos da esquerda para a direita e apresente-os como resultados observáveis, não como uma agenda abstrata.</a:t>
+            </a:r>
+          </a:p>
+          <a:p xmlns:a="http://schemas.openxmlformats.org/drawingml/2006/main">
+            <a:r>
+              <a:t/>
+            </a:r>
+          </a:p>
+          <a:p xmlns:a="http://schemas.openxmlformats.org/drawingml/2006/main">
+            <a:r>
+              <a:t>Transição:</a:t>
+            </a:r>
+          </a:p>
+          <a:p xmlns:a="http://schemas.openxmlformats.org/drawingml/2006/main">
+            <a:r>
+              <a:t>Com esse ponto estabelecido, avance para “Quatro perguntas revelam a interface ausente”.</a:t>
             </a:r>
           </a:p>
           <a:p xmlns:a="http://schemas.openxmlformats.org/drawingml/2006/main">
@@ -2077,7 +2777,57 @@
           <a:lstStyle xmlns:a="http://schemas.openxmlformats.org/drawingml/2006/main"/>
           <a:p xmlns:a="http://schemas.openxmlformats.org/drawingml/2006/main">
             <a:r>
-              <a:t>Grão, filtro, data e chave não podem ficar só na cabeça do autor. Desenvolva os pontos: Qual é o grão?; Receita inclui cancelados?; Qual data e qual chave?.</a:t>
+              <a:t>[Roteiro recomendado]</a:t>
+            </a:r>
+          </a:p>
+          <a:p xmlns:a="http://schemas.openxmlformats.org/drawingml/2006/main">
+            <a:r>
+              <a:t>[Tempo sugerido: 01:10]</a:t>
+            </a:r>
+          </a:p>
+          <a:p xmlns:a="http://schemas.openxmlformats.org/drawingml/2006/main">
+            <a:r>
+              <a:t/>
+            </a:r>
+          </a:p>
+          <a:p xmlns:a="http://schemas.openxmlformats.org/drawingml/2006/main">
+            <a:r>
+              <a:t>Fala sugerida:</a:t>
+            </a:r>
+          </a:p>
+          <a:p xmlns:a="http://schemas.openxmlformats.org/drawingml/2006/main">
+            <a:r>
+              <a:t>A mensagem principal deste slide é: Grão, filtro, data e chave não podem ficar só na cabeça do autor. Para tornar isso concreto, observe qual é o grão?, Receita inclui cancelados? e Qual data e qual chave?. Esses pontos devem ser entendidos em conjunto; não são funcionalidades isoladas. No projeto, essa combinação transforma uma convenção informal em algo que pode ser revisado, testado ou consumido de maneira consistente.</a:t>
+            </a:r>
+          </a:p>
+          <a:p xmlns:a="http://schemas.openxmlformats.org/drawingml/2006/main">
+            <a:r>
+              <a:t/>
+            </a:r>
+          </a:p>
+          <a:p xmlns:a="http://schemas.openxmlformats.org/drawingml/2006/main">
+            <a:r>
+              <a:t>O que destacar:</a:t>
+            </a:r>
+          </a:p>
+          <a:p xmlns:a="http://schemas.openxmlformats.org/drawingml/2006/main">
+            <a:r>
+              <a:t>- Comece pelo título, leia a afirmação abaixo dele e depois desenvolva os itens sem repetir o texto palavra por palavra.</a:t>
+            </a:r>
+          </a:p>
+          <a:p xmlns:a="http://schemas.openxmlformats.org/drawingml/2006/main">
+            <a:r>
+              <a:t/>
+            </a:r>
+          </a:p>
+          <a:p xmlns:a="http://schemas.openxmlformats.org/drawingml/2006/main">
+            <a:r>
+              <a:t>Transição:</a:t>
+            </a:r>
+          </a:p>
+          <a:p xmlns:a="http://schemas.openxmlformats.org/drawingml/2006/main">
+            <a:r>
+              <a:t>Com esse ponto estabelecido, avance para “Cinco conceitos, cinco responsabilidades”.</a:t>
             </a:r>
           </a:p>
           <a:p xmlns:a="http://schemas.openxmlformats.org/drawingml/2006/main">
@@ -2192,7 +2942,57 @@
           <a:lstStyle xmlns:a="http://schemas.openxmlformats.org/drawingml/2006/main"/>
           <a:p xmlns:a="http://schemas.openxmlformats.org/drawingml/2006/main">
             <a:r>
-              <a:t>Tabela Gold, dimensional, semantic model, métrica e serviço não são sinônimos. Desenvolva os pontos: Gold prepara; Modelo organiza; Métrica nomeia; Serviço opera.</a:t>
+              <a:t>[Roteiro recomendado]</a:t>
+            </a:r>
+          </a:p>
+          <a:p xmlns:a="http://schemas.openxmlformats.org/drawingml/2006/main">
+            <a:r>
+              <a:t>[Tempo sugerido: 01:10]</a:t>
+            </a:r>
+          </a:p>
+          <a:p xmlns:a="http://schemas.openxmlformats.org/drawingml/2006/main">
+            <a:r>
+              <a:t/>
+            </a:r>
+          </a:p>
+          <a:p xmlns:a="http://schemas.openxmlformats.org/drawingml/2006/main">
+            <a:r>
+              <a:t>Fala sugerida:</a:t>
+            </a:r>
+          </a:p>
+          <a:p xmlns:a="http://schemas.openxmlformats.org/drawingml/2006/main">
+            <a:r>
+              <a:t>A mensagem principal deste slide é: Tabela Gold, dimensional, semantic model, métrica e serviço não são sinônimos. Para tornar isso concreto, observe gold prepara, Modelo organiza, Métrica nomeia e Serviço opera. Esses pontos devem ser entendidos em conjunto; não são funcionalidades isoladas. No projeto, essa combinação transforma uma convenção informal em algo que pode ser revisado, testado ou consumido de maneira consistente.</a:t>
+            </a:r>
+          </a:p>
+          <a:p xmlns:a="http://schemas.openxmlformats.org/drawingml/2006/main">
+            <a:r>
+              <a:t/>
+            </a:r>
+          </a:p>
+          <a:p xmlns:a="http://schemas.openxmlformats.org/drawingml/2006/main">
+            <a:r>
+              <a:t>O que destacar:</a:t>
+            </a:r>
+          </a:p>
+          <a:p xmlns:a="http://schemas.openxmlformats.org/drawingml/2006/main">
+            <a:r>
+              <a:t>- Comece pelo título, leia a afirmação abaixo dele e depois desenvolva os itens sem repetir o texto palavra por palavra.</a:t>
+            </a:r>
+          </a:p>
+          <a:p xmlns:a="http://schemas.openxmlformats.org/drawingml/2006/main">
+            <a:r>
+              <a:t/>
+            </a:r>
+          </a:p>
+          <a:p xmlns:a="http://schemas.openxmlformats.org/drawingml/2006/main">
+            <a:r>
+              <a:t>Transição:</a:t>
+            </a:r>
+          </a:p>
+          <a:p xmlns:a="http://schemas.openxmlformats.org/drawingml/2006/main">
+            <a:r>
+              <a:t>Com esse ponto estabelecido, avance para “Cinco conceitos, cinco responsabilidades”.</a:t>
             </a:r>
           </a:p>
           <a:p xmlns:a="http://schemas.openxmlformats.org/drawingml/2006/main">
@@ -2307,7 +3107,57 @@
           <a:lstStyle xmlns:a="http://schemas.openxmlformats.org/drawingml/2006/main"/>
           <a:p xmlns:a="http://schemas.openxmlformats.org/drawingml/2006/main">
             <a:r>
-              <a:t>Use a composição para explicar visualmente: Tabela Gold, dimensional, semantic model, métrica e serviço não são sinônimos. Gold prepara Modelo organiza Métrica nomeia Serviço opera</a:t>
+              <a:t>[Roteiro recomendado]</a:t>
+            </a:r>
+          </a:p>
+          <a:p xmlns:a="http://schemas.openxmlformats.org/drawingml/2006/main">
+            <a:r>
+              <a:t>[Tempo sugerido: 00:55]</a:t>
+            </a:r>
+          </a:p>
+          <a:p xmlns:a="http://schemas.openxmlformats.org/drawingml/2006/main">
+            <a:r>
+              <a:t/>
+            </a:r>
+          </a:p>
+          <a:p xmlns:a="http://schemas.openxmlformats.org/drawingml/2006/main">
+            <a:r>
+              <a:t>Fala sugerida:</a:t>
+            </a:r>
+          </a:p>
+          <a:p xmlns:a="http://schemas.openxmlformats.org/drawingml/2006/main">
+            <a:r>
+              <a:t>Agora vamos ler a ideia visualmente. Tabela Gold, dimensional, semantic model, métrica e serviço não são sinônimos. Siga a composição na ordem mostrada e conecte gold, Dimensional, Semântica, Métrica e Serviço. A imagem ou o fluxo não cria uma regra nova; ele torna visível a relação que acabamos de explicar. Use a disposição dos elementos para reforçar causa, dependência ou comparação.</a:t>
+            </a:r>
+          </a:p>
+          <a:p xmlns:a="http://schemas.openxmlformats.org/drawingml/2006/main">
+            <a:r>
+              <a:t/>
+            </a:r>
+          </a:p>
+          <a:p xmlns:a="http://schemas.openxmlformats.org/drawingml/2006/main">
+            <a:r>
+              <a:t>O que destacar:</a:t>
+            </a:r>
+          </a:p>
+          <a:p xmlns:a="http://schemas.openxmlformats.org/drawingml/2006/main">
+            <a:r>
+              <a:t>- Acompanhe o fluxo ou a comparação com o cursor e preserve a ordem de leitura do slide.</a:t>
+            </a:r>
+          </a:p>
+          <a:p xmlns:a="http://schemas.openxmlformats.org/drawingml/2006/main">
+            <a:r>
+              <a:t/>
+            </a:r>
+          </a:p>
+          <a:p xmlns:a="http://schemas.openxmlformats.org/drawingml/2006/main">
+            <a:r>
+              <a:t>Transição:</a:t>
+            </a:r>
+          </a:p>
+          <a:p xmlns:a="http://schemas.openxmlformats.org/drawingml/2006/main">
+            <a:r>
+              <a:t>Com esse ponto estabelecido, avance para “Join válido pode multiplicar dinheiro”.</a:t>
             </a:r>
           </a:p>
           <a:p xmlns:a="http://schemas.openxmlformats.org/drawingml/2006/main">
@@ -2422,7 +3272,57 @@
           <a:lstStyle xmlns:a="http://schemas.openxmlformats.org/drawingml/2006/main"/>
           <a:p xmlns:a="http://schemas.openxmlformats.org/drawingml/2006/main">
             <a:r>
-              <a:t>Dois itens × dois pagamentos produzem quatro combinações. Desenvolva os pontos: O SQL compila; O grão muda; A soma fica falsa.</a:t>
+              <a:t>[Roteiro recomendado]</a:t>
+            </a:r>
+          </a:p>
+          <a:p xmlns:a="http://schemas.openxmlformats.org/drawingml/2006/main">
+            <a:r>
+              <a:t>[Tempo sugerido: 01:10]</a:t>
+            </a:r>
+          </a:p>
+          <a:p xmlns:a="http://schemas.openxmlformats.org/drawingml/2006/main">
+            <a:r>
+              <a:t/>
+            </a:r>
+          </a:p>
+          <a:p xmlns:a="http://schemas.openxmlformats.org/drawingml/2006/main">
+            <a:r>
+              <a:t>Fala sugerida:</a:t>
+            </a:r>
+          </a:p>
+          <a:p xmlns:a="http://schemas.openxmlformats.org/drawingml/2006/main">
+            <a:r>
+              <a:t>A mensagem principal deste slide é: Dois itens × dois pagamentos produzem quatro combinações. Para tornar isso concreto, observe o SQL compila, O grão muda e A soma fica falsa. Esses pontos devem ser entendidos em conjunto; não são funcionalidades isoladas. No projeto, essa combinação transforma uma convenção informal em algo que pode ser revisado, testado ou consumido de maneira consistente.</a:t>
+            </a:r>
+          </a:p>
+          <a:p xmlns:a="http://schemas.openxmlformats.org/drawingml/2006/main">
+            <a:r>
+              <a:t/>
+            </a:r>
+          </a:p>
+          <a:p xmlns:a="http://schemas.openxmlformats.org/drawingml/2006/main">
+            <a:r>
+              <a:t>O que destacar:</a:t>
+            </a:r>
+          </a:p>
+          <a:p xmlns:a="http://schemas.openxmlformats.org/drawingml/2006/main">
+            <a:r>
+              <a:t>- Comece pelo título, leia a afirmação abaixo dele e depois desenvolva os itens sem repetir o texto palavra por palavra.</a:t>
+            </a:r>
+          </a:p>
+          <a:p xmlns:a="http://schemas.openxmlformats.org/drawingml/2006/main">
+            <a:r>
+              <a:t/>
+            </a:r>
+          </a:p>
+          <a:p xmlns:a="http://schemas.openxmlformats.org/drawingml/2006/main">
+            <a:r>
+              <a:t>Transição:</a:t>
+            </a:r>
+          </a:p>
+          <a:p xmlns:a="http://schemas.openxmlformats.org/drawingml/2006/main">
+            <a:r>
+              <a:t>Com esse ponto estabelecido, avance para “Join válido pode multiplicar dinheiro”.</a:t>
             </a:r>
           </a:p>
           <a:p xmlns:a="http://schemas.openxmlformats.org/drawingml/2006/main">
@@ -2537,7 +3437,57 @@
           <a:lstStyle xmlns:a="http://schemas.openxmlformats.org/drawingml/2006/main"/>
           <a:p xmlns:a="http://schemas.openxmlformats.org/drawingml/2006/main">
             <a:r>
-              <a:t>Use a composição para explicar visualmente: Dois itens × dois pagamentos produzem quatro combinações. O SQL compila O grão muda A soma fica falsa</a:t>
+              <a:t>[Roteiro recomendado]</a:t>
+            </a:r>
+          </a:p>
+          <a:p xmlns:a="http://schemas.openxmlformats.org/drawingml/2006/main">
+            <a:r>
+              <a:t>[Tempo sugerido: 00:55]</a:t>
+            </a:r>
+          </a:p>
+          <a:p xmlns:a="http://schemas.openxmlformats.org/drawingml/2006/main">
+            <a:r>
+              <a:t/>
+            </a:r>
+          </a:p>
+          <a:p xmlns:a="http://schemas.openxmlformats.org/drawingml/2006/main">
+            <a:r>
+              <a:t>Fala sugerida:</a:t>
+            </a:r>
+          </a:p>
+          <a:p xmlns:a="http://schemas.openxmlformats.org/drawingml/2006/main">
+            <a:r>
+              <a:t>Agora vamos ler a ideia visualmente. Dois itens × dois pagamentos produzem quatro combinações. Siga a composição na ordem mostrada e conecte os elementos principais. A imagem ou o fluxo não cria uma regra nova; ele torna visível a relação que acabamos de explicar. Use a disposição dos elementos para reforçar causa, dependência ou comparação.</a:t>
+            </a:r>
+          </a:p>
+          <a:p xmlns:a="http://schemas.openxmlformats.org/drawingml/2006/main">
+            <a:r>
+              <a:t/>
+            </a:r>
+          </a:p>
+          <a:p xmlns:a="http://schemas.openxmlformats.org/drawingml/2006/main">
+            <a:r>
+              <a:t>O que destacar:</a:t>
+            </a:r>
+          </a:p>
+          <a:p xmlns:a="http://schemas.openxmlformats.org/drawingml/2006/main">
+            <a:r>
+              <a:t>- Acompanhe o fluxo ou a comparação com o cursor e preserve a ordem de leitura do slide.</a:t>
+            </a:r>
+          </a:p>
+          <a:p xmlns:a="http://schemas.openxmlformats.org/drawingml/2006/main">
+            <a:r>
+              <a:t/>
+            </a:r>
+          </a:p>
+          <a:p xmlns:a="http://schemas.openxmlformats.org/drawingml/2006/main">
+            <a:r>
+              <a:t>Transição:</a:t>
+            </a:r>
+          </a:p>
+          <a:p xmlns:a="http://schemas.openxmlformats.org/drawingml/2006/main">
+            <a:r>
+              <a:t>Com esse ponto estabelecido, avance para “O ERD torna cardinalidade visível”.</a:t>
             </a:r>
           </a:p>
           <a:p xmlns:a="http://schemas.openxmlformats.org/drawingml/2006/main">
@@ -2652,7 +3602,57 @@
           <a:lstStyle xmlns:a="http://schemas.openxmlformats.org/drawingml/2006/main"/>
           <a:p xmlns:a="http://schemas.openxmlformats.org/drawingml/2006/main">
             <a:r>
-              <a:t>Entidades e relações precisam anteceder a agregação. Desenvolva os pontos: Chave primária real; Relações verificáveis; Agregação antes do join.</a:t>
+              <a:t>[Roteiro recomendado]</a:t>
+            </a:r>
+          </a:p>
+          <a:p xmlns:a="http://schemas.openxmlformats.org/drawingml/2006/main">
+            <a:r>
+              <a:t>[Tempo sugerido: 01:10]</a:t>
+            </a:r>
+          </a:p>
+          <a:p xmlns:a="http://schemas.openxmlformats.org/drawingml/2006/main">
+            <a:r>
+              <a:t/>
+            </a:r>
+          </a:p>
+          <a:p xmlns:a="http://schemas.openxmlformats.org/drawingml/2006/main">
+            <a:r>
+              <a:t>Fala sugerida:</a:t>
+            </a:r>
+          </a:p>
+          <a:p xmlns:a="http://schemas.openxmlformats.org/drawingml/2006/main">
+            <a:r>
+              <a:t>A mensagem principal deste slide é: Entidades e relações precisam anteceder a agregação. Para tornar isso concreto, observe chave primária real, Relações verificáveis e Agregação antes do join. Esses pontos devem ser entendidos em conjunto; não são funcionalidades isoladas. No projeto, essa combinação transforma uma convenção informal em algo que pode ser revisado, testado ou consumido de maneira consistente.</a:t>
+            </a:r>
+          </a:p>
+          <a:p xmlns:a="http://schemas.openxmlformats.org/drawingml/2006/main">
+            <a:r>
+              <a:t/>
+            </a:r>
+          </a:p>
+          <a:p xmlns:a="http://schemas.openxmlformats.org/drawingml/2006/main">
+            <a:r>
+              <a:t>O que destacar:</a:t>
+            </a:r>
+          </a:p>
+          <a:p xmlns:a="http://schemas.openxmlformats.org/drawingml/2006/main">
+            <a:r>
+              <a:t>- Comece pelo título, leia a afirmação abaixo dele e depois desenvolva os itens sem repetir o texto palavra por palavra.</a:t>
+            </a:r>
+          </a:p>
+          <a:p xmlns:a="http://schemas.openxmlformats.org/drawingml/2006/main">
+            <a:r>
+              <a:t/>
+            </a:r>
+          </a:p>
+          <a:p xmlns:a="http://schemas.openxmlformats.org/drawingml/2006/main">
+            <a:r>
+              <a:t>Transição:</a:t>
+            </a:r>
+          </a:p>
+          <a:p xmlns:a="http://schemas.openxmlformats.org/drawingml/2006/main">
+            <a:r>
+              <a:t>Com esse ponto estabelecido, avance para “O ERD torna cardinalidade visível”.</a:t>
             </a:r>
           </a:p>
           <a:p xmlns:a="http://schemas.openxmlformats.org/drawingml/2006/main">
@@ -2799,7 +3799,7 @@
   </p:cSld>
   <p:clrMap bg1="lt1" tx1="dk1" bg2="lt2" tx2="dk2" accent1="accent1" accent2="accent2" accent3="accent3" accent4="accent4" accent5="accent5" accent6="accent6" hlink="hlink" folHlink="folHlink"/>
   <p:sldLayoutIdLst>
-    <p:sldLayoutId xmlns:r="http://schemas.openxmlformats.org/officeDocument/2006/relationships" id="2147483649" r:id="R5db184422b714e20"/>
+    <p:sldLayoutId xmlns:r="http://schemas.openxmlformats.org/officeDocument/2006/relationships" id="2147483649" r:id="R0fb8abed49684959"/>
   </p:sldLayoutIdLst>
   <p:txStyles>
     <p:titleStyle>
@@ -3097,8 +4097,8 @@
   </p:cSld>
   <p:clrMap bg1="lt1" tx1="dk1" bg2="lt2" tx2="dk2" accent1="accent1" accent2="accent2" accent3="accent3" accent4="accent4" accent5="accent5" accent6="accent6" hlink="hlink" folHlink="folHlink"/>
   <p:sldLayoutIdLst>
-    <p:sldLayoutId xmlns:r="http://schemas.openxmlformats.org/officeDocument/2006/relationships" id="2147483651" r:id="Rfe62b801b2894004"/>
-    <p:sldLayoutId xmlns:r="http://schemas.openxmlformats.org/officeDocument/2006/relationships" id="2147483652" r:id="R57efe0778036441e"/>
+    <p:sldLayoutId xmlns:r="http://schemas.openxmlformats.org/officeDocument/2006/relationships" id="2147483651" r:id="R18155677fa3d40fa"/>
+    <p:sldLayoutId xmlns:r="http://schemas.openxmlformats.org/officeDocument/2006/relationships" id="2147483652" r:id="R8d3b81ad38b6495e"/>
   </p:sldLayoutIdLst>
 </p:sldMaster>
 </file>
@@ -3622,14 +4622,14 @@
       </p:grpSpPr>
       <p:pic>
         <p:nvPicPr>
-          <p:cNvPr id="9" name="" descr="Ilustração conceitual autoral da capa: EPISÓDIO 2 — Gold não é camada semântica."/>
+          <p:cNvPr id="10" name="" descr="Ilustração conceitual autoral da capa: EPISÓDIO 2 — Gold não é camada semântica."/>
           <p:cNvPicPr>
             <a:picLocks xmlns:a="http://schemas.openxmlformats.org/drawingml/2006/main" noChangeAspect="1"/>
           </p:cNvPicPr>
           <p:nvPr/>
         </p:nvPicPr>
         <p:blipFill>
-          <a:blip xmlns:r="http://schemas.openxmlformats.org/officeDocument/2006/relationships" xmlns:a="http://schemas.openxmlformats.org/drawingml/2006/main" r:embed="R833d09db9f72427c"/>
+          <a:blip xmlns:r="http://schemas.openxmlformats.org/officeDocument/2006/relationships" xmlns:a="http://schemas.openxmlformats.org/drawingml/2006/main" r:embed="R8156351452f14d32"/>
           <a:srcRect xmlns:a="http://schemas.openxmlformats.org/drawingml/2006/main" l="19785" t="0" r="19785" b="0"/>
           <a:stretch xmlns:a="http://schemas.openxmlformats.org/drawingml/2006/main">
             <a:fillRect l="0" t="0" r="0" b="0"/>
@@ -3742,6 +4742,7 @@
           <a:lstStyle xmlns:a="http://schemas.openxmlformats.org/drawingml/2006/main"/>
           <a:p xmlns:a="http://schemas.openxmlformats.org/drawingml/2006/main">
             <a:pPr>
+              <a:buNone/>
               <a:defRPr sz="1350" b="1">
                 <a:solidFill>
                   <a:srgbClr val="1EC5FF"/>
@@ -3792,6 +4793,7 @@
           <a:lstStyle xmlns:a="http://schemas.openxmlformats.org/drawingml/2006/main"/>
           <a:p xmlns:a="http://schemas.openxmlformats.org/drawingml/2006/main">
             <a:pPr>
+              <a:buNone/>
               <a:defRPr sz="3225" b="1">
                 <a:solidFill>
                   <a:srgbClr val="FFFFFF"/>
@@ -3842,6 +4844,7 @@
           <a:lstStyle xmlns:a="http://schemas.openxmlformats.org/drawingml/2006/main"/>
           <a:p xmlns:a="http://schemas.openxmlformats.org/drawingml/2006/main">
             <a:pPr>
+              <a:buNone/>
               <a:defRPr sz="1800">
                 <a:solidFill>
                   <a:srgbClr val="E2F2FF"/>
@@ -3923,6 +4926,7 @@
           <a:lstStyle xmlns:a="http://schemas.openxmlformats.org/drawingml/2006/main"/>
           <a:p xmlns:a="http://schemas.openxmlformats.org/drawingml/2006/main">
             <a:pPr>
+              <a:buNone/>
               <a:defRPr sz="1200" b="1">
                 <a:solidFill>
                   <a:srgbClr val="FFFFFF">
@@ -4014,6 +5018,7 @@
           <a:lstStyle xmlns:a="http://schemas.openxmlformats.org/drawingml/2006/main"/>
           <a:p xmlns:a="http://schemas.openxmlformats.org/drawingml/2006/main">
             <a:pPr>
+              <a:buNone/>
               <a:defRPr sz="2925" b="1">
                 <a:solidFill>
                   <a:srgbClr val="FFFFFF"/>
@@ -4064,6 +5069,7 @@
           <a:lstStyle xmlns:a="http://schemas.openxmlformats.org/drawingml/2006/main"/>
           <a:p xmlns:a="http://schemas.openxmlformats.org/drawingml/2006/main">
             <a:pPr>
+              <a:buNone/>
               <a:defRPr sz="1950" b="1">
                 <a:solidFill>
                   <a:srgbClr val="FFFFFF"/>
@@ -4120,14 +5126,14 @@
       </p:sp>
       <p:pic>
         <p:nvPicPr>
-          <p:cNvPr id="13" name="" descr="Figura oficial da documentação dbt usada para explicar: O ERD torna cardinalidade visível — Entidades e relações precisam anteceder a agregação.."/>
+          <p:cNvPr id="15" name="" descr="Figura oficial da documentação dbt usada para explicar: O ERD torna cardinalidade visível — Entidades e relações precisam anteceder a agregação.."/>
           <p:cNvPicPr>
             <a:picLocks xmlns:a="http://schemas.openxmlformats.org/drawingml/2006/main" noChangeAspect="1"/>
           </p:cNvPicPr>
           <p:nvPr/>
         </p:nvPicPr>
         <p:blipFill>
-          <a:blip xmlns:r="http://schemas.openxmlformats.org/officeDocument/2006/relationships" xmlns:a="http://schemas.openxmlformats.org/drawingml/2006/main" r:embed="R97b6ef1e86364e82"/>
+          <a:blip xmlns:r="http://schemas.openxmlformats.org/officeDocument/2006/relationships" xmlns:a="http://schemas.openxmlformats.org/drawingml/2006/main" r:embed="Ra126c7c2a47f4067"/>
           <a:stretch xmlns:a="http://schemas.openxmlformats.org/drawingml/2006/main"/>
         </p:blipFill>
         <p:spPr>
@@ -4173,6 +5179,7 @@
           <a:lstStyle xmlns:a="http://schemas.openxmlformats.org/drawingml/2006/main"/>
           <a:p xmlns:a="http://schemas.openxmlformats.org/drawingml/2006/main">
             <a:pPr>
+              <a:buNone/>
               <a:defRPr sz="900" i="1">
                 <a:solidFill>
                   <a:srgbClr val="5C6F86"/>
@@ -4223,6 +5230,7 @@
           <a:lstStyle xmlns:a="http://schemas.openxmlformats.org/drawingml/2006/main"/>
           <a:p xmlns:a="http://schemas.openxmlformats.org/drawingml/2006/main">
             <a:pPr>
+              <a:buNone/>
               <a:defRPr sz="1050" b="1">
                 <a:solidFill>
                   <a:srgbClr val="1EC5FF"/>
@@ -4306,6 +5314,7 @@
           <a:lstStyle xmlns:a="http://schemas.openxmlformats.org/drawingml/2006/main"/>
           <a:p xmlns:a="http://schemas.openxmlformats.org/drawingml/2006/main">
             <a:pPr>
+              <a:buNone/>
               <a:defRPr sz="825">
                 <a:solidFill>
                   <a:srgbClr val="FFFFFF">
@@ -4360,6 +5369,7 @@
           <a:lstStyle xmlns:a="http://schemas.openxmlformats.org/drawingml/2006/main"/>
           <a:p xmlns:a="http://schemas.openxmlformats.org/drawingml/2006/main">
             <a:pPr algn="r">
+              <a:buNone/>
               <a:defRPr sz="825" b="1">
                 <a:solidFill>
                   <a:srgbClr val="FFFFFF">
@@ -4451,6 +5461,7 @@
           <a:lstStyle xmlns:a="http://schemas.openxmlformats.org/drawingml/2006/main"/>
           <a:p xmlns:a="http://schemas.openxmlformats.org/drawingml/2006/main">
             <a:pPr>
+              <a:buNone/>
               <a:defRPr sz="2925" b="1">
                 <a:solidFill>
                   <a:srgbClr val="FFFFFF"/>
@@ -4501,6 +5512,7 @@
           <a:lstStyle xmlns:a="http://schemas.openxmlformats.org/drawingml/2006/main"/>
           <a:p xmlns:a="http://schemas.openxmlformats.org/drawingml/2006/main">
             <a:pPr>
+              <a:buNone/>
               <a:defRPr sz="1650">
                 <a:solidFill>
                   <a:srgbClr val="E2F2FF"/>
@@ -4551,6 +5563,7 @@
           <a:lstStyle xmlns:a="http://schemas.openxmlformats.org/drawingml/2006/main"/>
           <a:p xmlns:a="http://schemas.openxmlformats.org/drawingml/2006/main">
             <a:pPr>
+              <a:buNone/>
               <a:defRPr sz="1800">
                 <a:solidFill>
                   <a:srgbClr val="FFFFFF"/>
@@ -4568,6 +5581,7 @@
           </a:p>
           <a:p xmlns:a="http://schemas.openxmlformats.org/drawingml/2006/main">
             <a:pPr>
+              <a:buNone/>
               <a:defRPr sz="1800">
                 <a:solidFill>
                   <a:srgbClr val="FFFFFF"/>
@@ -4585,6 +5599,7 @@
           </a:p>
           <a:p xmlns:a="http://schemas.openxmlformats.org/drawingml/2006/main">
             <a:pPr>
+              <a:buNone/>
               <a:defRPr sz="1800">
                 <a:solidFill>
                   <a:srgbClr val="FFFFFF"/>
@@ -4602,6 +5617,7 @@
           </a:p>
           <a:p xmlns:a="http://schemas.openxmlformats.org/drawingml/2006/main">
             <a:pPr>
+              <a:buNone/>
               <a:defRPr sz="1800">
                 <a:solidFill>
                   <a:srgbClr val="FFFFFF"/>
@@ -4726,6 +5742,7 @@
           <a:lstStyle xmlns:a="http://schemas.openxmlformats.org/drawingml/2006/main"/>
           <a:p xmlns:a="http://schemas.openxmlformats.org/drawingml/2006/main">
             <a:pPr algn="ctr">
+              <a:buNone/>
               <a:defRPr sz="4650" b="1">
                 <a:solidFill>
                   <a:srgbClr val="1EC5FF"/>
@@ -4776,6 +5793,7 @@
           <a:lstStyle xmlns:a="http://schemas.openxmlformats.org/drawingml/2006/main"/>
           <a:p xmlns:a="http://schemas.openxmlformats.org/drawingml/2006/main">
             <a:pPr>
+              <a:buNone/>
               <a:defRPr sz="1050" b="1">
                 <a:solidFill>
                   <a:srgbClr val="1EC5FF"/>
@@ -4859,6 +5877,7 @@
           <a:lstStyle xmlns:a="http://schemas.openxmlformats.org/drawingml/2006/main"/>
           <a:p xmlns:a="http://schemas.openxmlformats.org/drawingml/2006/main">
             <a:pPr>
+              <a:buNone/>
               <a:defRPr sz="825">
                 <a:solidFill>
                   <a:srgbClr val="FFFFFF">
@@ -4913,6 +5932,7 @@
           <a:lstStyle xmlns:a="http://schemas.openxmlformats.org/drawingml/2006/main"/>
           <a:p xmlns:a="http://schemas.openxmlformats.org/drawingml/2006/main">
             <a:pPr algn="r">
+              <a:buNone/>
               <a:defRPr sz="825" b="1">
                 <a:solidFill>
                   <a:srgbClr val="FFFFFF">
@@ -4996,6 +6016,7 @@
           <a:lstStyle xmlns:a="http://schemas.openxmlformats.org/drawingml/2006/main"/>
           <a:p xmlns:a="http://schemas.openxmlformats.org/drawingml/2006/main">
             <a:pPr>
+              <a:buNone/>
               <a:defRPr sz="2925" b="1">
                 <a:solidFill>
                   <a:srgbClr val="0B1F3A"/>
@@ -5046,6 +6067,7 @@
           <a:lstStyle xmlns:a="http://schemas.openxmlformats.org/drawingml/2006/main"/>
           <a:p xmlns:a="http://schemas.openxmlformats.org/drawingml/2006/main">
             <a:pPr>
+              <a:buNone/>
               <a:defRPr sz="2100" b="1">
                 <a:solidFill>
                   <a:srgbClr val="1565C0"/>
@@ -5096,6 +6118,7 @@
           <a:lstStyle xmlns:a="http://schemas.openxmlformats.org/drawingml/2006/main"/>
           <a:p xmlns:a="http://schemas.openxmlformats.org/drawingml/2006/main">
             <a:pPr>
+              <a:buNone/>
               <a:defRPr sz="2100" b="1">
                 <a:solidFill>
                   <a:srgbClr val="1565C0"/>
@@ -5177,6 +6200,7 @@
           <a:lstStyle xmlns:a="http://schemas.openxmlformats.org/drawingml/2006/main"/>
           <a:p xmlns:a="http://schemas.openxmlformats.org/drawingml/2006/main">
             <a:pPr>
+              <a:buNone/>
               <a:defRPr sz="1650">
                 <a:solidFill>
                   <a:srgbClr val="0B1F3A"/>
@@ -5194,6 +6218,7 @@
           </a:p>
           <a:p xmlns:a="http://schemas.openxmlformats.org/drawingml/2006/main">
             <a:pPr>
+              <a:buNone/>
               <a:defRPr sz="1650">
                 <a:solidFill>
                   <a:srgbClr val="0B1F3A"/>
@@ -5244,6 +6269,7 @@
           <a:lstStyle xmlns:a="http://schemas.openxmlformats.org/drawingml/2006/main"/>
           <a:p xmlns:a="http://schemas.openxmlformats.org/drawingml/2006/main">
             <a:pPr>
+              <a:buNone/>
               <a:defRPr sz="1650">
                 <a:solidFill>
                   <a:srgbClr val="0B1F3A"/>
@@ -5261,6 +6287,7 @@
           </a:p>
           <a:p xmlns:a="http://schemas.openxmlformats.org/drawingml/2006/main">
             <a:pPr>
+              <a:buNone/>
               <a:defRPr sz="1650">
                 <a:solidFill>
                   <a:srgbClr val="0B1F3A"/>
@@ -5311,6 +6338,7 @@
           <a:lstStyle xmlns:a="http://schemas.openxmlformats.org/drawingml/2006/main"/>
           <a:p xmlns:a="http://schemas.openxmlformats.org/drawingml/2006/main">
             <a:pPr>
+              <a:buNone/>
               <a:defRPr sz="1050" b="1">
                 <a:solidFill>
                   <a:srgbClr val="1565C0"/>
@@ -5394,6 +6422,7 @@
           <a:lstStyle xmlns:a="http://schemas.openxmlformats.org/drawingml/2006/main"/>
           <a:p xmlns:a="http://schemas.openxmlformats.org/drawingml/2006/main">
             <a:pPr>
+              <a:buNone/>
               <a:defRPr sz="825">
                 <a:solidFill>
                   <a:srgbClr val="0B1F3A">
@@ -5448,6 +6477,7 @@
           <a:lstStyle xmlns:a="http://schemas.openxmlformats.org/drawingml/2006/main"/>
           <a:p xmlns:a="http://schemas.openxmlformats.org/drawingml/2006/main">
             <a:pPr algn="r">
+              <a:buNone/>
               <a:defRPr sz="825" b="1">
                 <a:solidFill>
                   <a:srgbClr val="0B1F3A">
@@ -5539,6 +6569,7 @@
           <a:lstStyle xmlns:a="http://schemas.openxmlformats.org/drawingml/2006/main"/>
           <a:p xmlns:a="http://schemas.openxmlformats.org/drawingml/2006/main">
             <a:pPr>
+              <a:buNone/>
               <a:defRPr sz="2925" b="1">
                 <a:solidFill>
                   <a:srgbClr val="FFFFFF"/>
@@ -5624,6 +6655,7 @@
           <a:lstStyle xmlns:a="http://schemas.openxmlformats.org/drawingml/2006/main"/>
           <a:p xmlns:a="http://schemas.openxmlformats.org/drawingml/2006/main">
             <a:pPr>
+              <a:buNone/>
               <a:defRPr sz="1875" b="1">
                 <a:solidFill>
                   <a:srgbClr val="1EC5FF"/>
@@ -5674,6 +6706,7 @@
           <a:lstStyle xmlns:a="http://schemas.openxmlformats.org/drawingml/2006/main"/>
           <a:p xmlns:a="http://schemas.openxmlformats.org/drawingml/2006/main">
             <a:pPr>
+              <a:buNone/>
               <a:defRPr sz="1425">
                 <a:solidFill>
                   <a:srgbClr val="E2F2FF"/>
@@ -5724,6 +6757,7 @@
           <a:lstStyle xmlns:a="http://schemas.openxmlformats.org/drawingml/2006/main"/>
           <a:p xmlns:a="http://schemas.openxmlformats.org/drawingml/2006/main">
             <a:pPr>
+              <a:buNone/>
               <a:defRPr sz="1050" b="1">
                 <a:solidFill>
                   <a:srgbClr val="1EC5FF"/>
@@ -5807,6 +6841,7 @@
           <a:lstStyle xmlns:a="http://schemas.openxmlformats.org/drawingml/2006/main"/>
           <a:p xmlns:a="http://schemas.openxmlformats.org/drawingml/2006/main">
             <a:pPr>
+              <a:buNone/>
               <a:defRPr sz="825">
                 <a:solidFill>
                   <a:srgbClr val="FFFFFF">
@@ -5861,6 +6896,7 @@
           <a:lstStyle xmlns:a="http://schemas.openxmlformats.org/drawingml/2006/main"/>
           <a:p xmlns:a="http://schemas.openxmlformats.org/drawingml/2006/main">
             <a:pPr algn="r">
+              <a:buNone/>
               <a:defRPr sz="825" b="1">
                 <a:solidFill>
                   <a:srgbClr val="FFFFFF">
@@ -5944,6 +6980,7 @@
           <a:lstStyle xmlns:a="http://schemas.openxmlformats.org/drawingml/2006/main"/>
           <a:p xmlns:a="http://schemas.openxmlformats.org/drawingml/2006/main">
             <a:pPr>
+              <a:buNone/>
               <a:defRPr sz="2925" b="1">
                 <a:solidFill>
                   <a:srgbClr val="0B1F3A"/>
@@ -5994,6 +7031,7 @@
           <a:lstStyle xmlns:a="http://schemas.openxmlformats.org/drawingml/2006/main"/>
           <a:p xmlns:a="http://schemas.openxmlformats.org/drawingml/2006/main">
             <a:pPr>
+              <a:buNone/>
               <a:defRPr sz="3450" b="1">
                 <a:solidFill>
                   <a:srgbClr val="1565C0"/>
@@ -6044,6 +7082,7 @@
           <a:lstStyle xmlns:a="http://schemas.openxmlformats.org/drawingml/2006/main"/>
           <a:p xmlns:a="http://schemas.openxmlformats.org/drawingml/2006/main">
             <a:pPr>
+              <a:buNone/>
               <a:defRPr sz="1575" b="1">
                 <a:solidFill>
                   <a:srgbClr val="0B1F3A"/>
@@ -6125,6 +7164,7 @@
           <a:lstStyle xmlns:a="http://schemas.openxmlformats.org/drawingml/2006/main"/>
           <a:p xmlns:a="http://schemas.openxmlformats.org/drawingml/2006/main">
             <a:pPr>
+              <a:buNone/>
               <a:defRPr sz="3450" b="1">
                 <a:solidFill>
                   <a:srgbClr val="1565C0"/>
@@ -6175,6 +7215,7 @@
           <a:lstStyle xmlns:a="http://schemas.openxmlformats.org/drawingml/2006/main"/>
           <a:p xmlns:a="http://schemas.openxmlformats.org/drawingml/2006/main">
             <a:pPr>
+              <a:buNone/>
               <a:defRPr sz="1575" b="1">
                 <a:solidFill>
                   <a:srgbClr val="0B1F3A"/>
@@ -6256,6 +7297,7 @@
           <a:lstStyle xmlns:a="http://schemas.openxmlformats.org/drawingml/2006/main"/>
           <a:p xmlns:a="http://schemas.openxmlformats.org/drawingml/2006/main">
             <a:pPr>
+              <a:buNone/>
               <a:defRPr sz="3450" b="1">
                 <a:solidFill>
                   <a:srgbClr val="1565C0"/>
@@ -6306,6 +7348,7 @@
           <a:lstStyle xmlns:a="http://schemas.openxmlformats.org/drawingml/2006/main"/>
           <a:p xmlns:a="http://schemas.openxmlformats.org/drawingml/2006/main">
             <a:pPr>
+              <a:buNone/>
               <a:defRPr sz="1575" b="1">
                 <a:solidFill>
                   <a:srgbClr val="0B1F3A"/>
@@ -6356,6 +7399,7 @@
           <a:lstStyle xmlns:a="http://schemas.openxmlformats.org/drawingml/2006/main"/>
           <a:p xmlns:a="http://schemas.openxmlformats.org/drawingml/2006/main">
             <a:pPr>
+              <a:buNone/>
               <a:defRPr sz="1050" b="1">
                 <a:solidFill>
                   <a:srgbClr val="1565C0"/>
@@ -6439,6 +7483,7 @@
           <a:lstStyle xmlns:a="http://schemas.openxmlformats.org/drawingml/2006/main"/>
           <a:p xmlns:a="http://schemas.openxmlformats.org/drawingml/2006/main">
             <a:pPr>
+              <a:buNone/>
               <a:defRPr sz="825">
                 <a:solidFill>
                   <a:srgbClr val="0B1F3A">
@@ -6493,6 +7538,7 @@
           <a:lstStyle xmlns:a="http://schemas.openxmlformats.org/drawingml/2006/main"/>
           <a:p xmlns:a="http://schemas.openxmlformats.org/drawingml/2006/main">
             <a:pPr algn="r">
+              <a:buNone/>
               <a:defRPr sz="825" b="1">
                 <a:solidFill>
                   <a:srgbClr val="0B1F3A">
@@ -6584,6 +7630,7 @@
           <a:lstStyle xmlns:a="http://schemas.openxmlformats.org/drawingml/2006/main"/>
           <a:p xmlns:a="http://schemas.openxmlformats.org/drawingml/2006/main">
             <a:pPr>
+              <a:buNone/>
               <a:defRPr sz="1350" b="1">
                 <a:solidFill>
                   <a:srgbClr val="1EC5FF"/>
@@ -6634,6 +7681,7 @@
           <a:lstStyle xmlns:a="http://schemas.openxmlformats.org/drawingml/2006/main"/>
           <a:p xmlns:a="http://schemas.openxmlformats.org/drawingml/2006/main">
             <a:pPr>
+              <a:buNone/>
               <a:defRPr sz="3450" b="1">
                 <a:solidFill>
                   <a:srgbClr val="FFFFFF"/>
@@ -6684,6 +7732,7 @@
           <a:lstStyle xmlns:a="http://schemas.openxmlformats.org/drawingml/2006/main"/>
           <a:p xmlns:a="http://schemas.openxmlformats.org/drawingml/2006/main">
             <a:pPr>
+              <a:buNone/>
               <a:defRPr sz="1650">
                 <a:solidFill>
                   <a:srgbClr val="E2F2FF"/>
@@ -6808,6 +7857,7 @@
           <a:lstStyle xmlns:a="http://schemas.openxmlformats.org/drawingml/2006/main"/>
           <a:p xmlns:a="http://schemas.openxmlformats.org/drawingml/2006/main">
             <a:pPr>
+              <a:buNone/>
               <a:defRPr sz="1050" b="1">
                 <a:solidFill>
                   <a:srgbClr val="1EC5FF"/>
@@ -6891,6 +7941,7 @@
           <a:lstStyle xmlns:a="http://schemas.openxmlformats.org/drawingml/2006/main"/>
           <a:p xmlns:a="http://schemas.openxmlformats.org/drawingml/2006/main">
             <a:pPr>
+              <a:buNone/>
               <a:defRPr sz="825">
                 <a:solidFill>
                   <a:srgbClr val="FFFFFF">
@@ -6945,6 +7996,7 @@
           <a:lstStyle xmlns:a="http://schemas.openxmlformats.org/drawingml/2006/main"/>
           <a:p xmlns:a="http://schemas.openxmlformats.org/drawingml/2006/main">
             <a:pPr algn="r">
+              <a:buNone/>
               <a:defRPr sz="825" b="1">
                 <a:solidFill>
                   <a:srgbClr val="FFFFFF">
@@ -7028,6 +8080,7 @@
           <a:lstStyle xmlns:a="http://schemas.openxmlformats.org/drawingml/2006/main"/>
           <a:p xmlns:a="http://schemas.openxmlformats.org/drawingml/2006/main">
             <a:pPr>
+              <a:buNone/>
               <a:defRPr sz="2925" b="1">
                 <a:solidFill>
                   <a:srgbClr val="0B1F3A"/>
@@ -7078,6 +8131,7 @@
           <a:lstStyle xmlns:a="http://schemas.openxmlformats.org/drawingml/2006/main"/>
           <a:p xmlns:a="http://schemas.openxmlformats.org/drawingml/2006/main">
             <a:pPr>
+              <a:buNone/>
               <a:defRPr sz="3450" b="1">
                 <a:solidFill>
                   <a:srgbClr val="1565C0"/>
@@ -7128,6 +8182,7 @@
           <a:lstStyle xmlns:a="http://schemas.openxmlformats.org/drawingml/2006/main"/>
           <a:p xmlns:a="http://schemas.openxmlformats.org/drawingml/2006/main">
             <a:pPr>
+              <a:buNone/>
               <a:defRPr sz="1575" b="1">
                 <a:solidFill>
                   <a:srgbClr val="0B1F3A"/>
@@ -7209,6 +8264,7 @@
           <a:lstStyle xmlns:a="http://schemas.openxmlformats.org/drawingml/2006/main"/>
           <a:p xmlns:a="http://schemas.openxmlformats.org/drawingml/2006/main">
             <a:pPr>
+              <a:buNone/>
               <a:defRPr sz="3450" b="1">
                 <a:solidFill>
                   <a:srgbClr val="1565C0"/>
@@ -7259,6 +8315,7 @@
           <a:lstStyle xmlns:a="http://schemas.openxmlformats.org/drawingml/2006/main"/>
           <a:p xmlns:a="http://schemas.openxmlformats.org/drawingml/2006/main">
             <a:pPr>
+              <a:buNone/>
               <a:defRPr sz="1575" b="1">
                 <a:solidFill>
                   <a:srgbClr val="0B1F3A"/>
@@ -7340,6 +8397,7 @@
           <a:lstStyle xmlns:a="http://schemas.openxmlformats.org/drawingml/2006/main"/>
           <a:p xmlns:a="http://schemas.openxmlformats.org/drawingml/2006/main">
             <a:pPr>
+              <a:buNone/>
               <a:defRPr sz="3450" b="1">
                 <a:solidFill>
                   <a:srgbClr val="1565C0"/>
@@ -7390,6 +8448,7 @@
           <a:lstStyle xmlns:a="http://schemas.openxmlformats.org/drawingml/2006/main"/>
           <a:p xmlns:a="http://schemas.openxmlformats.org/drawingml/2006/main">
             <a:pPr>
+              <a:buNone/>
               <a:defRPr sz="1575" b="1">
                 <a:solidFill>
                   <a:srgbClr val="0B1F3A"/>
@@ -7440,6 +8499,7 @@
           <a:lstStyle xmlns:a="http://schemas.openxmlformats.org/drawingml/2006/main"/>
           <a:p xmlns:a="http://schemas.openxmlformats.org/drawingml/2006/main">
             <a:pPr>
+              <a:buNone/>
               <a:defRPr sz="1050" b="1">
                 <a:solidFill>
                   <a:srgbClr val="1565C0"/>
@@ -7523,6 +8583,7 @@
           <a:lstStyle xmlns:a="http://schemas.openxmlformats.org/drawingml/2006/main"/>
           <a:p xmlns:a="http://schemas.openxmlformats.org/drawingml/2006/main">
             <a:pPr>
+              <a:buNone/>
               <a:defRPr sz="825">
                 <a:solidFill>
                   <a:srgbClr val="0B1F3A">
@@ -7577,6 +8638,7 @@
           <a:lstStyle xmlns:a="http://schemas.openxmlformats.org/drawingml/2006/main"/>
           <a:p xmlns:a="http://schemas.openxmlformats.org/drawingml/2006/main">
             <a:pPr algn="r">
+              <a:buNone/>
               <a:defRPr sz="825" b="1">
                 <a:solidFill>
                   <a:srgbClr val="0B1F3A">
@@ -7668,6 +8730,7 @@
           <a:lstStyle xmlns:a="http://schemas.openxmlformats.org/drawingml/2006/main"/>
           <a:p xmlns:a="http://schemas.openxmlformats.org/drawingml/2006/main">
             <a:pPr>
+              <a:buNone/>
               <a:defRPr sz="5550" b="1">
                 <a:solidFill>
                   <a:srgbClr val="1EC5FF"/>
@@ -7718,6 +8781,7 @@
           <a:lstStyle xmlns:a="http://schemas.openxmlformats.org/drawingml/2006/main"/>
           <a:p xmlns:a="http://schemas.openxmlformats.org/drawingml/2006/main">
             <a:pPr>
+              <a:buNone/>
               <a:defRPr sz="2250" b="1">
                 <a:solidFill>
                   <a:srgbClr val="FFFFFF"/>
@@ -7801,6 +8865,7 @@
           <a:lstStyle xmlns:a="http://schemas.openxmlformats.org/drawingml/2006/main"/>
           <a:p xmlns:a="http://schemas.openxmlformats.org/drawingml/2006/main">
             <a:pPr>
+              <a:buNone/>
               <a:defRPr sz="1800">
                 <a:solidFill>
                   <a:srgbClr val="E2F2FF"/>
@@ -7851,6 +8916,7 @@
           <a:lstStyle xmlns:a="http://schemas.openxmlformats.org/drawingml/2006/main"/>
           <a:p xmlns:a="http://schemas.openxmlformats.org/drawingml/2006/main">
             <a:pPr>
+              <a:buNone/>
               <a:defRPr sz="1050" b="1">
                 <a:solidFill>
                   <a:srgbClr val="1EC5FF"/>
@@ -7934,6 +9000,7 @@
           <a:lstStyle xmlns:a="http://schemas.openxmlformats.org/drawingml/2006/main"/>
           <a:p xmlns:a="http://schemas.openxmlformats.org/drawingml/2006/main">
             <a:pPr>
+              <a:buNone/>
               <a:defRPr sz="825">
                 <a:solidFill>
                   <a:srgbClr val="FFFFFF">
@@ -7988,6 +9055,7 @@
           <a:lstStyle xmlns:a="http://schemas.openxmlformats.org/drawingml/2006/main"/>
           <a:p xmlns:a="http://schemas.openxmlformats.org/drawingml/2006/main">
             <a:pPr algn="r">
+              <a:buNone/>
               <a:defRPr sz="825" b="1">
                 <a:solidFill>
                   <a:srgbClr val="FFFFFF">
@@ -8071,6 +9139,7 @@
           <a:lstStyle xmlns:a="http://schemas.openxmlformats.org/drawingml/2006/main"/>
           <a:p xmlns:a="http://schemas.openxmlformats.org/drawingml/2006/main">
             <a:pPr>
+              <a:buNone/>
               <a:defRPr sz="2925" b="1">
                 <a:solidFill>
                   <a:srgbClr val="0B1F3A"/>
@@ -8121,6 +9190,7 @@
           <a:lstStyle xmlns:a="http://schemas.openxmlformats.org/drawingml/2006/main"/>
           <a:p xmlns:a="http://schemas.openxmlformats.org/drawingml/2006/main">
             <a:pPr>
+              <a:buNone/>
               <a:defRPr sz="1950">
                 <a:solidFill>
                   <a:srgbClr val="0B1F3A"/>
@@ -8138,6 +9208,7 @@
           </a:p>
           <a:p xmlns:a="http://schemas.openxmlformats.org/drawingml/2006/main">
             <a:pPr>
+              <a:buNone/>
               <a:defRPr sz="1950">
                 <a:solidFill>
                   <a:srgbClr val="0B1F3A"/>
@@ -8155,6 +9226,7 @@
           </a:p>
           <a:p xmlns:a="http://schemas.openxmlformats.org/drawingml/2006/main">
             <a:pPr>
+              <a:buNone/>
               <a:defRPr sz="1950">
                 <a:solidFill>
                   <a:srgbClr val="0B1F3A"/>
@@ -8205,6 +9277,7 @@
           <a:lstStyle xmlns:a="http://schemas.openxmlformats.org/drawingml/2006/main"/>
           <a:p xmlns:a="http://schemas.openxmlformats.org/drawingml/2006/main">
             <a:pPr>
+              <a:buNone/>
               <a:defRPr sz="1050" b="1">
                 <a:solidFill>
                   <a:srgbClr val="1565C0"/>
@@ -8288,6 +9361,7 @@
           <a:lstStyle xmlns:a="http://schemas.openxmlformats.org/drawingml/2006/main"/>
           <a:p xmlns:a="http://schemas.openxmlformats.org/drawingml/2006/main">
             <a:pPr>
+              <a:buNone/>
               <a:defRPr sz="825">
                 <a:solidFill>
                   <a:srgbClr val="0B1F3A">
@@ -8342,6 +9416,7 @@
           <a:lstStyle xmlns:a="http://schemas.openxmlformats.org/drawingml/2006/main"/>
           <a:p xmlns:a="http://schemas.openxmlformats.org/drawingml/2006/main">
             <a:pPr algn="r">
+              <a:buNone/>
               <a:defRPr sz="825" b="1">
                 <a:solidFill>
                   <a:srgbClr val="0B1F3A">
@@ -8433,6 +9508,7 @@
           <a:lstStyle xmlns:a="http://schemas.openxmlformats.org/drawingml/2006/main"/>
           <a:p xmlns:a="http://schemas.openxmlformats.org/drawingml/2006/main">
             <a:pPr>
+              <a:buNone/>
               <a:defRPr sz="1500" b="1">
                 <a:solidFill>
                   <a:srgbClr val="1EC5FF"/>
@@ -8483,6 +9559,7 @@
           <a:lstStyle xmlns:a="http://schemas.openxmlformats.org/drawingml/2006/main"/>
           <a:p xmlns:a="http://schemas.openxmlformats.org/drawingml/2006/main">
             <a:pPr>
+              <a:buNone/>
               <a:defRPr sz="2850" b="1">
                 <a:solidFill>
                   <a:srgbClr val="FFFFFF"/>
@@ -8533,6 +9610,7 @@
           <a:lstStyle xmlns:a="http://schemas.openxmlformats.org/drawingml/2006/main"/>
           <a:p xmlns:a="http://schemas.openxmlformats.org/drawingml/2006/main">
             <a:pPr>
+              <a:buNone/>
               <a:defRPr sz="1500">
                 <a:solidFill>
                   <a:srgbClr val="E2F2FF"/>
@@ -8657,6 +9735,7 @@
           <a:lstStyle xmlns:a="http://schemas.openxmlformats.org/drawingml/2006/main"/>
           <a:p xmlns:a="http://schemas.openxmlformats.org/drawingml/2006/main">
             <a:pPr>
+              <a:buNone/>
               <a:defRPr sz="1050" b="1">
                 <a:solidFill>
                   <a:srgbClr val="1EC5FF"/>
@@ -8740,6 +9819,7 @@
           <a:lstStyle xmlns:a="http://schemas.openxmlformats.org/drawingml/2006/main"/>
           <a:p xmlns:a="http://schemas.openxmlformats.org/drawingml/2006/main">
             <a:pPr>
+              <a:buNone/>
               <a:defRPr sz="825">
                 <a:solidFill>
                   <a:srgbClr val="FFFFFF">
@@ -8794,6 +9874,7 @@
           <a:lstStyle xmlns:a="http://schemas.openxmlformats.org/drawingml/2006/main"/>
           <a:p xmlns:a="http://schemas.openxmlformats.org/drawingml/2006/main">
             <a:pPr algn="r">
+              <a:buNone/>
               <a:defRPr sz="825" b="1">
                 <a:solidFill>
                   <a:srgbClr val="FFFFFF">
@@ -8877,6 +9958,7 @@
           <a:lstStyle xmlns:a="http://schemas.openxmlformats.org/drawingml/2006/main"/>
           <a:p xmlns:a="http://schemas.openxmlformats.org/drawingml/2006/main">
             <a:pPr>
+              <a:buNone/>
               <a:defRPr sz="2850" b="1">
                 <a:solidFill>
                   <a:srgbClr val="0B1F3A"/>
@@ -8958,6 +10040,7 @@
           <a:lstStyle xmlns:a="http://schemas.openxmlformats.org/drawingml/2006/main"/>
           <a:p xmlns:a="http://schemas.openxmlformats.org/drawingml/2006/main">
             <a:pPr>
+              <a:buNone/>
               <a:defRPr sz="1425" b="1">
                 <a:solidFill>
                   <a:srgbClr val="1565C0"/>
@@ -9012,14 +10095,14 @@
       </p:sp>
       <p:pic>
         <p:nvPicPr>
-          <p:cNvPr id="14" name="" descr="Diagrama didático autoral que apresenta: Duas tabelas Gold corretas ainda podem responder receita com números diferentes. — A pergunta que guia a aula."/>
+          <p:cNvPr id="16" name="" descr="Diagrama didático autoral que apresenta: Duas tabelas Gold corretas ainda podem responder receita com números diferentes. — A pergunta que guia a aula."/>
           <p:cNvPicPr>
             <a:picLocks xmlns:a="http://schemas.openxmlformats.org/drawingml/2006/main" noChangeAspect="1"/>
           </p:cNvPicPr>
           <p:nvPr/>
         </p:nvPicPr>
         <p:blipFill>
-          <a:blip xmlns:r="http://schemas.openxmlformats.org/officeDocument/2006/relationships" xmlns:a="http://schemas.openxmlformats.org/drawingml/2006/main" r:embed="R3a6df8da053d4577"/>
+          <a:blip xmlns:r="http://schemas.openxmlformats.org/officeDocument/2006/relationships" xmlns:a="http://schemas.openxmlformats.org/drawingml/2006/main" r:embed="Rd58adf72332849e5"/>
           <a:stretch xmlns:a="http://schemas.openxmlformats.org/drawingml/2006/main"/>
         </p:blipFill>
         <p:spPr>
@@ -9065,6 +10148,7 @@
           <a:lstStyle xmlns:a="http://schemas.openxmlformats.org/drawingml/2006/main"/>
           <a:p xmlns:a="http://schemas.openxmlformats.org/drawingml/2006/main">
             <a:pPr>
+              <a:buNone/>
               <a:defRPr sz="1050" b="1">
                 <a:solidFill>
                   <a:srgbClr val="1565C0"/>
@@ -9148,6 +10232,7 @@
           <a:lstStyle xmlns:a="http://schemas.openxmlformats.org/drawingml/2006/main"/>
           <a:p xmlns:a="http://schemas.openxmlformats.org/drawingml/2006/main">
             <a:pPr>
+              <a:buNone/>
               <a:defRPr sz="825">
                 <a:solidFill>
                   <a:srgbClr val="0B1F3A">
@@ -9202,6 +10287,7 @@
           <a:lstStyle xmlns:a="http://schemas.openxmlformats.org/drawingml/2006/main"/>
           <a:p xmlns:a="http://schemas.openxmlformats.org/drawingml/2006/main">
             <a:pPr algn="r">
+              <a:buNone/>
               <a:defRPr sz="825" b="1">
                 <a:solidFill>
                   <a:srgbClr val="0B1F3A">
@@ -9285,6 +10371,7 @@
           <a:lstStyle xmlns:a="http://schemas.openxmlformats.org/drawingml/2006/main"/>
           <a:p xmlns:a="http://schemas.openxmlformats.org/drawingml/2006/main">
             <a:pPr>
+              <a:buNone/>
               <a:defRPr sz="1350" b="1">
                 <a:solidFill>
                   <a:srgbClr val="1565C0"/>
@@ -9335,6 +10422,7 @@
           <a:lstStyle xmlns:a="http://schemas.openxmlformats.org/drawingml/2006/main"/>
           <a:p xmlns:a="http://schemas.openxmlformats.org/drawingml/2006/main">
             <a:pPr>
+              <a:buNone/>
               <a:defRPr sz="3300" b="1">
                 <a:solidFill>
                   <a:srgbClr val="0B1F3A"/>
@@ -9385,6 +10473,7 @@
           <a:lstStyle xmlns:a="http://schemas.openxmlformats.org/drawingml/2006/main"/>
           <a:p xmlns:a="http://schemas.openxmlformats.org/drawingml/2006/main">
             <a:pPr>
+              <a:buNone/>
               <a:defRPr sz="1500">
                 <a:solidFill>
                   <a:srgbClr val="5C6F86"/>
@@ -9435,6 +10524,7 @@
           <a:lstStyle xmlns:a="http://schemas.openxmlformats.org/drawingml/2006/main"/>
           <a:p xmlns:a="http://schemas.openxmlformats.org/drawingml/2006/main">
             <a:pPr>
+              <a:buNone/>
               <a:defRPr sz="1050" b="1">
                 <a:solidFill>
                   <a:srgbClr val="1565C0"/>
@@ -9518,6 +10608,7 @@
           <a:lstStyle xmlns:a="http://schemas.openxmlformats.org/drawingml/2006/main"/>
           <a:p xmlns:a="http://schemas.openxmlformats.org/drawingml/2006/main">
             <a:pPr>
+              <a:buNone/>
               <a:defRPr sz="825">
                 <a:solidFill>
                   <a:srgbClr val="0B1F3A">
@@ -9572,6 +10663,7 @@
           <a:lstStyle xmlns:a="http://schemas.openxmlformats.org/drawingml/2006/main"/>
           <a:p xmlns:a="http://schemas.openxmlformats.org/drawingml/2006/main">
             <a:pPr algn="r">
+              <a:buNone/>
               <a:defRPr sz="825" b="1">
                 <a:solidFill>
                   <a:srgbClr val="0B1F3A">
@@ -9663,6 +10755,7 @@
           <a:lstStyle xmlns:a="http://schemas.openxmlformats.org/drawingml/2006/main"/>
           <a:p xmlns:a="http://schemas.openxmlformats.org/drawingml/2006/main">
             <a:pPr>
+              <a:buNone/>
               <a:defRPr sz="2925" b="1">
                 <a:solidFill>
                   <a:srgbClr val="FFFFFF"/>
@@ -9713,6 +10806,7 @@
           <a:lstStyle xmlns:a="http://schemas.openxmlformats.org/drawingml/2006/main"/>
           <a:p xmlns:a="http://schemas.openxmlformats.org/drawingml/2006/main">
             <a:pPr>
+              <a:buNone/>
               <a:defRPr sz="3450" b="1">
                 <a:solidFill>
                   <a:srgbClr val="1EC5FF"/>
@@ -9763,6 +10857,7 @@
           <a:lstStyle xmlns:a="http://schemas.openxmlformats.org/drawingml/2006/main"/>
           <a:p xmlns:a="http://schemas.openxmlformats.org/drawingml/2006/main">
             <a:pPr>
+              <a:buNone/>
               <a:defRPr sz="1575" b="1">
                 <a:solidFill>
                   <a:srgbClr val="FFFFFF"/>
@@ -9844,6 +10939,7 @@
           <a:lstStyle xmlns:a="http://schemas.openxmlformats.org/drawingml/2006/main"/>
           <a:p xmlns:a="http://schemas.openxmlformats.org/drawingml/2006/main">
             <a:pPr>
+              <a:buNone/>
               <a:defRPr sz="3450" b="1">
                 <a:solidFill>
                   <a:srgbClr val="1EC5FF"/>
@@ -9894,6 +10990,7 @@
           <a:lstStyle xmlns:a="http://schemas.openxmlformats.org/drawingml/2006/main"/>
           <a:p xmlns:a="http://schemas.openxmlformats.org/drawingml/2006/main">
             <a:pPr>
+              <a:buNone/>
               <a:defRPr sz="1575" b="1">
                 <a:solidFill>
                   <a:srgbClr val="FFFFFF"/>
@@ -9975,6 +11072,7 @@
           <a:lstStyle xmlns:a="http://schemas.openxmlformats.org/drawingml/2006/main"/>
           <a:p xmlns:a="http://schemas.openxmlformats.org/drawingml/2006/main">
             <a:pPr>
+              <a:buNone/>
               <a:defRPr sz="3450" b="1">
                 <a:solidFill>
                   <a:srgbClr val="1EC5FF"/>
@@ -10025,6 +11123,7 @@
           <a:lstStyle xmlns:a="http://schemas.openxmlformats.org/drawingml/2006/main"/>
           <a:p xmlns:a="http://schemas.openxmlformats.org/drawingml/2006/main">
             <a:pPr>
+              <a:buNone/>
               <a:defRPr sz="1575" b="1">
                 <a:solidFill>
                   <a:srgbClr val="FFFFFF"/>
@@ -10075,6 +11174,7 @@
           <a:lstStyle xmlns:a="http://schemas.openxmlformats.org/drawingml/2006/main"/>
           <a:p xmlns:a="http://schemas.openxmlformats.org/drawingml/2006/main">
             <a:pPr>
+              <a:buNone/>
               <a:defRPr sz="1050" b="1">
                 <a:solidFill>
                   <a:srgbClr val="1EC5FF"/>
@@ -10158,6 +11258,7 @@
           <a:lstStyle xmlns:a="http://schemas.openxmlformats.org/drawingml/2006/main"/>
           <a:p xmlns:a="http://schemas.openxmlformats.org/drawingml/2006/main">
             <a:pPr>
+              <a:buNone/>
               <a:defRPr sz="825">
                 <a:solidFill>
                   <a:srgbClr val="FFFFFF">
@@ -10212,6 +11313,7 @@
           <a:lstStyle xmlns:a="http://schemas.openxmlformats.org/drawingml/2006/main"/>
           <a:p xmlns:a="http://schemas.openxmlformats.org/drawingml/2006/main">
             <a:pPr algn="r">
+              <a:buNone/>
               <a:defRPr sz="825" b="1">
                 <a:solidFill>
                   <a:srgbClr val="FFFFFF">
@@ -10303,6 +11405,7 @@
           <a:lstStyle xmlns:a="http://schemas.openxmlformats.org/drawingml/2006/main"/>
           <a:p xmlns:a="http://schemas.openxmlformats.org/drawingml/2006/main">
             <a:pPr>
+              <a:buNone/>
               <a:defRPr sz="2925" b="1">
                 <a:solidFill>
                   <a:srgbClr val="FFFFFF"/>
@@ -10353,6 +11456,7 @@
           <a:lstStyle xmlns:a="http://schemas.openxmlformats.org/drawingml/2006/main"/>
           <a:p xmlns:a="http://schemas.openxmlformats.org/drawingml/2006/main">
             <a:pPr>
+              <a:buNone/>
               <a:defRPr sz="1650">
                 <a:solidFill>
                   <a:srgbClr val="E2F2FF"/>
@@ -10403,6 +11507,7 @@
           <a:lstStyle xmlns:a="http://schemas.openxmlformats.org/drawingml/2006/main"/>
           <a:p xmlns:a="http://schemas.openxmlformats.org/drawingml/2006/main">
             <a:pPr>
+              <a:buNone/>
               <a:defRPr sz="1800">
                 <a:solidFill>
                   <a:srgbClr val="FFFFFF"/>
@@ -10420,6 +11525,7 @@
           </a:p>
           <a:p xmlns:a="http://schemas.openxmlformats.org/drawingml/2006/main">
             <a:pPr>
+              <a:buNone/>
               <a:defRPr sz="1800">
                 <a:solidFill>
                   <a:srgbClr val="FFFFFF"/>
@@ -10437,6 +11543,7 @@
           </a:p>
           <a:p xmlns:a="http://schemas.openxmlformats.org/drawingml/2006/main">
             <a:pPr>
+              <a:buNone/>
               <a:defRPr sz="1800">
                 <a:solidFill>
                   <a:srgbClr val="FFFFFF"/>
@@ -10561,6 +11668,7 @@
           <a:lstStyle xmlns:a="http://schemas.openxmlformats.org/drawingml/2006/main"/>
           <a:p xmlns:a="http://schemas.openxmlformats.org/drawingml/2006/main">
             <a:pPr algn="ctr">
+              <a:buNone/>
               <a:defRPr sz="4650" b="1">
                 <a:solidFill>
                   <a:srgbClr val="1EC5FF"/>
@@ -10611,6 +11719,7 @@
           <a:lstStyle xmlns:a="http://schemas.openxmlformats.org/drawingml/2006/main"/>
           <a:p xmlns:a="http://schemas.openxmlformats.org/drawingml/2006/main">
             <a:pPr>
+              <a:buNone/>
               <a:defRPr sz="1050" b="1">
                 <a:solidFill>
                   <a:srgbClr val="1EC5FF"/>
@@ -10694,6 +11803,7 @@
           <a:lstStyle xmlns:a="http://schemas.openxmlformats.org/drawingml/2006/main"/>
           <a:p xmlns:a="http://schemas.openxmlformats.org/drawingml/2006/main">
             <a:pPr>
+              <a:buNone/>
               <a:defRPr sz="825">
                 <a:solidFill>
                   <a:srgbClr val="FFFFFF">
@@ -10748,6 +11858,7 @@
           <a:lstStyle xmlns:a="http://schemas.openxmlformats.org/drawingml/2006/main"/>
           <a:p xmlns:a="http://schemas.openxmlformats.org/drawingml/2006/main">
             <a:pPr algn="r">
+              <a:buNone/>
               <a:defRPr sz="825" b="1">
                 <a:solidFill>
                   <a:srgbClr val="FFFFFF">
@@ -10831,6 +11942,7 @@
           <a:lstStyle xmlns:a="http://schemas.openxmlformats.org/drawingml/2006/main"/>
           <a:p xmlns:a="http://schemas.openxmlformats.org/drawingml/2006/main">
             <a:pPr>
+              <a:buNone/>
               <a:defRPr sz="2925" b="1">
                 <a:solidFill>
                   <a:srgbClr val="0B1F3A"/>
@@ -10881,6 +11993,7 @@
           <a:lstStyle xmlns:a="http://schemas.openxmlformats.org/drawingml/2006/main"/>
           <a:p xmlns:a="http://schemas.openxmlformats.org/drawingml/2006/main">
             <a:pPr>
+              <a:buNone/>
               <a:defRPr sz="1650">
                 <a:solidFill>
                   <a:srgbClr val="5C6F86"/>
@@ -10931,6 +12044,7 @@
           <a:lstStyle xmlns:a="http://schemas.openxmlformats.org/drawingml/2006/main"/>
           <a:p xmlns:a="http://schemas.openxmlformats.org/drawingml/2006/main">
             <a:pPr>
+              <a:buNone/>
               <a:defRPr sz="1800">
                 <a:solidFill>
                   <a:srgbClr val="0B1F3A"/>
@@ -10948,6 +12062,7 @@
           </a:p>
           <a:p xmlns:a="http://schemas.openxmlformats.org/drawingml/2006/main">
             <a:pPr>
+              <a:buNone/>
               <a:defRPr sz="1800">
                 <a:solidFill>
                   <a:srgbClr val="0B1F3A"/>
@@ -10965,6 +12080,7 @@
           </a:p>
           <a:p xmlns:a="http://schemas.openxmlformats.org/drawingml/2006/main">
             <a:pPr>
+              <a:buNone/>
               <a:defRPr sz="1800">
                 <a:solidFill>
                   <a:srgbClr val="0B1F3A"/>
@@ -10982,6 +12098,7 @@
           </a:p>
           <a:p xmlns:a="http://schemas.openxmlformats.org/drawingml/2006/main">
             <a:pPr>
+              <a:buNone/>
               <a:defRPr sz="1800">
                 <a:solidFill>
                   <a:srgbClr val="0B1F3A"/>
@@ -11106,6 +12223,7 @@
           <a:lstStyle xmlns:a="http://schemas.openxmlformats.org/drawingml/2006/main"/>
           <a:p xmlns:a="http://schemas.openxmlformats.org/drawingml/2006/main">
             <a:pPr algn="ctr">
+              <a:buNone/>
               <a:defRPr sz="4650" b="1">
                 <a:solidFill>
                   <a:srgbClr val="1565C0"/>
@@ -11156,6 +12274,7 @@
           <a:lstStyle xmlns:a="http://schemas.openxmlformats.org/drawingml/2006/main"/>
           <a:p xmlns:a="http://schemas.openxmlformats.org/drawingml/2006/main">
             <a:pPr>
+              <a:buNone/>
               <a:defRPr sz="1050" b="1">
                 <a:solidFill>
                   <a:srgbClr val="1565C0"/>
@@ -11239,6 +12358,7 @@
           <a:lstStyle xmlns:a="http://schemas.openxmlformats.org/drawingml/2006/main"/>
           <a:p xmlns:a="http://schemas.openxmlformats.org/drawingml/2006/main">
             <a:pPr>
+              <a:buNone/>
               <a:defRPr sz="825">
                 <a:solidFill>
                   <a:srgbClr val="0B1F3A">
@@ -11293,6 +12413,7 @@
           <a:lstStyle xmlns:a="http://schemas.openxmlformats.org/drawingml/2006/main"/>
           <a:p xmlns:a="http://schemas.openxmlformats.org/drawingml/2006/main">
             <a:pPr algn="r">
+              <a:buNone/>
               <a:defRPr sz="825" b="1">
                 <a:solidFill>
                   <a:srgbClr val="0B1F3A">
@@ -11384,6 +12505,7 @@
           <a:lstStyle xmlns:a="http://schemas.openxmlformats.org/drawingml/2006/main"/>
           <a:p xmlns:a="http://schemas.openxmlformats.org/drawingml/2006/main">
             <a:pPr>
+              <a:buNone/>
               <a:defRPr sz="2925" b="1">
                 <a:solidFill>
                   <a:srgbClr val="FFFFFF"/>
@@ -11440,6 +12562,7 @@
           <a:lstStyle xmlns:a="http://schemas.openxmlformats.org/drawingml/2006/main"/>
           <a:p xmlns:a="http://schemas.openxmlformats.org/drawingml/2006/main">
             <a:pPr algn="ctr">
+              <a:buNone/>
               <a:defRPr sz="1350" b="1">
                 <a:solidFill>
                   <a:srgbClr val="FFFFFF"/>
@@ -11496,6 +12619,7 @@
           <a:lstStyle xmlns:a="http://schemas.openxmlformats.org/drawingml/2006/main"/>
           <a:p xmlns:a="http://schemas.openxmlformats.org/drawingml/2006/main">
             <a:pPr algn="ctr">
+              <a:buNone/>
               <a:defRPr sz="1350" b="1">
                 <a:solidFill>
                   <a:srgbClr val="FFFFFF"/>
@@ -11552,6 +12676,7 @@
           <a:lstStyle xmlns:a="http://schemas.openxmlformats.org/drawingml/2006/main"/>
           <a:p xmlns:a="http://schemas.openxmlformats.org/drawingml/2006/main">
             <a:pPr algn="ctr">
+              <a:buNone/>
               <a:defRPr sz="1350" b="1">
                 <a:solidFill>
                   <a:srgbClr val="FFFFFF"/>
@@ -11608,6 +12733,7 @@
           <a:lstStyle xmlns:a="http://schemas.openxmlformats.org/drawingml/2006/main"/>
           <a:p xmlns:a="http://schemas.openxmlformats.org/drawingml/2006/main">
             <a:pPr algn="ctr">
+              <a:buNone/>
               <a:defRPr sz="1350" b="1">
                 <a:solidFill>
                   <a:srgbClr val="FFFFFF"/>
@@ -11664,6 +12790,7 @@
           <a:lstStyle xmlns:a="http://schemas.openxmlformats.org/drawingml/2006/main"/>
           <a:p xmlns:a="http://schemas.openxmlformats.org/drawingml/2006/main">
             <a:pPr algn="ctr">
+              <a:buNone/>
               <a:defRPr sz="1350" b="1">
                 <a:solidFill>
                   <a:srgbClr val="FFFFFF"/>
@@ -11683,7 +12810,7 @@
       </p:sp>
       <p:cxnSp>
         <p:nvCxnSpPr>
-          <p:cNvPr id="21" name=""/>
+          <p:cNvPr id="31" name=""/>
           <p:cNvCxnSpPr>
             <a:stCxn xmlns:a="http://schemas.openxmlformats.org/drawingml/2006/main" id="2" idx="3"/>
             <a:endCxn xmlns:a="http://schemas.openxmlformats.org/drawingml/2006/main" id="3" idx="1"/>
@@ -11709,7 +12836,7 @@
       </p:cxnSp>
       <p:cxnSp>
         <p:nvCxnSpPr>
-          <p:cNvPr id="22" name=""/>
+          <p:cNvPr id="32" name=""/>
           <p:cNvCxnSpPr>
             <a:stCxn xmlns:a="http://schemas.openxmlformats.org/drawingml/2006/main" id="3" idx="3"/>
             <a:endCxn xmlns:a="http://schemas.openxmlformats.org/drawingml/2006/main" id="4" idx="1"/>
@@ -11735,7 +12862,7 @@
       </p:cxnSp>
       <p:cxnSp>
         <p:nvCxnSpPr>
-          <p:cNvPr id="23" name=""/>
+          <p:cNvPr id="33" name=""/>
           <p:cNvCxnSpPr>
             <a:stCxn xmlns:a="http://schemas.openxmlformats.org/drawingml/2006/main" id="4" idx="3"/>
             <a:endCxn xmlns:a="http://schemas.openxmlformats.org/drawingml/2006/main" id="5" idx="1"/>
@@ -11761,7 +12888,7 @@
       </p:cxnSp>
       <p:cxnSp>
         <p:nvCxnSpPr>
-          <p:cNvPr id="24" name=""/>
+          <p:cNvPr id="34" name=""/>
           <p:cNvCxnSpPr>
             <a:stCxn xmlns:a="http://schemas.openxmlformats.org/drawingml/2006/main" id="5" idx="3"/>
             <a:endCxn xmlns:a="http://schemas.openxmlformats.org/drawingml/2006/main" id="6" idx="1"/>
@@ -11818,6 +12945,7 @@
           <a:lstStyle xmlns:a="http://schemas.openxmlformats.org/drawingml/2006/main"/>
           <a:p xmlns:a="http://schemas.openxmlformats.org/drawingml/2006/main">
             <a:pPr>
+              <a:buNone/>
               <a:defRPr sz="1050" b="1">
                 <a:solidFill>
                   <a:srgbClr val="1EC5FF"/>
@@ -11901,6 +13029,7 @@
           <a:lstStyle xmlns:a="http://schemas.openxmlformats.org/drawingml/2006/main"/>
           <a:p xmlns:a="http://schemas.openxmlformats.org/drawingml/2006/main">
             <a:pPr>
+              <a:buNone/>
               <a:defRPr sz="825">
                 <a:solidFill>
                   <a:srgbClr val="FFFFFF">
@@ -11955,6 +13084,7 @@
           <a:lstStyle xmlns:a="http://schemas.openxmlformats.org/drawingml/2006/main"/>
           <a:p xmlns:a="http://schemas.openxmlformats.org/drawingml/2006/main">
             <a:pPr algn="r">
+              <a:buNone/>
               <a:defRPr sz="825" b="1">
                 <a:solidFill>
                   <a:srgbClr val="FFFFFF">
@@ -12046,6 +13176,7 @@
           <a:lstStyle xmlns:a="http://schemas.openxmlformats.org/drawingml/2006/main"/>
           <a:p xmlns:a="http://schemas.openxmlformats.org/drawingml/2006/main">
             <a:pPr>
+              <a:buNone/>
               <a:defRPr sz="2925" b="1">
                 <a:solidFill>
                   <a:srgbClr val="FFFFFF"/>
@@ -12096,6 +13227,7 @@
           <a:lstStyle xmlns:a="http://schemas.openxmlformats.org/drawingml/2006/main"/>
           <a:p xmlns:a="http://schemas.openxmlformats.org/drawingml/2006/main">
             <a:pPr>
+              <a:buNone/>
               <a:defRPr sz="1650">
                 <a:solidFill>
                   <a:srgbClr val="E2F2FF"/>
@@ -12146,6 +13278,7 @@
           <a:lstStyle xmlns:a="http://schemas.openxmlformats.org/drawingml/2006/main"/>
           <a:p xmlns:a="http://schemas.openxmlformats.org/drawingml/2006/main">
             <a:pPr>
+              <a:buNone/>
               <a:defRPr sz="1800">
                 <a:solidFill>
                   <a:srgbClr val="FFFFFF"/>
@@ -12163,6 +13296,7 @@
           </a:p>
           <a:p xmlns:a="http://schemas.openxmlformats.org/drawingml/2006/main">
             <a:pPr>
+              <a:buNone/>
               <a:defRPr sz="1800">
                 <a:solidFill>
                   <a:srgbClr val="FFFFFF"/>
@@ -12180,6 +13314,7 @@
           </a:p>
           <a:p xmlns:a="http://schemas.openxmlformats.org/drawingml/2006/main">
             <a:pPr>
+              <a:buNone/>
               <a:defRPr sz="1800">
                 <a:solidFill>
                   <a:srgbClr val="FFFFFF"/>
@@ -12304,6 +13439,7 @@
           <a:lstStyle xmlns:a="http://schemas.openxmlformats.org/drawingml/2006/main"/>
           <a:p xmlns:a="http://schemas.openxmlformats.org/drawingml/2006/main">
             <a:pPr algn="ctr">
+              <a:buNone/>
               <a:defRPr sz="4650" b="1">
                 <a:solidFill>
                   <a:srgbClr val="1EC5FF"/>
@@ -12354,6 +13490,7 @@
           <a:lstStyle xmlns:a="http://schemas.openxmlformats.org/drawingml/2006/main"/>
           <a:p xmlns:a="http://schemas.openxmlformats.org/drawingml/2006/main">
             <a:pPr>
+              <a:buNone/>
               <a:defRPr sz="1050" b="1">
                 <a:solidFill>
                   <a:srgbClr val="1EC5FF"/>
@@ -12437,6 +13574,7 @@
           <a:lstStyle xmlns:a="http://schemas.openxmlformats.org/drawingml/2006/main"/>
           <a:p xmlns:a="http://schemas.openxmlformats.org/drawingml/2006/main">
             <a:pPr>
+              <a:buNone/>
               <a:defRPr sz="825">
                 <a:solidFill>
                   <a:srgbClr val="FFFFFF">
@@ -12491,6 +13629,7 @@
           <a:lstStyle xmlns:a="http://schemas.openxmlformats.org/drawingml/2006/main"/>
           <a:p xmlns:a="http://schemas.openxmlformats.org/drawingml/2006/main">
             <a:pPr algn="r">
+              <a:buNone/>
               <a:defRPr sz="825" b="1">
                 <a:solidFill>
                   <a:srgbClr val="FFFFFF">
@@ -12574,6 +13713,7 @@
           <a:lstStyle xmlns:a="http://schemas.openxmlformats.org/drawingml/2006/main"/>
           <a:p xmlns:a="http://schemas.openxmlformats.org/drawingml/2006/main">
             <a:pPr>
+              <a:buNone/>
               <a:defRPr sz="2925" b="1">
                 <a:solidFill>
                   <a:srgbClr val="0B1F3A"/>
@@ -12624,6 +13764,7 @@
           <a:lstStyle xmlns:a="http://schemas.openxmlformats.org/drawingml/2006/main"/>
           <a:p xmlns:a="http://schemas.openxmlformats.org/drawingml/2006/main">
             <a:pPr algn="ctr">
+              <a:buNone/>
               <a:defRPr sz="3600" b="1">
                 <a:solidFill>
                   <a:srgbClr val="1565C0"/>
@@ -12674,6 +13815,7 @@
           <a:lstStyle xmlns:a="http://schemas.openxmlformats.org/drawingml/2006/main"/>
           <a:p xmlns:a="http://schemas.openxmlformats.org/drawingml/2006/main">
             <a:pPr algn="ctr">
+              <a:buNone/>
               <a:defRPr sz="2250" b="1">
                 <a:solidFill>
                   <a:srgbClr val="0B1F3A"/>
@@ -12755,6 +13897,7 @@
           <a:lstStyle xmlns:a="http://schemas.openxmlformats.org/drawingml/2006/main"/>
           <a:p xmlns:a="http://schemas.openxmlformats.org/drawingml/2006/main">
             <a:pPr>
+              <a:buNone/>
               <a:defRPr sz="1050" b="1">
                 <a:solidFill>
                   <a:srgbClr val="1565C0"/>
@@ -12838,6 +13981,7 @@
           <a:lstStyle xmlns:a="http://schemas.openxmlformats.org/drawingml/2006/main"/>
           <a:p xmlns:a="http://schemas.openxmlformats.org/drawingml/2006/main">
             <a:pPr>
+              <a:buNone/>
               <a:defRPr sz="825">
                 <a:solidFill>
                   <a:srgbClr val="0B1F3A">
@@ -12892,6 +14036,7 @@
           <a:lstStyle xmlns:a="http://schemas.openxmlformats.org/drawingml/2006/main"/>
           <a:p xmlns:a="http://schemas.openxmlformats.org/drawingml/2006/main">
             <a:pPr algn="r">
+              <a:buNone/>
               <a:defRPr sz="825" b="1">
                 <a:solidFill>
                   <a:srgbClr val="0B1F3A">
@@ -12975,6 +14120,7 @@
           <a:lstStyle xmlns:a="http://schemas.openxmlformats.org/drawingml/2006/main"/>
           <a:p xmlns:a="http://schemas.openxmlformats.org/drawingml/2006/main">
             <a:pPr>
+              <a:buNone/>
               <a:defRPr sz="2925" b="1">
                 <a:solidFill>
                   <a:srgbClr val="0B1F3A"/>
@@ -13025,6 +14171,7 @@
           <a:lstStyle xmlns:a="http://schemas.openxmlformats.org/drawingml/2006/main"/>
           <a:p xmlns:a="http://schemas.openxmlformats.org/drawingml/2006/main">
             <a:pPr>
+              <a:buNone/>
               <a:defRPr sz="1650">
                 <a:solidFill>
                   <a:srgbClr val="5C6F86"/>
@@ -13075,6 +14222,7 @@
           <a:lstStyle xmlns:a="http://schemas.openxmlformats.org/drawingml/2006/main"/>
           <a:p xmlns:a="http://schemas.openxmlformats.org/drawingml/2006/main">
             <a:pPr>
+              <a:buNone/>
               <a:defRPr sz="1800">
                 <a:solidFill>
                   <a:srgbClr val="0B1F3A"/>
@@ -13092,6 +14240,7 @@
           </a:p>
           <a:p xmlns:a="http://schemas.openxmlformats.org/drawingml/2006/main">
             <a:pPr>
+              <a:buNone/>
               <a:defRPr sz="1800">
                 <a:solidFill>
                   <a:srgbClr val="0B1F3A"/>
@@ -13109,6 +14258,7 @@
           </a:p>
           <a:p xmlns:a="http://schemas.openxmlformats.org/drawingml/2006/main">
             <a:pPr>
+              <a:buNone/>
               <a:defRPr sz="1800">
                 <a:solidFill>
                   <a:srgbClr val="0B1F3A"/>
@@ -13233,6 +14383,7 @@
           <a:lstStyle xmlns:a="http://schemas.openxmlformats.org/drawingml/2006/main"/>
           <a:p xmlns:a="http://schemas.openxmlformats.org/drawingml/2006/main">
             <a:pPr algn="ctr">
+              <a:buNone/>
               <a:defRPr sz="4650" b="1">
                 <a:solidFill>
                   <a:srgbClr val="1565C0"/>
@@ -13283,6 +14434,7 @@
           <a:lstStyle xmlns:a="http://schemas.openxmlformats.org/drawingml/2006/main"/>
           <a:p xmlns:a="http://schemas.openxmlformats.org/drawingml/2006/main">
             <a:pPr>
+              <a:buNone/>
               <a:defRPr sz="1050" b="1">
                 <a:solidFill>
                   <a:srgbClr val="1565C0"/>
@@ -13366,6 +14518,7 @@
           <a:lstStyle xmlns:a="http://schemas.openxmlformats.org/drawingml/2006/main"/>
           <a:p xmlns:a="http://schemas.openxmlformats.org/drawingml/2006/main">
             <a:pPr>
+              <a:buNone/>
               <a:defRPr sz="825">
                 <a:solidFill>
                   <a:srgbClr val="0B1F3A">
@@ -13420,6 +14573,7 @@
           <a:lstStyle xmlns:a="http://schemas.openxmlformats.org/drawingml/2006/main"/>
           <a:p xmlns:a="http://schemas.openxmlformats.org/drawingml/2006/main">
             <a:pPr algn="r">
+              <a:buNone/>
               <a:defRPr sz="825" b="1">
                 <a:solidFill>
                   <a:srgbClr val="0B1F3A">

--- a/assets/decks/episodio-02-gold-nao-e-semantica.pptx
+++ b/assets/decks/episodio-02-gold-nao-e-semantica.pptx
@@ -2,33 +2,33 @@
 <file path=ppt/presentation.xml><?xml version="1.0" encoding="utf-8"?>
 <p:presentation xmlns:p="http://schemas.openxmlformats.org/presentationml/2006/main">
   <p:sldMasterIdLst>
-    <p:sldMasterId xmlns:r="http://schemas.openxmlformats.org/officeDocument/2006/relationships" id="2147483648" r:id="Rc3fa8cb7ccdd4546"/>
-    <p:sldMasterId xmlns:r="http://schemas.openxmlformats.org/officeDocument/2006/relationships" id="2147483650" r:id="R13d88186bf274a63"/>
+    <p:sldMasterId xmlns:r="http://schemas.openxmlformats.org/officeDocument/2006/relationships" id="2147483648" r:id="R566eb3dd24934812"/>
+    <p:sldMasterId xmlns:r="http://schemas.openxmlformats.org/officeDocument/2006/relationships" id="2147483650" r:id="R3a29615735e9404f"/>
   </p:sldMasterIdLst>
   <p:notesMasterIdLst>
-    <p:notesMasterId xmlns:r="http://schemas.openxmlformats.org/officeDocument/2006/relationships" r:id="R6dbc110e7fdc4c72"/>
+    <p:notesMasterId xmlns:r="http://schemas.openxmlformats.org/officeDocument/2006/relationships" r:id="R80bc8008437d4492"/>
   </p:notesMasterIdLst>
   <p:sldIdLst>
-    <p:sldId xmlns:r="http://schemas.openxmlformats.org/officeDocument/2006/relationships" id="256" r:id="R7202760d7ce24bd6"/>
-    <p:sldId xmlns:r="http://schemas.openxmlformats.org/officeDocument/2006/relationships" id="257" r:id="Rba0351aba05148d8"/>
-    <p:sldId xmlns:r="http://schemas.openxmlformats.org/officeDocument/2006/relationships" id="258" r:id="R3326e609bd10472b"/>
-    <p:sldId xmlns:r="http://schemas.openxmlformats.org/officeDocument/2006/relationships" id="259" r:id="R222296769681453e"/>
-    <p:sldId xmlns:r="http://schemas.openxmlformats.org/officeDocument/2006/relationships" id="260" r:id="Re674599788234236"/>
-    <p:sldId xmlns:r="http://schemas.openxmlformats.org/officeDocument/2006/relationships" id="261" r:id="R3acde0f1cb5d44c9"/>
-    <p:sldId xmlns:r="http://schemas.openxmlformats.org/officeDocument/2006/relationships" id="262" r:id="R9ca4bf2a235e4f5f"/>
-    <p:sldId xmlns:r="http://schemas.openxmlformats.org/officeDocument/2006/relationships" id="263" r:id="R960c67cbd7134998"/>
-    <p:sldId xmlns:r="http://schemas.openxmlformats.org/officeDocument/2006/relationships" id="264" r:id="Re46c286c274844a5"/>
-    <p:sldId xmlns:r="http://schemas.openxmlformats.org/officeDocument/2006/relationships" id="265" r:id="Ra9c079736ba241f7"/>
-    <p:sldId xmlns:r="http://schemas.openxmlformats.org/officeDocument/2006/relationships" id="266" r:id="R66ebfe113d204cf6"/>
-    <p:sldId xmlns:r="http://schemas.openxmlformats.org/officeDocument/2006/relationships" id="267" r:id="Rff0b335f96b24c20"/>
-    <p:sldId xmlns:r="http://schemas.openxmlformats.org/officeDocument/2006/relationships" id="268" r:id="R507b4fc3e082498b"/>
-    <p:sldId xmlns:r="http://schemas.openxmlformats.org/officeDocument/2006/relationships" id="269" r:id="Rcc2cf582b3d54684"/>
-    <p:sldId xmlns:r="http://schemas.openxmlformats.org/officeDocument/2006/relationships" id="270" r:id="R48b795e831254ccc"/>
-    <p:sldId xmlns:r="http://schemas.openxmlformats.org/officeDocument/2006/relationships" id="271" r:id="Rbfe51c2fe2aa4beb"/>
-    <p:sldId xmlns:r="http://schemas.openxmlformats.org/officeDocument/2006/relationships" id="272" r:id="R0d6490f4771844c6"/>
-    <p:sldId xmlns:r="http://schemas.openxmlformats.org/officeDocument/2006/relationships" id="273" r:id="Rd38b64a8e10b476b"/>
-    <p:sldId xmlns:r="http://schemas.openxmlformats.org/officeDocument/2006/relationships" id="274" r:id="R5d7be5424e1d449c"/>
-    <p:sldId xmlns:r="http://schemas.openxmlformats.org/officeDocument/2006/relationships" id="275" r:id="R9e6fffdddda14880"/>
+    <p:sldId xmlns:r="http://schemas.openxmlformats.org/officeDocument/2006/relationships" id="256" r:id="R06b2cd26eeec4300"/>
+    <p:sldId xmlns:r="http://schemas.openxmlformats.org/officeDocument/2006/relationships" id="257" r:id="R33adb5f562b54079"/>
+    <p:sldId xmlns:r="http://schemas.openxmlformats.org/officeDocument/2006/relationships" id="258" r:id="R56cb397ef35c4ead"/>
+    <p:sldId xmlns:r="http://schemas.openxmlformats.org/officeDocument/2006/relationships" id="259" r:id="Rcfedb1e7f5f844f9"/>
+    <p:sldId xmlns:r="http://schemas.openxmlformats.org/officeDocument/2006/relationships" id="260" r:id="R8994e8337da346f4"/>
+    <p:sldId xmlns:r="http://schemas.openxmlformats.org/officeDocument/2006/relationships" id="261" r:id="Ra70f8068d37442c0"/>
+    <p:sldId xmlns:r="http://schemas.openxmlformats.org/officeDocument/2006/relationships" id="262" r:id="R341e95d3c1bc4245"/>
+    <p:sldId xmlns:r="http://schemas.openxmlformats.org/officeDocument/2006/relationships" id="263" r:id="R17d4c54f513b46db"/>
+    <p:sldId xmlns:r="http://schemas.openxmlformats.org/officeDocument/2006/relationships" id="264" r:id="R6d3608bf519e43ae"/>
+    <p:sldId xmlns:r="http://schemas.openxmlformats.org/officeDocument/2006/relationships" id="265" r:id="R2d4edcde6f1648b2"/>
+    <p:sldId xmlns:r="http://schemas.openxmlformats.org/officeDocument/2006/relationships" id="266" r:id="Rf0474fd9196749d8"/>
+    <p:sldId xmlns:r="http://schemas.openxmlformats.org/officeDocument/2006/relationships" id="267" r:id="Re6fc187c55894d65"/>
+    <p:sldId xmlns:r="http://schemas.openxmlformats.org/officeDocument/2006/relationships" id="268" r:id="Rad7e31a7c04840bd"/>
+    <p:sldId xmlns:r="http://schemas.openxmlformats.org/officeDocument/2006/relationships" id="269" r:id="R9534576b57384b8e"/>
+    <p:sldId xmlns:r="http://schemas.openxmlformats.org/officeDocument/2006/relationships" id="270" r:id="Rcf5c2f0e1abb43f7"/>
+    <p:sldId xmlns:r="http://schemas.openxmlformats.org/officeDocument/2006/relationships" id="271" r:id="R169750709a514915"/>
+    <p:sldId xmlns:r="http://schemas.openxmlformats.org/officeDocument/2006/relationships" id="272" r:id="R4e29086092da4415"/>
+    <p:sldId xmlns:r="http://schemas.openxmlformats.org/officeDocument/2006/relationships" id="273" r:id="R29e31f3c8f884111"/>
+    <p:sldId xmlns:r="http://schemas.openxmlformats.org/officeDocument/2006/relationships" id="274" r:id="R0777c50f46f24aa9"/>
+    <p:sldId xmlns:r="http://schemas.openxmlformats.org/officeDocument/2006/relationships" id="275" r:id="Rb3b57d3671224ec3"/>
   </p:sldIdLst>
   <p:sldSz cx="12192000" cy="6858000"/>
   <p:notesSz cx="6858000" cy="9144000"/>
@@ -542,6 +542,11 @@
           </a:p>
           <a:p xmlns:a="http://schemas.openxmlformats.org/drawingml/2006/main">
             <a:r>
+              <a:t>- https://rescuepoint.com.br/assets/img/logo.png</a:t>
+            </a:r>
+          </a:p>
+          <a:p xmlns:a="http://schemas.openxmlformats.org/drawingml/2006/main">
+            <a:r>
               <a:t>- https://github.com/AnselmoBorges/dbt-moderno-na-pratica/blob/main/roteiros/02-gold-nao-e-semantica.md</a:t>
             </a:r>
           </a:p>
@@ -707,6 +712,11 @@
           </a:p>
           <a:p xmlns:a="http://schemas.openxmlformats.org/drawingml/2006/main">
             <a:r>
+              <a:t>- https://rescuepoint.com.br/assets/img/logo.png</a:t>
+            </a:r>
+          </a:p>
+          <a:p xmlns:a="http://schemas.openxmlformats.org/drawingml/2006/main">
+            <a:r>
               <a:t>- https://github.com/AnselmoBorges/dbt-moderno-na-pratica/blob/main/roteiros/02-gold-nao-e-semantica.md</a:t>
             </a:r>
           </a:p>
@@ -877,6 +887,11 @@
           </a:p>
           <a:p xmlns:a="http://schemas.openxmlformats.org/drawingml/2006/main">
             <a:r>
+              <a:t>- https://rescuepoint.com.br/assets/img/logo.png</a:t>
+            </a:r>
+          </a:p>
+          <a:p xmlns:a="http://schemas.openxmlformats.org/drawingml/2006/main">
+            <a:r>
               <a:t>- https://github.com/AnselmoBorges/dbt-moderno-na-pratica/blob/main/roteiros/02-gold-nao-e-semantica.md</a:t>
             </a:r>
           </a:p>
@@ -1042,6 +1057,11 @@
           </a:p>
           <a:p xmlns:a="http://schemas.openxmlformats.org/drawingml/2006/main">
             <a:r>
+              <a:t>- https://rescuepoint.com.br/assets/img/logo.png</a:t>
+            </a:r>
+          </a:p>
+          <a:p xmlns:a="http://schemas.openxmlformats.org/drawingml/2006/main">
+            <a:r>
               <a:t>- https://github.com/AnselmoBorges/dbt-moderno-na-pratica/blob/main/roteiros/02-gold-nao-e-semantica.md</a:t>
             </a:r>
           </a:p>
@@ -1207,6 +1227,11 @@
           </a:p>
           <a:p xmlns:a="http://schemas.openxmlformats.org/drawingml/2006/main">
             <a:r>
+              <a:t>- https://rescuepoint.com.br/assets/img/logo.png</a:t>
+            </a:r>
+          </a:p>
+          <a:p xmlns:a="http://schemas.openxmlformats.org/drawingml/2006/main">
+            <a:r>
               <a:t>- https://github.com/AnselmoBorges/dbt-moderno-na-pratica/blob/main/roteiros/02-gold-nao-e-semantica.md</a:t>
             </a:r>
           </a:p>
@@ -1372,6 +1397,11 @@
           </a:p>
           <a:p xmlns:a="http://schemas.openxmlformats.org/drawingml/2006/main">
             <a:r>
+              <a:t>- https://rescuepoint.com.br/assets/img/logo.png</a:t>
+            </a:r>
+          </a:p>
+          <a:p xmlns:a="http://schemas.openxmlformats.org/drawingml/2006/main">
+            <a:r>
               <a:t>- https://github.com/AnselmoBorges/dbt-moderno-na-pratica/blob/main/roteiros/02-gold-nao-e-semantica.md</a:t>
             </a:r>
           </a:p>
@@ -1537,6 +1567,11 @@
           </a:p>
           <a:p xmlns:a="http://schemas.openxmlformats.org/drawingml/2006/main">
             <a:r>
+              <a:t>- https://rescuepoint.com.br/assets/img/logo.png</a:t>
+            </a:r>
+          </a:p>
+          <a:p xmlns:a="http://schemas.openxmlformats.org/drawingml/2006/main">
+            <a:r>
               <a:t>- https://github.com/AnselmoBorges/dbt-moderno-na-pratica/blob/main/roteiros/02-gold-nao-e-semantica.md</a:t>
             </a:r>
           </a:p>
@@ -1702,6 +1737,11 @@
           </a:p>
           <a:p xmlns:a="http://schemas.openxmlformats.org/drawingml/2006/main">
             <a:r>
+              <a:t>- https://rescuepoint.com.br/assets/img/logo.png</a:t>
+            </a:r>
+          </a:p>
+          <a:p xmlns:a="http://schemas.openxmlformats.org/drawingml/2006/main">
+            <a:r>
               <a:t>- https://github.com/AnselmoBorges/dbt-moderno-na-pratica/blob/main/roteiros/02-gold-nao-e-semantica.md</a:t>
             </a:r>
           </a:p>
@@ -1867,6 +1907,11 @@
           </a:p>
           <a:p xmlns:a="http://schemas.openxmlformats.org/drawingml/2006/main">
             <a:r>
+              <a:t>- https://rescuepoint.com.br/assets/img/logo.png</a:t>
+            </a:r>
+          </a:p>
+          <a:p xmlns:a="http://schemas.openxmlformats.org/drawingml/2006/main">
+            <a:r>
               <a:t>- https://github.com/AnselmoBorges/dbt-moderno-na-pratica/blob/main/roteiros/02-gold-nao-e-semantica.md</a:t>
             </a:r>
           </a:p>
@@ -2032,6 +2077,11 @@
           </a:p>
           <a:p xmlns:a="http://schemas.openxmlformats.org/drawingml/2006/main">
             <a:r>
+              <a:t>- https://rescuepoint.com.br/assets/img/logo.png</a:t>
+            </a:r>
+          </a:p>
+          <a:p xmlns:a="http://schemas.openxmlformats.org/drawingml/2006/main">
+            <a:r>
               <a:t>- https://github.com/AnselmoBorges/dbt-moderno-na-pratica/blob/main/roteiros/02-gold-nao-e-semantica.md</a:t>
             </a:r>
           </a:p>
@@ -2197,6 +2247,11 @@
           </a:p>
           <a:p xmlns:a="http://schemas.openxmlformats.org/drawingml/2006/main">
             <a:r>
+              <a:t>- https://rescuepoint.com.br/assets/img/logo.png</a:t>
+            </a:r>
+          </a:p>
+          <a:p xmlns:a="http://schemas.openxmlformats.org/drawingml/2006/main">
+            <a:r>
               <a:t>- https://github.com/AnselmoBorges/dbt-moderno-na-pratica/blob/main/roteiros/02-gold-nao-e-semantica.md</a:t>
             </a:r>
           </a:p>
@@ -2362,6 +2417,11 @@
           </a:p>
           <a:p xmlns:a="http://schemas.openxmlformats.org/drawingml/2006/main">
             <a:r>
+              <a:t>- https://rescuepoint.com.br/assets/img/logo.png</a:t>
+            </a:r>
+          </a:p>
+          <a:p xmlns:a="http://schemas.openxmlformats.org/drawingml/2006/main">
+            <a:r>
               <a:t>- https://github.com/AnselmoBorges/dbt-moderno-na-pratica/blob/main/roteiros/02-gold-nao-e-semantica.md</a:t>
             </a:r>
           </a:p>
@@ -2527,6 +2587,11 @@
           </a:p>
           <a:p xmlns:a="http://schemas.openxmlformats.org/drawingml/2006/main">
             <a:r>
+              <a:t>- https://rescuepoint.com.br/assets/img/logo.png</a:t>
+            </a:r>
+          </a:p>
+          <a:p xmlns:a="http://schemas.openxmlformats.org/drawingml/2006/main">
+            <a:r>
               <a:t>- https://github.com/AnselmoBorges/dbt-moderno-na-pratica/blob/main/roteiros/02-gold-nao-e-semantica.md</a:t>
             </a:r>
           </a:p>
@@ -2692,6 +2757,11 @@
           </a:p>
           <a:p xmlns:a="http://schemas.openxmlformats.org/drawingml/2006/main">
             <a:r>
+              <a:t>- https://rescuepoint.com.br/assets/img/logo.png</a:t>
+            </a:r>
+          </a:p>
+          <a:p xmlns:a="http://schemas.openxmlformats.org/drawingml/2006/main">
+            <a:r>
               <a:t>- https://github.com/AnselmoBorges/dbt-moderno-na-pratica/blob/main/roteiros/02-gold-nao-e-semantica.md</a:t>
             </a:r>
           </a:p>
@@ -2857,6 +2927,11 @@
           </a:p>
           <a:p xmlns:a="http://schemas.openxmlformats.org/drawingml/2006/main">
             <a:r>
+              <a:t>- https://rescuepoint.com.br/assets/img/logo.png</a:t>
+            </a:r>
+          </a:p>
+          <a:p xmlns:a="http://schemas.openxmlformats.org/drawingml/2006/main">
+            <a:r>
               <a:t>- https://github.com/AnselmoBorges/dbt-moderno-na-pratica/blob/main/roteiros/02-gold-nao-e-semantica.md</a:t>
             </a:r>
           </a:p>
@@ -3022,6 +3097,11 @@
           </a:p>
           <a:p xmlns:a="http://schemas.openxmlformats.org/drawingml/2006/main">
             <a:r>
+              <a:t>- https://rescuepoint.com.br/assets/img/logo.png</a:t>
+            </a:r>
+          </a:p>
+          <a:p xmlns:a="http://schemas.openxmlformats.org/drawingml/2006/main">
+            <a:r>
               <a:t>- https://github.com/AnselmoBorges/dbt-moderno-na-pratica/blob/main/roteiros/02-gold-nao-e-semantica.md</a:t>
             </a:r>
           </a:p>
@@ -3187,6 +3267,11 @@
           </a:p>
           <a:p xmlns:a="http://schemas.openxmlformats.org/drawingml/2006/main">
             <a:r>
+              <a:t>- https://rescuepoint.com.br/assets/img/logo.png</a:t>
+            </a:r>
+          </a:p>
+          <a:p xmlns:a="http://schemas.openxmlformats.org/drawingml/2006/main">
+            <a:r>
               <a:t>- https://github.com/AnselmoBorges/dbt-moderno-na-pratica/blob/main/roteiros/02-gold-nao-e-semantica.md</a:t>
             </a:r>
           </a:p>
@@ -3352,6 +3437,11 @@
           </a:p>
           <a:p xmlns:a="http://schemas.openxmlformats.org/drawingml/2006/main">
             <a:r>
+              <a:t>- https://rescuepoint.com.br/assets/img/logo.png</a:t>
+            </a:r>
+          </a:p>
+          <a:p xmlns:a="http://schemas.openxmlformats.org/drawingml/2006/main">
+            <a:r>
               <a:t>- https://github.com/AnselmoBorges/dbt-moderno-na-pratica/blob/main/roteiros/02-gold-nao-e-semantica.md</a:t>
             </a:r>
           </a:p>
@@ -3517,6 +3607,11 @@
           </a:p>
           <a:p xmlns:a="http://schemas.openxmlformats.org/drawingml/2006/main">
             <a:r>
+              <a:t>- https://rescuepoint.com.br/assets/img/logo.png</a:t>
+            </a:r>
+          </a:p>
+          <a:p xmlns:a="http://schemas.openxmlformats.org/drawingml/2006/main">
+            <a:r>
               <a:t>- https://github.com/AnselmoBorges/dbt-moderno-na-pratica/blob/main/roteiros/02-gold-nao-e-semantica.md</a:t>
             </a:r>
           </a:p>
@@ -3678,6 +3773,11 @@
           <a:p xmlns:a="http://schemas.openxmlformats.org/drawingml/2006/main">
             <a:r>
               <a:t>- https://www.getdbt.com/case-studies/inventa</a:t>
+            </a:r>
+          </a:p>
+          <a:p xmlns:a="http://schemas.openxmlformats.org/drawingml/2006/main">
+            <a:r>
+              <a:t>- https://rescuepoint.com.br/assets/img/logo.png</a:t>
             </a:r>
           </a:p>
           <a:p xmlns:a="http://schemas.openxmlformats.org/drawingml/2006/main">
@@ -3799,7 +3899,7 @@
   </p:cSld>
   <p:clrMap bg1="lt1" tx1="dk1" bg2="lt2" tx2="dk2" accent1="accent1" accent2="accent2" accent3="accent3" accent4="accent4" accent5="accent5" accent6="accent6" hlink="hlink" folHlink="folHlink"/>
   <p:sldLayoutIdLst>
-    <p:sldLayoutId xmlns:r="http://schemas.openxmlformats.org/officeDocument/2006/relationships" id="2147483649" r:id="R0fb8abed49684959"/>
+    <p:sldLayoutId xmlns:r="http://schemas.openxmlformats.org/officeDocument/2006/relationships" id="2147483649" r:id="Rb468352a45ef4a41"/>
   </p:sldLayoutIdLst>
   <p:txStyles>
     <p:titleStyle>
@@ -4097,8 +4197,8 @@
   </p:cSld>
   <p:clrMap bg1="lt1" tx1="dk1" bg2="lt2" tx2="dk2" accent1="accent1" accent2="accent2" accent3="accent3" accent4="accent4" accent5="accent5" accent6="accent6" hlink="hlink" folHlink="folHlink"/>
   <p:sldLayoutIdLst>
-    <p:sldLayoutId xmlns:r="http://schemas.openxmlformats.org/officeDocument/2006/relationships" id="2147483651" r:id="R18155677fa3d40fa"/>
-    <p:sldLayoutId xmlns:r="http://schemas.openxmlformats.org/officeDocument/2006/relationships" id="2147483652" r:id="R8d3b81ad38b6495e"/>
+    <p:sldLayoutId xmlns:r="http://schemas.openxmlformats.org/officeDocument/2006/relationships" id="2147483651" r:id="Rf2112a7a48f2489f"/>
+    <p:sldLayoutId xmlns:r="http://schemas.openxmlformats.org/officeDocument/2006/relationships" id="2147483652" r:id="R3b3725a1c8bd4b23"/>
   </p:sldLayoutIdLst>
 </p:sldMaster>
 </file>
@@ -4622,14 +4722,14 @@
       </p:grpSpPr>
       <p:pic>
         <p:nvPicPr>
-          <p:cNvPr id="10" name="" descr="Ilustração conceitual autoral da capa: EPISÓDIO 2 — Gold não é camada semântica."/>
+          <p:cNvPr id="13" name="" descr="Ilustração conceitual autoral da capa: EPISÓDIO 2 — Gold não é camada semântica."/>
           <p:cNvPicPr>
             <a:picLocks xmlns:a="http://schemas.openxmlformats.org/drawingml/2006/main" noChangeAspect="1"/>
           </p:cNvPicPr>
           <p:nvPr/>
         </p:nvPicPr>
         <p:blipFill>
-          <a:blip xmlns:r="http://schemas.openxmlformats.org/officeDocument/2006/relationships" xmlns:a="http://schemas.openxmlformats.org/drawingml/2006/main" r:embed="R8156351452f14d32"/>
+          <a:blip xmlns:r="http://schemas.openxmlformats.org/officeDocument/2006/relationships" xmlns:a="http://schemas.openxmlformats.org/drawingml/2006/main" r:embed="R9c4a28cfb84a47b1"/>
           <a:srcRect xmlns:a="http://schemas.openxmlformats.org/drawingml/2006/main" l="19785" t="0" r="19785" b="0"/>
           <a:stretch xmlns:a="http://schemas.openxmlformats.org/drawingml/2006/main">
             <a:fillRect l="0" t="0" r="0" b="0"/>
@@ -4650,7 +4750,7 @@
           <p:cNvPr id="2" name="cover-text-surface">
             <a:extLst xmlns:a="http://schemas.openxmlformats.org/drawingml/2006/main">
               <a:ext uri="{FF2B5EF4-FFF2-40B4-BE49-F238E27FC236}">
-                <a16:creationId xmlns:a16="http://schemas.microsoft.com/office/drawing/2014/main" id="{462C6E99-FDEC-4B64-8369-97916646926A}"/>
+                <a16:creationId xmlns:a16="http://schemas.microsoft.com/office/drawing/2014/main" id="{DCBEB50D-493D-4A7A-B1C8-1B1E14A18622}"/>
               </a:ext>
             </a:extLst>
           </p:cNvPr>
@@ -4683,7 +4783,7 @@
           <p:cNvPr id="3" name="cover-divider">
             <a:extLst xmlns:a="http://schemas.openxmlformats.org/drawingml/2006/main">
               <a:ext uri="{FF2B5EF4-FFF2-40B4-BE49-F238E27FC236}">
-                <a16:creationId xmlns:a16="http://schemas.microsoft.com/office/drawing/2014/main" id="{1E61708B-310A-491C-BE32-50699E1FB1F2}"/>
+                <a16:creationId xmlns:a16="http://schemas.microsoft.com/office/drawing/2014/main" id="{77AB6248-F24F-4D50-8CCD-BDBC5CC59816}"/>
               </a:ext>
             </a:extLst>
           </p:cNvPr>
@@ -4714,7 +4814,7 @@
           <p:cNvPr id="4" name="cover-episode">
             <a:extLst xmlns:a="http://schemas.openxmlformats.org/drawingml/2006/main">
               <a:ext uri="{FF2B5EF4-FFF2-40B4-BE49-F238E27FC236}">
-                <a16:creationId xmlns:a16="http://schemas.microsoft.com/office/drawing/2014/main" id="{BE2879BA-BBC1-4963-B2B9-C2306E9386AF}"/>
+                <a16:creationId xmlns:a16="http://schemas.microsoft.com/office/drawing/2014/main" id="{8F8C2432-2A68-419A-84FB-A42AE571B9D2}"/>
               </a:ext>
             </a:extLst>
           </p:cNvPr>
@@ -4762,10 +4862,69 @@
       </p:sp>
       <p:sp>
         <p:nvSpPr>
-          <p:cNvPr id="5" name="cover-title">
-            <a:extLst xmlns:a="http://schemas.openxmlformats.org/drawingml/2006/main">
-              <a:ext uri="{FF2B5EF4-FFF2-40B4-BE49-F238E27FC236}">
-                <a16:creationId xmlns:a16="http://schemas.microsoft.com/office/drawing/2014/main" id="{113B2D8C-C34E-43CD-9927-C67130B5709F}"/>
+          <p:cNvPr id="5" name="rescue-point-logo-background">
+            <a:extLst xmlns:a="http://schemas.openxmlformats.org/drawingml/2006/main">
+              <a:ext uri="{FF2B5EF4-FFF2-40B4-BE49-F238E27FC236}">
+                <a16:creationId xmlns:a16="http://schemas.microsoft.com/office/drawing/2014/main" id="{46C68BC9-7543-410B-AE62-5A5C5CB83605}"/>
+              </a:ext>
+            </a:extLst>
+          </p:cNvPr>
+          <p:cNvSpPr>
+            <a:spLocks xmlns:a="http://schemas.openxmlformats.org/drawingml/2006/main" noGrp="1"/>
+          </p:cNvSpPr>
+          <p:nvPr/>
+        </p:nvSpPr>
+        <p:spPr>
+          <a:xfrm xmlns:a="http://schemas.openxmlformats.org/drawingml/2006/main">
+            <a:off x="9772650" y="133350"/>
+            <a:ext cx="1733550" cy="457200"/>
+          </a:xfrm>
+          <a:prstGeom xmlns:a="http://schemas.openxmlformats.org/drawingml/2006/main" prst="roundRect">
+            <a:avLst>
+              <a:gd name="adj" fmla="val 16667"/>
+            </a:avLst>
+          </a:prstGeom>
+          <a:solidFill xmlns:a="http://schemas.openxmlformats.org/drawingml/2006/main">
+            <a:srgbClr val="06142E"/>
+          </a:solidFill>
+          <a:ln xmlns:a="http://schemas.openxmlformats.org/drawingml/2006/main" w="9525">
+            <a:solidFill>
+              <a:srgbClr val="1EC5FF">
+                <a:alpha val="33333"/>
+              </a:srgbClr>
+            </a:solidFill>
+            <a:prstDash val="solid"/>
+          </a:ln>
+        </p:spPr>
+      </p:sp>
+      <p:pic>
+        <p:nvPicPr>
+          <p:cNvPr id="18" name="" descr="Ilustração conceitual autoral da capa: EPISÓDIO 2 — Gold não é camada semântica."/>
+          <p:cNvPicPr>
+            <a:picLocks xmlns:a="http://schemas.openxmlformats.org/drawingml/2006/main" noChangeAspect="1"/>
+          </p:cNvPicPr>
+          <p:nvPr/>
+        </p:nvPicPr>
+        <p:blipFill>
+          <a:blip xmlns:r="http://schemas.openxmlformats.org/officeDocument/2006/relationships" xmlns:a="http://schemas.openxmlformats.org/drawingml/2006/main" r:embed="R1c6548c14b014226"/>
+          <a:stretch xmlns:a="http://schemas.openxmlformats.org/drawingml/2006/main"/>
+        </p:blipFill>
+        <p:spPr>
+          <a:xfrm xmlns:a="http://schemas.openxmlformats.org/drawingml/2006/main">
+            <a:off x="9893718" y="209550"/>
+            <a:ext cx="1491414" cy="323850"/>
+          </a:xfrm>
+          <a:prstGeom xmlns:a="http://schemas.openxmlformats.org/drawingml/2006/main" prst="rect">
+            <a:avLst/>
+          </a:prstGeom>
+        </p:spPr>
+      </p:pic>
+      <p:sp>
+        <p:nvSpPr>
+          <p:cNvPr id="7" name="cover-title">
+            <a:extLst xmlns:a="http://schemas.openxmlformats.org/drawingml/2006/main">
+              <a:ext uri="{FF2B5EF4-FFF2-40B4-BE49-F238E27FC236}">
+                <a16:creationId xmlns:a16="http://schemas.microsoft.com/office/drawing/2014/main" id="{1492E56E-C501-4527-816A-5E70C8E6D064}"/>
               </a:ext>
             </a:extLst>
           </p:cNvPr>
@@ -4813,10 +4972,10 @@
       </p:sp>
       <p:sp>
         <p:nvSpPr>
-          <p:cNvPr id="6" name="cover-subtitle">
-            <a:extLst xmlns:a="http://schemas.openxmlformats.org/drawingml/2006/main">
-              <a:ext uri="{FF2B5EF4-FFF2-40B4-BE49-F238E27FC236}">
-                <a16:creationId xmlns:a16="http://schemas.microsoft.com/office/drawing/2014/main" id="{2B06AE02-1E9D-488E-BD58-62A5BE302563}"/>
+          <p:cNvPr id="8" name="cover-subtitle">
+            <a:extLst xmlns:a="http://schemas.openxmlformats.org/drawingml/2006/main">
+              <a:ext uri="{FF2B5EF4-FFF2-40B4-BE49-F238E27FC236}">
+                <a16:creationId xmlns:a16="http://schemas.microsoft.com/office/drawing/2014/main" id="{4C05CC3B-3EF7-4199-9C70-27666414E8D7}"/>
               </a:ext>
             </a:extLst>
           </p:cNvPr>
@@ -4864,10 +5023,10 @@
       </p:sp>
       <p:sp>
         <p:nvSpPr>
-          <p:cNvPr id="7" name="cover-accent">
-            <a:extLst xmlns:a="http://schemas.openxmlformats.org/drawingml/2006/main">
-              <a:ext uri="{FF2B5EF4-FFF2-40B4-BE49-F238E27FC236}">
-                <a16:creationId xmlns:a16="http://schemas.microsoft.com/office/drawing/2014/main" id="{7FE0BDE0-914E-41A3-A0AC-1DB3E333B5F5}"/>
+          <p:cNvPr id="9" name="cover-accent">
+            <a:extLst xmlns:a="http://schemas.openxmlformats.org/drawingml/2006/main">
+              <a:ext uri="{FF2B5EF4-FFF2-40B4-BE49-F238E27FC236}">
+                <a16:creationId xmlns:a16="http://schemas.microsoft.com/office/drawing/2014/main" id="{2A3498D5-0E24-4934-BC51-B915508CD6CC}"/>
               </a:ext>
             </a:extLst>
           </p:cNvPr>
@@ -4895,10 +5054,10 @@
       </p:sp>
       <p:sp>
         <p:nvSpPr>
-          <p:cNvPr id="8" name="cover-meta">
-            <a:extLst xmlns:a="http://schemas.openxmlformats.org/drawingml/2006/main">
-              <a:ext uri="{FF2B5EF4-FFF2-40B4-BE49-F238E27FC236}">
-                <a16:creationId xmlns:a16="http://schemas.microsoft.com/office/drawing/2014/main" id="{50815B02-6667-4FBD-819E-66B7E3C60036}"/>
+          <p:cNvPr id="10" name="cover-meta">
+            <a:extLst xmlns:a="http://schemas.openxmlformats.org/drawingml/2006/main">
+              <a:ext uri="{FF2B5EF4-FFF2-40B4-BE49-F238E27FC236}">
+                <a16:creationId xmlns:a16="http://schemas.microsoft.com/office/drawing/2014/main" id="{44567C29-800C-4B26-A09B-F23F0AEF805D}"/>
               </a:ext>
             </a:extLst>
           </p:cNvPr>
@@ -4951,7 +5110,7 @@
     </p:spTree>
     <p:extLst>
       <p:ext uri="{BB962C8B-B14F-4D97-AF65-F5344CB8AC3E}">
-        <p14:creationId xmlns:p14="http://schemas.microsoft.com/office/powerpoint/2010/main" val="2134094736"/>
+        <p14:creationId xmlns:p14="http://schemas.microsoft.com/office/powerpoint/2010/main" val="947844762"/>
       </p:ext>
     </p:extLst>
   </p:cSld>
@@ -4987,10 +5146,10 @@
       </p:grpSpPr>
       <p:sp>
         <p:nvSpPr>
-          <p:cNvPr id="10" name="slide-title">
-            <a:extLst xmlns:a="http://schemas.openxmlformats.org/drawingml/2006/main">
-              <a:ext uri="{FF2B5EF4-FFF2-40B4-BE49-F238E27FC236}">
-                <a16:creationId xmlns:a16="http://schemas.microsoft.com/office/drawing/2014/main" id="{9B06C1CE-105F-42BB-84E0-E14A80255E5D}"/>
+          <p:cNvPr id="12" name="slide-title">
+            <a:extLst xmlns:a="http://schemas.openxmlformats.org/drawingml/2006/main">
+              <a:ext uri="{FF2B5EF4-FFF2-40B4-BE49-F238E27FC236}">
+                <a16:creationId xmlns:a16="http://schemas.microsoft.com/office/drawing/2014/main" id="{783898C6-C720-4E83-8CC5-04E9C0EDAA4A}"/>
               </a:ext>
             </a:extLst>
           </p:cNvPr>
@@ -5041,7 +5200,7 @@
           <p:cNvPr id="2" name="visual-claim">
             <a:extLst xmlns:a="http://schemas.openxmlformats.org/drawingml/2006/main">
               <a:ext uri="{FF2B5EF4-FFF2-40B4-BE49-F238E27FC236}">
-                <a16:creationId xmlns:a16="http://schemas.microsoft.com/office/drawing/2014/main" id="{86AD5F96-6720-4F72-AD51-84C07A3A7B9F}"/>
+                <a16:creationId xmlns:a16="http://schemas.microsoft.com/office/drawing/2014/main" id="{2784C47C-6766-4488-9BFA-75126FFC1B5C}"/>
               </a:ext>
             </a:extLst>
           </p:cNvPr>
@@ -5092,7 +5251,7 @@
           <p:cNvPr id="3" name="image-surface">
             <a:extLst xmlns:a="http://schemas.openxmlformats.org/drawingml/2006/main">
               <a:ext uri="{FF2B5EF4-FFF2-40B4-BE49-F238E27FC236}">
-                <a16:creationId xmlns:a16="http://schemas.microsoft.com/office/drawing/2014/main" id="{8A458EAF-8BA8-42DA-8DA2-B53DD1E347E3}"/>
+                <a16:creationId xmlns:a16="http://schemas.microsoft.com/office/drawing/2014/main" id="{D53C275D-90B4-4D25-B455-B2318DF496A7}"/>
               </a:ext>
             </a:extLst>
           </p:cNvPr>
@@ -5126,14 +5285,14 @@
       </p:sp>
       <p:pic>
         <p:nvPicPr>
-          <p:cNvPr id="15" name="" descr="Figura oficial da documentação dbt usada para explicar: O ERD torna cardinalidade visível — Entidades e relações precisam anteceder a agregação.."/>
+          <p:cNvPr id="18" name="" descr="Figura oficial da documentação dbt usada para explicar: O ERD torna cardinalidade visível — Entidades e relações precisam anteceder a agregação.."/>
           <p:cNvPicPr>
             <a:picLocks xmlns:a="http://schemas.openxmlformats.org/drawingml/2006/main" noChangeAspect="1"/>
           </p:cNvPicPr>
           <p:nvPr/>
         </p:nvPicPr>
         <p:blipFill>
-          <a:blip xmlns:r="http://schemas.openxmlformats.org/officeDocument/2006/relationships" xmlns:a="http://schemas.openxmlformats.org/drawingml/2006/main" r:embed="Ra126c7c2a47f4067"/>
+          <a:blip xmlns:r="http://schemas.openxmlformats.org/officeDocument/2006/relationships" xmlns:a="http://schemas.openxmlformats.org/drawingml/2006/main" r:embed="R8f329d72192a45d5"/>
           <a:stretch xmlns:a="http://schemas.openxmlformats.org/drawingml/2006/main"/>
         </p:blipFill>
         <p:spPr>
@@ -5151,7 +5310,7 @@
           <p:cNvPr id="5" name="image-caption">
             <a:extLst xmlns:a="http://schemas.openxmlformats.org/drawingml/2006/main">
               <a:ext uri="{FF2B5EF4-FFF2-40B4-BE49-F238E27FC236}">
-                <a16:creationId xmlns:a16="http://schemas.microsoft.com/office/drawing/2014/main" id="{937D2F8D-EE90-4A0D-94FA-ED6BB90E09CD}"/>
+                <a16:creationId xmlns:a16="http://schemas.microsoft.com/office/drawing/2014/main" id="{0FB33F61-6281-4B41-8FBF-EC7EE75D229B}"/>
               </a:ext>
             </a:extLst>
           </p:cNvPr>
@@ -5202,7 +5361,7 @@
           <p:cNvPr id="6" name="eyebrow">
             <a:extLst xmlns:a="http://schemas.openxmlformats.org/drawingml/2006/main">
               <a:ext uri="{FF2B5EF4-FFF2-40B4-BE49-F238E27FC236}">
-                <a16:creationId xmlns:a16="http://schemas.microsoft.com/office/drawing/2014/main" id="{8CDAF7F4-F09A-4C10-B4FD-D28C77188A76}"/>
+                <a16:creationId xmlns:a16="http://schemas.microsoft.com/office/drawing/2014/main" id="{05BF9108-A827-40CE-8CB8-CD71D3742609}"/>
               </a:ext>
             </a:extLst>
           </p:cNvPr>
@@ -5250,10 +5409,69 @@
       </p:sp>
       <p:sp>
         <p:nvSpPr>
-          <p:cNvPr id="7" name="footer-rule">
-            <a:extLst xmlns:a="http://schemas.openxmlformats.org/drawingml/2006/main">
-              <a:ext uri="{FF2B5EF4-FFF2-40B4-BE49-F238E27FC236}">
-                <a16:creationId xmlns:a16="http://schemas.microsoft.com/office/drawing/2014/main" id="{2C42E0FB-D699-4505-A3DD-B34A998F9BB2}"/>
+          <p:cNvPr id="7" name="rescue-point-logo-background">
+            <a:extLst xmlns:a="http://schemas.openxmlformats.org/drawingml/2006/main">
+              <a:ext uri="{FF2B5EF4-FFF2-40B4-BE49-F238E27FC236}">
+                <a16:creationId xmlns:a16="http://schemas.microsoft.com/office/drawing/2014/main" id="{2BEFA888-6652-4336-8895-7FE857B8BC01}"/>
+              </a:ext>
+            </a:extLst>
+          </p:cNvPr>
+          <p:cNvSpPr>
+            <a:spLocks xmlns:a="http://schemas.openxmlformats.org/drawingml/2006/main" noGrp="1"/>
+          </p:cNvSpPr>
+          <p:nvPr/>
+        </p:nvSpPr>
+        <p:spPr>
+          <a:xfrm xmlns:a="http://schemas.openxmlformats.org/drawingml/2006/main">
+            <a:off x="9772650" y="133350"/>
+            <a:ext cx="1733550" cy="457200"/>
+          </a:xfrm>
+          <a:prstGeom xmlns:a="http://schemas.openxmlformats.org/drawingml/2006/main" prst="roundRect">
+            <a:avLst>
+              <a:gd name="adj" fmla="val 16667"/>
+            </a:avLst>
+          </a:prstGeom>
+          <a:solidFill xmlns:a="http://schemas.openxmlformats.org/drawingml/2006/main">
+            <a:srgbClr val="06142E"/>
+          </a:solidFill>
+          <a:ln xmlns:a="http://schemas.openxmlformats.org/drawingml/2006/main" w="9525">
+            <a:solidFill>
+              <a:srgbClr val="1EC5FF">
+                <a:alpha val="33333"/>
+              </a:srgbClr>
+            </a:solidFill>
+            <a:prstDash val="solid"/>
+          </a:ln>
+        </p:spPr>
+      </p:sp>
+      <p:pic>
+        <p:nvPicPr>
+          <p:cNvPr id="22" name="" descr="Figura oficial da documentação dbt usada para explicar: O ERD torna cardinalidade visível — Entidades e relações precisam anteceder a agregação.."/>
+          <p:cNvPicPr>
+            <a:picLocks xmlns:a="http://schemas.openxmlformats.org/drawingml/2006/main" noChangeAspect="1"/>
+          </p:cNvPicPr>
+          <p:nvPr/>
+        </p:nvPicPr>
+        <p:blipFill>
+          <a:blip xmlns:r="http://schemas.openxmlformats.org/officeDocument/2006/relationships" xmlns:a="http://schemas.openxmlformats.org/drawingml/2006/main" r:embed="Rd75b79a14ec547e6"/>
+          <a:stretch xmlns:a="http://schemas.openxmlformats.org/drawingml/2006/main"/>
+        </p:blipFill>
+        <p:spPr>
+          <a:xfrm xmlns:a="http://schemas.openxmlformats.org/drawingml/2006/main">
+            <a:off x="9893718" y="209550"/>
+            <a:ext cx="1491414" cy="323850"/>
+          </a:xfrm>
+          <a:prstGeom xmlns:a="http://schemas.openxmlformats.org/drawingml/2006/main" prst="rect">
+            <a:avLst/>
+          </a:prstGeom>
+        </p:spPr>
+      </p:pic>
+      <p:sp>
+        <p:nvSpPr>
+          <p:cNvPr id="9" name="footer-rule">
+            <a:extLst xmlns:a="http://schemas.openxmlformats.org/drawingml/2006/main">
+              <a:ext uri="{FF2B5EF4-FFF2-40B4-BE49-F238E27FC236}">
+                <a16:creationId xmlns:a16="http://schemas.microsoft.com/office/drawing/2014/main" id="{D74BDBFE-6E5F-45E3-8898-2789A2EBFB67}"/>
               </a:ext>
             </a:extLst>
           </p:cNvPr>
@@ -5283,10 +5501,10 @@
       </p:sp>
       <p:sp>
         <p:nvSpPr>
-          <p:cNvPr id="8" name="footer">
-            <a:extLst xmlns:a="http://schemas.openxmlformats.org/drawingml/2006/main">
-              <a:ext uri="{FF2B5EF4-FFF2-40B4-BE49-F238E27FC236}">
-                <a16:creationId xmlns:a16="http://schemas.microsoft.com/office/drawing/2014/main" id="{02DDB25F-1E96-4734-B613-B194039AC1E7}"/>
+          <p:cNvPr id="10" name="footer">
+            <a:extLst xmlns:a="http://schemas.openxmlformats.org/drawingml/2006/main">
+              <a:ext uri="{FF2B5EF4-FFF2-40B4-BE49-F238E27FC236}">
+                <a16:creationId xmlns:a16="http://schemas.microsoft.com/office/drawing/2014/main" id="{188B097E-1AC7-431D-8028-C0DF8519A544}"/>
               </a:ext>
             </a:extLst>
           </p:cNvPr>
@@ -5338,10 +5556,10 @@
       </p:sp>
       <p:sp>
         <p:nvSpPr>
-          <p:cNvPr id="9" name="page-number">
-            <a:extLst xmlns:a="http://schemas.openxmlformats.org/drawingml/2006/main">
-              <a:ext uri="{FF2B5EF4-FFF2-40B4-BE49-F238E27FC236}">
-                <a16:creationId xmlns:a16="http://schemas.microsoft.com/office/drawing/2014/main" id="{A3674F1F-1FBB-4B0B-9674-50E611D67473}"/>
+          <p:cNvPr id="11" name="page-number">
+            <a:extLst xmlns:a="http://schemas.openxmlformats.org/drawingml/2006/main">
+              <a:ext uri="{FF2B5EF4-FFF2-40B4-BE49-F238E27FC236}">
+                <a16:creationId xmlns:a16="http://schemas.microsoft.com/office/drawing/2014/main" id="{4D114B5A-ED47-4F0D-9520-028F5FF96975}"/>
               </a:ext>
             </a:extLst>
           </p:cNvPr>
@@ -5394,7 +5612,7 @@
     </p:spTree>
     <p:extLst>
       <p:ext uri="{BB962C8B-B14F-4D97-AF65-F5344CB8AC3E}">
-        <p14:creationId xmlns:p14="http://schemas.microsoft.com/office/powerpoint/2010/main" val="2122027123"/>
+        <p14:creationId xmlns:p14="http://schemas.microsoft.com/office/powerpoint/2010/main" val="759563604"/>
       </p:ext>
     </p:extLst>
   </p:cSld>
@@ -5430,10 +5648,10 @@
       </p:grpSpPr>
       <p:sp>
         <p:nvSpPr>
-          <p:cNvPr id="11" name="slide-title">
-            <a:extLst xmlns:a="http://schemas.openxmlformats.org/drawingml/2006/main">
-              <a:ext uri="{FF2B5EF4-FFF2-40B4-BE49-F238E27FC236}">
-                <a16:creationId xmlns:a16="http://schemas.microsoft.com/office/drawing/2014/main" id="{EE0E85CD-19B7-4882-9064-C68CA61F3A25}"/>
+          <p:cNvPr id="13" name="slide-title">
+            <a:extLst xmlns:a="http://schemas.openxmlformats.org/drawingml/2006/main">
+              <a:ext uri="{FF2B5EF4-FFF2-40B4-BE49-F238E27FC236}">
+                <a16:creationId xmlns:a16="http://schemas.microsoft.com/office/drawing/2014/main" id="{4F97638B-7EA5-4396-AE78-16E0E9329483}"/>
               </a:ext>
             </a:extLst>
           </p:cNvPr>
@@ -5484,7 +5702,7 @@
           <p:cNvPr id="2" name="slide-subtitle">
             <a:extLst xmlns:a="http://schemas.openxmlformats.org/drawingml/2006/main">
               <a:ext uri="{FF2B5EF4-FFF2-40B4-BE49-F238E27FC236}">
-                <a16:creationId xmlns:a16="http://schemas.microsoft.com/office/drawing/2014/main" id="{9F90323C-BAF2-4A91-A057-17268D54D9B2}"/>
+                <a16:creationId xmlns:a16="http://schemas.microsoft.com/office/drawing/2014/main" id="{3328FE7F-2C5B-4D3D-BE6B-39118754BF8F}"/>
               </a:ext>
             </a:extLst>
           </p:cNvPr>
@@ -5535,7 +5753,7 @@
           <p:cNvPr id="3" name="bullets">
             <a:extLst xmlns:a="http://schemas.openxmlformats.org/drawingml/2006/main">
               <a:ext uri="{FF2B5EF4-FFF2-40B4-BE49-F238E27FC236}">
-                <a16:creationId xmlns:a16="http://schemas.microsoft.com/office/drawing/2014/main" id="{97114EA9-6E91-490A-B777-F856BCB11CCC}"/>
+                <a16:creationId xmlns:a16="http://schemas.microsoft.com/office/drawing/2014/main" id="{435FE84B-AF9C-4267-B0F2-81B82975925C}"/>
               </a:ext>
             </a:extLst>
           </p:cNvPr>
@@ -5640,7 +5858,7 @@
           <p:cNvPr id="4" name="ambient-glow">
             <a:extLst xmlns:a="http://schemas.openxmlformats.org/drawingml/2006/main">
               <a:ext uri="{FF2B5EF4-FFF2-40B4-BE49-F238E27FC236}">
-                <a16:creationId xmlns:a16="http://schemas.microsoft.com/office/drawing/2014/main" id="{DFA82D5E-57AA-4739-BDF7-165FDB395A84}"/>
+                <a16:creationId xmlns:a16="http://schemas.microsoft.com/office/drawing/2014/main" id="{6F79631A-F04F-4FF9-9A98-450B04C662E1}"/>
               </a:ext>
             </a:extLst>
           </p:cNvPr>
@@ -5677,7 +5895,7 @@
           <p:cNvPr id="5" name="ambient-core">
             <a:extLst xmlns:a="http://schemas.openxmlformats.org/drawingml/2006/main">
               <a:ext uri="{FF2B5EF4-FFF2-40B4-BE49-F238E27FC236}">
-                <a16:creationId xmlns:a16="http://schemas.microsoft.com/office/drawing/2014/main" id="{7C052100-4DEC-4E90-A3C9-34A2AA933CCA}"/>
+                <a16:creationId xmlns:a16="http://schemas.microsoft.com/office/drawing/2014/main" id="{872BAEE3-4DAA-4BC8-B461-F344DC53D806}"/>
               </a:ext>
             </a:extLst>
           </p:cNvPr>
@@ -5714,7 +5932,7 @@
           <p:cNvPr id="6" name="section-number">
             <a:extLst xmlns:a="http://schemas.openxmlformats.org/drawingml/2006/main">
               <a:ext uri="{FF2B5EF4-FFF2-40B4-BE49-F238E27FC236}">
-                <a16:creationId xmlns:a16="http://schemas.microsoft.com/office/drawing/2014/main" id="{10B1419F-700D-4EEE-AD6E-4CE6E32046C2}"/>
+                <a16:creationId xmlns:a16="http://schemas.microsoft.com/office/drawing/2014/main" id="{47E63220-224F-483B-A296-11B2E178A78D}"/>
               </a:ext>
             </a:extLst>
           </p:cNvPr>
@@ -5765,7 +5983,7 @@
           <p:cNvPr id="7" name="eyebrow">
             <a:extLst xmlns:a="http://schemas.openxmlformats.org/drawingml/2006/main">
               <a:ext uri="{FF2B5EF4-FFF2-40B4-BE49-F238E27FC236}">
-                <a16:creationId xmlns:a16="http://schemas.microsoft.com/office/drawing/2014/main" id="{70319B5B-41F1-4AE7-92D0-ADF328BEBCA3}"/>
+                <a16:creationId xmlns:a16="http://schemas.microsoft.com/office/drawing/2014/main" id="{C6A57AC6-F2C6-4539-A0A8-F91234067764}"/>
               </a:ext>
             </a:extLst>
           </p:cNvPr>
@@ -5813,10 +6031,69 @@
       </p:sp>
       <p:sp>
         <p:nvSpPr>
-          <p:cNvPr id="8" name="footer-rule">
-            <a:extLst xmlns:a="http://schemas.openxmlformats.org/drawingml/2006/main">
-              <a:ext uri="{FF2B5EF4-FFF2-40B4-BE49-F238E27FC236}">
-                <a16:creationId xmlns:a16="http://schemas.microsoft.com/office/drawing/2014/main" id="{7DE3D61D-D662-4F37-B758-30541A809127}"/>
+          <p:cNvPr id="8" name="rescue-point-logo-background">
+            <a:extLst xmlns:a="http://schemas.openxmlformats.org/drawingml/2006/main">
+              <a:ext uri="{FF2B5EF4-FFF2-40B4-BE49-F238E27FC236}">
+                <a16:creationId xmlns:a16="http://schemas.microsoft.com/office/drawing/2014/main" id="{B3F65A71-5D59-489D-9083-BD34AC42A669}"/>
+              </a:ext>
+            </a:extLst>
+          </p:cNvPr>
+          <p:cNvSpPr>
+            <a:spLocks xmlns:a="http://schemas.openxmlformats.org/drawingml/2006/main" noGrp="1"/>
+          </p:cNvSpPr>
+          <p:nvPr/>
+        </p:nvSpPr>
+        <p:spPr>
+          <a:xfrm xmlns:a="http://schemas.openxmlformats.org/drawingml/2006/main">
+            <a:off x="9772650" y="133350"/>
+            <a:ext cx="1733550" cy="457200"/>
+          </a:xfrm>
+          <a:prstGeom xmlns:a="http://schemas.openxmlformats.org/drawingml/2006/main" prst="roundRect">
+            <a:avLst>
+              <a:gd name="adj" fmla="val 16667"/>
+            </a:avLst>
+          </a:prstGeom>
+          <a:solidFill xmlns:a="http://schemas.openxmlformats.org/drawingml/2006/main">
+            <a:srgbClr val="06142E"/>
+          </a:solidFill>
+          <a:ln xmlns:a="http://schemas.openxmlformats.org/drawingml/2006/main" w="9525">
+            <a:solidFill>
+              <a:srgbClr val="1EC5FF">
+                <a:alpha val="33333"/>
+              </a:srgbClr>
+            </a:solidFill>
+            <a:prstDash val="solid"/>
+          </a:ln>
+        </p:spPr>
+      </p:sp>
+      <p:pic>
+        <p:nvPicPr>
+          <p:cNvPr id="23" name="" descr="Figura oficial da documentação dbt usada para explicar: Métricas válidas precisam de nomes distintos — Receita bruta e receita entregue respondem perguntas diferentes.."/>
+          <p:cNvPicPr>
+            <a:picLocks xmlns:a="http://schemas.openxmlformats.org/drawingml/2006/main" noChangeAspect="1"/>
+          </p:cNvPicPr>
+          <p:nvPr/>
+        </p:nvPicPr>
+        <p:blipFill>
+          <a:blip xmlns:r="http://schemas.openxmlformats.org/officeDocument/2006/relationships" xmlns:a="http://schemas.openxmlformats.org/drawingml/2006/main" r:embed="R774576f24e1242b8"/>
+          <a:stretch xmlns:a="http://schemas.openxmlformats.org/drawingml/2006/main"/>
+        </p:blipFill>
+        <p:spPr>
+          <a:xfrm xmlns:a="http://schemas.openxmlformats.org/drawingml/2006/main">
+            <a:off x="9893718" y="209550"/>
+            <a:ext cx="1491414" cy="323850"/>
+          </a:xfrm>
+          <a:prstGeom xmlns:a="http://schemas.openxmlformats.org/drawingml/2006/main" prst="rect">
+            <a:avLst/>
+          </a:prstGeom>
+        </p:spPr>
+      </p:pic>
+      <p:sp>
+        <p:nvSpPr>
+          <p:cNvPr id="10" name="footer-rule">
+            <a:extLst xmlns:a="http://schemas.openxmlformats.org/drawingml/2006/main">
+              <a:ext uri="{FF2B5EF4-FFF2-40B4-BE49-F238E27FC236}">
+                <a16:creationId xmlns:a16="http://schemas.microsoft.com/office/drawing/2014/main" id="{C4FBC315-7A6D-41A9-9A98-4244DA095FC6}"/>
               </a:ext>
             </a:extLst>
           </p:cNvPr>
@@ -5846,10 +6123,10 @@
       </p:sp>
       <p:sp>
         <p:nvSpPr>
-          <p:cNvPr id="9" name="footer">
-            <a:extLst xmlns:a="http://schemas.openxmlformats.org/drawingml/2006/main">
-              <a:ext uri="{FF2B5EF4-FFF2-40B4-BE49-F238E27FC236}">
-                <a16:creationId xmlns:a16="http://schemas.microsoft.com/office/drawing/2014/main" id="{B4FAC139-4E60-431E-A3EE-F92A77450149}"/>
+          <p:cNvPr id="11" name="footer">
+            <a:extLst xmlns:a="http://schemas.openxmlformats.org/drawingml/2006/main">
+              <a:ext uri="{FF2B5EF4-FFF2-40B4-BE49-F238E27FC236}">
+                <a16:creationId xmlns:a16="http://schemas.microsoft.com/office/drawing/2014/main" id="{8CBDEA0E-AD71-4884-815F-85FCCFEAFB2B}"/>
               </a:ext>
             </a:extLst>
           </p:cNvPr>
@@ -5901,10 +6178,10 @@
       </p:sp>
       <p:sp>
         <p:nvSpPr>
-          <p:cNvPr id="10" name="page-number">
-            <a:extLst xmlns:a="http://schemas.openxmlformats.org/drawingml/2006/main">
-              <a:ext uri="{FF2B5EF4-FFF2-40B4-BE49-F238E27FC236}">
-                <a16:creationId xmlns:a16="http://schemas.microsoft.com/office/drawing/2014/main" id="{AFF716E7-24FD-4205-8B96-9FC6D769C3FF}"/>
+          <p:cNvPr id="12" name="page-number">
+            <a:extLst xmlns:a="http://schemas.openxmlformats.org/drawingml/2006/main">
+              <a:ext uri="{FF2B5EF4-FFF2-40B4-BE49-F238E27FC236}">
+                <a16:creationId xmlns:a16="http://schemas.microsoft.com/office/drawing/2014/main" id="{3DCE46BA-C303-417E-8ACC-495F3E3B913E}"/>
               </a:ext>
             </a:extLst>
           </p:cNvPr>
@@ -5957,7 +6234,7 @@
     </p:spTree>
     <p:extLst>
       <p:ext uri="{BB962C8B-B14F-4D97-AF65-F5344CB8AC3E}">
-        <p14:creationId xmlns:p14="http://schemas.microsoft.com/office/powerpoint/2010/main" val="337668154"/>
+        <p14:creationId xmlns:p14="http://schemas.microsoft.com/office/powerpoint/2010/main" val="2135223945"/>
       </p:ext>
     </p:extLst>
   </p:cSld>
@@ -5985,10 +6262,10 @@
       </p:grpSpPr>
       <p:sp>
         <p:nvSpPr>
-          <p:cNvPr id="11" name="slide-title">
-            <a:extLst xmlns:a="http://schemas.openxmlformats.org/drawingml/2006/main">
-              <a:ext uri="{FF2B5EF4-FFF2-40B4-BE49-F238E27FC236}">
-                <a16:creationId xmlns:a16="http://schemas.microsoft.com/office/drawing/2014/main" id="{1293F540-4657-4EAB-B44F-9FEC12F52B9B}"/>
+          <p:cNvPr id="13" name="slide-title">
+            <a:extLst xmlns:a="http://schemas.openxmlformats.org/drawingml/2006/main">
+              <a:ext uri="{FF2B5EF4-FFF2-40B4-BE49-F238E27FC236}">
+                <a16:creationId xmlns:a16="http://schemas.microsoft.com/office/drawing/2014/main" id="{DE4322D2-3D33-4CFF-B22B-DE40B638FFBF}"/>
               </a:ext>
             </a:extLst>
           </p:cNvPr>
@@ -6039,7 +6316,7 @@
           <p:cNvPr id="2" name="compare-left-title">
             <a:extLst xmlns:a="http://schemas.openxmlformats.org/drawingml/2006/main">
               <a:ext uri="{FF2B5EF4-FFF2-40B4-BE49-F238E27FC236}">
-                <a16:creationId xmlns:a16="http://schemas.microsoft.com/office/drawing/2014/main" id="{8AC0E58D-0842-476C-896E-F4C70173153D}"/>
+                <a16:creationId xmlns:a16="http://schemas.microsoft.com/office/drawing/2014/main" id="{BD0213CA-8AE3-4442-94BF-0E9DE57EFA18}"/>
               </a:ext>
             </a:extLst>
           </p:cNvPr>
@@ -6090,7 +6367,7 @@
           <p:cNvPr id="3" name="compare-right-title">
             <a:extLst xmlns:a="http://schemas.openxmlformats.org/drawingml/2006/main">
               <a:ext uri="{FF2B5EF4-FFF2-40B4-BE49-F238E27FC236}">
-                <a16:creationId xmlns:a16="http://schemas.microsoft.com/office/drawing/2014/main" id="{90D69879-EC4D-4051-8654-E9EF6F83169A}"/>
+                <a16:creationId xmlns:a16="http://schemas.microsoft.com/office/drawing/2014/main" id="{06C45187-A844-4629-AA9E-7F933FB66D69}"/>
               </a:ext>
             </a:extLst>
           </p:cNvPr>
@@ -6141,7 +6418,7 @@
           <p:cNvPr id="4" name="compare-divider">
             <a:extLst xmlns:a="http://schemas.openxmlformats.org/drawingml/2006/main">
               <a:ext uri="{FF2B5EF4-FFF2-40B4-BE49-F238E27FC236}">
-                <a16:creationId xmlns:a16="http://schemas.microsoft.com/office/drawing/2014/main" id="{E256C3BB-5543-42C8-8722-FE7D154A4916}"/>
+                <a16:creationId xmlns:a16="http://schemas.microsoft.com/office/drawing/2014/main" id="{09CB1EF5-B7BF-4705-9C7F-9CAA1C305436}"/>
               </a:ext>
             </a:extLst>
           </p:cNvPr>
@@ -6172,7 +6449,7 @@
           <p:cNvPr id="5" name="bullets">
             <a:extLst xmlns:a="http://schemas.openxmlformats.org/drawingml/2006/main">
               <a:ext uri="{FF2B5EF4-FFF2-40B4-BE49-F238E27FC236}">
-                <a16:creationId xmlns:a16="http://schemas.microsoft.com/office/drawing/2014/main" id="{274C3D79-6D11-410C-A09A-BE409663D96E}"/>
+                <a16:creationId xmlns:a16="http://schemas.microsoft.com/office/drawing/2014/main" id="{8D7645FD-2B09-4803-AA86-ED5CFAFD5021}"/>
               </a:ext>
             </a:extLst>
           </p:cNvPr>
@@ -6241,7 +6518,7 @@
           <p:cNvPr id="6" name="bullets">
             <a:extLst xmlns:a="http://schemas.openxmlformats.org/drawingml/2006/main">
               <a:ext uri="{FF2B5EF4-FFF2-40B4-BE49-F238E27FC236}">
-                <a16:creationId xmlns:a16="http://schemas.microsoft.com/office/drawing/2014/main" id="{7678CEEA-402A-4EBA-AFDD-4DE37EAF0DF4}"/>
+                <a16:creationId xmlns:a16="http://schemas.microsoft.com/office/drawing/2014/main" id="{EE1B29E7-8EB9-4809-B546-BD4F13F82725}"/>
               </a:ext>
             </a:extLst>
           </p:cNvPr>
@@ -6310,7 +6587,7 @@
           <p:cNvPr id="7" name="eyebrow">
             <a:extLst xmlns:a="http://schemas.openxmlformats.org/drawingml/2006/main">
               <a:ext uri="{FF2B5EF4-FFF2-40B4-BE49-F238E27FC236}">
-                <a16:creationId xmlns:a16="http://schemas.microsoft.com/office/drawing/2014/main" id="{C86D0D6D-D422-474B-87D4-7700115C23E8}"/>
+                <a16:creationId xmlns:a16="http://schemas.microsoft.com/office/drawing/2014/main" id="{1F9BDDFC-7048-4CE8-89F3-AE6422623840}"/>
               </a:ext>
             </a:extLst>
           </p:cNvPr>
@@ -6358,10 +6635,69 @@
       </p:sp>
       <p:sp>
         <p:nvSpPr>
-          <p:cNvPr id="8" name="footer-rule">
-            <a:extLst xmlns:a="http://schemas.openxmlformats.org/drawingml/2006/main">
-              <a:ext uri="{FF2B5EF4-FFF2-40B4-BE49-F238E27FC236}">
-                <a16:creationId xmlns:a16="http://schemas.microsoft.com/office/drawing/2014/main" id="{A5B562D4-BDF4-42DF-87DC-9F2D333FC5BA}"/>
+          <p:cNvPr id="8" name="rescue-point-logo-background">
+            <a:extLst xmlns:a="http://schemas.openxmlformats.org/drawingml/2006/main">
+              <a:ext uri="{FF2B5EF4-FFF2-40B4-BE49-F238E27FC236}">
+                <a16:creationId xmlns:a16="http://schemas.microsoft.com/office/drawing/2014/main" id="{88B9FF25-0878-4929-A390-CDF6D4F1ED36}"/>
+              </a:ext>
+            </a:extLst>
+          </p:cNvPr>
+          <p:cNvSpPr>
+            <a:spLocks xmlns:a="http://schemas.openxmlformats.org/drawingml/2006/main" noGrp="1"/>
+          </p:cNvSpPr>
+          <p:nvPr/>
+        </p:nvSpPr>
+        <p:spPr>
+          <a:xfrm xmlns:a="http://schemas.openxmlformats.org/drawingml/2006/main">
+            <a:off x="9772650" y="133350"/>
+            <a:ext cx="1733550" cy="457200"/>
+          </a:xfrm>
+          <a:prstGeom xmlns:a="http://schemas.openxmlformats.org/drawingml/2006/main" prst="roundRect">
+            <a:avLst>
+              <a:gd name="adj" fmla="val 16667"/>
+            </a:avLst>
+          </a:prstGeom>
+          <a:solidFill xmlns:a="http://schemas.openxmlformats.org/drawingml/2006/main">
+            <a:srgbClr val="06142E"/>
+          </a:solidFill>
+          <a:ln xmlns:a="http://schemas.openxmlformats.org/drawingml/2006/main" w="9525">
+            <a:solidFill>
+              <a:srgbClr val="1EC5FF">
+                <a:alpha val="33333"/>
+              </a:srgbClr>
+            </a:solidFill>
+            <a:prstDash val="solid"/>
+          </a:ln>
+        </p:spPr>
+      </p:sp>
+      <p:pic>
+        <p:nvPicPr>
+          <p:cNvPr id="23" name="" descr="Figura oficial da documentação dbt usada para explicar: Métricas válidas precisam de nomes distintos — Receita bruta."/>
+          <p:cNvPicPr>
+            <a:picLocks xmlns:a="http://schemas.openxmlformats.org/drawingml/2006/main" noChangeAspect="1"/>
+          </p:cNvPicPr>
+          <p:nvPr/>
+        </p:nvPicPr>
+        <p:blipFill>
+          <a:blip xmlns:r="http://schemas.openxmlformats.org/officeDocument/2006/relationships" xmlns:a="http://schemas.openxmlformats.org/drawingml/2006/main" r:embed="R00ad5ebb2ed44427"/>
+          <a:stretch xmlns:a="http://schemas.openxmlformats.org/drawingml/2006/main"/>
+        </p:blipFill>
+        <p:spPr>
+          <a:xfrm xmlns:a="http://schemas.openxmlformats.org/drawingml/2006/main">
+            <a:off x="9893718" y="209550"/>
+            <a:ext cx="1491414" cy="323850"/>
+          </a:xfrm>
+          <a:prstGeom xmlns:a="http://schemas.openxmlformats.org/drawingml/2006/main" prst="rect">
+            <a:avLst/>
+          </a:prstGeom>
+        </p:spPr>
+      </p:pic>
+      <p:sp>
+        <p:nvSpPr>
+          <p:cNvPr id="10" name="footer-rule">
+            <a:extLst xmlns:a="http://schemas.openxmlformats.org/drawingml/2006/main">
+              <a:ext uri="{FF2B5EF4-FFF2-40B4-BE49-F238E27FC236}">
+                <a16:creationId xmlns:a16="http://schemas.microsoft.com/office/drawing/2014/main" id="{82A38C25-ADA9-4E39-A84E-E32022889623}"/>
               </a:ext>
             </a:extLst>
           </p:cNvPr>
@@ -6391,10 +6727,10 @@
       </p:sp>
       <p:sp>
         <p:nvSpPr>
-          <p:cNvPr id="9" name="footer">
-            <a:extLst xmlns:a="http://schemas.openxmlformats.org/drawingml/2006/main">
-              <a:ext uri="{FF2B5EF4-FFF2-40B4-BE49-F238E27FC236}">
-                <a16:creationId xmlns:a16="http://schemas.microsoft.com/office/drawing/2014/main" id="{098CD5B1-03F4-41A0-A924-0B9F9E760B71}"/>
+          <p:cNvPr id="11" name="footer">
+            <a:extLst xmlns:a="http://schemas.openxmlformats.org/drawingml/2006/main">
+              <a:ext uri="{FF2B5EF4-FFF2-40B4-BE49-F238E27FC236}">
+                <a16:creationId xmlns:a16="http://schemas.microsoft.com/office/drawing/2014/main" id="{8C4395A7-9746-4D7B-86DA-FFB24FBC1218}"/>
               </a:ext>
             </a:extLst>
           </p:cNvPr>
@@ -6446,10 +6782,10 @@
       </p:sp>
       <p:sp>
         <p:nvSpPr>
-          <p:cNvPr id="10" name="page-number">
-            <a:extLst xmlns:a="http://schemas.openxmlformats.org/drawingml/2006/main">
-              <a:ext uri="{FF2B5EF4-FFF2-40B4-BE49-F238E27FC236}">
-                <a16:creationId xmlns:a16="http://schemas.microsoft.com/office/drawing/2014/main" id="{BCECB8BA-25C0-443D-BB9F-4B152CD8A1DA}"/>
+          <p:cNvPr id="12" name="page-number">
+            <a:extLst xmlns:a="http://schemas.openxmlformats.org/drawingml/2006/main">
+              <a:ext uri="{FF2B5EF4-FFF2-40B4-BE49-F238E27FC236}">
+                <a16:creationId xmlns:a16="http://schemas.microsoft.com/office/drawing/2014/main" id="{6C266402-5E05-4C01-9B27-457935164CE6}"/>
               </a:ext>
             </a:extLst>
           </p:cNvPr>
@@ -6502,7 +6838,7 @@
     </p:spTree>
     <p:extLst>
       <p:ext uri="{BB962C8B-B14F-4D97-AF65-F5344CB8AC3E}">
-        <p14:creationId xmlns:p14="http://schemas.microsoft.com/office/powerpoint/2010/main" val="1818330379"/>
+        <p14:creationId xmlns:p14="http://schemas.microsoft.com/office/powerpoint/2010/main" val="1758042484"/>
       </p:ext>
     </p:extLst>
   </p:cSld>
@@ -6538,10 +6874,10 @@
       </p:grpSpPr>
       <p:sp>
         <p:nvSpPr>
-          <p:cNvPr id="9" name="slide-title">
-            <a:extLst xmlns:a="http://schemas.openxmlformats.org/drawingml/2006/main">
-              <a:ext uri="{FF2B5EF4-FFF2-40B4-BE49-F238E27FC236}">
-                <a16:creationId xmlns:a16="http://schemas.microsoft.com/office/drawing/2014/main" id="{CC1FE68A-E43A-42C1-B4A9-40943EFB2CF3}"/>
+          <p:cNvPr id="11" name="slide-title">
+            <a:extLst xmlns:a="http://schemas.openxmlformats.org/drawingml/2006/main">
+              <a:ext uri="{FF2B5EF4-FFF2-40B4-BE49-F238E27FC236}">
+                <a16:creationId xmlns:a16="http://schemas.microsoft.com/office/drawing/2014/main" id="{44676757-1EEF-49B3-A659-5D4C85C6F6DA}"/>
               </a:ext>
             </a:extLst>
           </p:cNvPr>
@@ -6592,7 +6928,7 @@
           <p:cNvPr id="2" name="code-surface">
             <a:extLst xmlns:a="http://schemas.openxmlformats.org/drawingml/2006/main">
               <a:ext uri="{FF2B5EF4-FFF2-40B4-BE49-F238E27FC236}">
-                <a16:creationId xmlns:a16="http://schemas.microsoft.com/office/drawing/2014/main" id="{1B104D18-2270-4202-AA3B-C6E80FC2ABC5}"/>
+                <a16:creationId xmlns:a16="http://schemas.microsoft.com/office/drawing/2014/main" id="{A5AEC33F-9FB6-4DD5-A0DE-3BE56ED9BEE9}"/>
               </a:ext>
             </a:extLst>
           </p:cNvPr>
@@ -6627,7 +6963,7 @@
           <p:cNvPr id="3" name="command">
             <a:extLst xmlns:a="http://schemas.openxmlformats.org/drawingml/2006/main">
               <a:ext uri="{FF2B5EF4-FFF2-40B4-BE49-F238E27FC236}">
-                <a16:creationId xmlns:a16="http://schemas.microsoft.com/office/drawing/2014/main" id="{7F5F66E8-C72D-4ABB-B2E8-CF172C988F58}"/>
+                <a16:creationId xmlns:a16="http://schemas.microsoft.com/office/drawing/2014/main" id="{76A13D5A-D9A8-463D-8751-8DBB57FAF3F3}"/>
               </a:ext>
             </a:extLst>
           </p:cNvPr>
@@ -6678,7 +7014,7 @@
           <p:cNvPr id="4" name="command-help">
             <a:extLst xmlns:a="http://schemas.openxmlformats.org/drawingml/2006/main">
               <a:ext uri="{FF2B5EF4-FFF2-40B4-BE49-F238E27FC236}">
-                <a16:creationId xmlns:a16="http://schemas.microsoft.com/office/drawing/2014/main" id="{4F12CCDF-FFF2-46AE-BBEE-88CB055CD643}"/>
+                <a16:creationId xmlns:a16="http://schemas.microsoft.com/office/drawing/2014/main" id="{BFB0173A-1187-4F22-A5CB-0A538B693BB1}"/>
               </a:ext>
             </a:extLst>
           </p:cNvPr>
@@ -6729,7 +7065,7 @@
           <p:cNvPr id="5" name="eyebrow">
             <a:extLst xmlns:a="http://schemas.openxmlformats.org/drawingml/2006/main">
               <a:ext uri="{FF2B5EF4-FFF2-40B4-BE49-F238E27FC236}">
-                <a16:creationId xmlns:a16="http://schemas.microsoft.com/office/drawing/2014/main" id="{570E280B-0183-4FA3-A05B-5D21EC65FA05}"/>
+                <a16:creationId xmlns:a16="http://schemas.microsoft.com/office/drawing/2014/main" id="{A5DC374C-1DD1-46DF-A6ED-95F82093D16C}"/>
               </a:ext>
             </a:extLst>
           </p:cNvPr>
@@ -6777,10 +7113,69 @@
       </p:sp>
       <p:sp>
         <p:nvSpPr>
-          <p:cNvPr id="6" name="footer-rule">
-            <a:extLst xmlns:a="http://schemas.openxmlformats.org/drawingml/2006/main">
-              <a:ext uri="{FF2B5EF4-FFF2-40B4-BE49-F238E27FC236}">
-                <a16:creationId xmlns:a16="http://schemas.microsoft.com/office/drawing/2014/main" id="{CE75B42E-739D-4300-A869-9C62457A9347}"/>
+          <p:cNvPr id="6" name="rescue-point-logo-background">
+            <a:extLst xmlns:a="http://schemas.openxmlformats.org/drawingml/2006/main">
+              <a:ext uri="{FF2B5EF4-FFF2-40B4-BE49-F238E27FC236}">
+                <a16:creationId xmlns:a16="http://schemas.microsoft.com/office/drawing/2014/main" id="{658D54A7-F606-4BD7-85CC-5643A0EA57C8}"/>
+              </a:ext>
+            </a:extLst>
+          </p:cNvPr>
+          <p:cNvSpPr>
+            <a:spLocks xmlns:a="http://schemas.openxmlformats.org/drawingml/2006/main" noGrp="1"/>
+          </p:cNvSpPr>
+          <p:nvPr/>
+        </p:nvSpPr>
+        <p:spPr>
+          <a:xfrm xmlns:a="http://schemas.openxmlformats.org/drawingml/2006/main">
+            <a:off x="9772650" y="133350"/>
+            <a:ext cx="1733550" cy="457200"/>
+          </a:xfrm>
+          <a:prstGeom xmlns:a="http://schemas.openxmlformats.org/drawingml/2006/main" prst="roundRect">
+            <a:avLst>
+              <a:gd name="adj" fmla="val 16667"/>
+            </a:avLst>
+          </a:prstGeom>
+          <a:solidFill xmlns:a="http://schemas.openxmlformats.org/drawingml/2006/main">
+            <a:srgbClr val="06142E"/>
+          </a:solidFill>
+          <a:ln xmlns:a="http://schemas.openxmlformats.org/drawingml/2006/main" w="9525">
+            <a:solidFill>
+              <a:srgbClr val="1EC5FF">
+                <a:alpha val="33333"/>
+              </a:srgbClr>
+            </a:solidFill>
+            <a:prstDash val="solid"/>
+          </a:ln>
+        </p:spPr>
+      </p:sp>
+      <p:pic>
+        <p:nvPicPr>
+          <p:cNvPr id="19" name="" descr="Figura oficial da documentação dbt usada para explicar: Demonstração — execute — python course.py checkpoint 02."/>
+          <p:cNvPicPr>
+            <a:picLocks xmlns:a="http://schemas.openxmlformats.org/drawingml/2006/main" noChangeAspect="1"/>
+          </p:cNvPicPr>
+          <p:nvPr/>
+        </p:nvPicPr>
+        <p:blipFill>
+          <a:blip xmlns:r="http://schemas.openxmlformats.org/officeDocument/2006/relationships" xmlns:a="http://schemas.openxmlformats.org/drawingml/2006/main" r:embed="R5e83a34406384b14"/>
+          <a:stretch xmlns:a="http://schemas.openxmlformats.org/drawingml/2006/main"/>
+        </p:blipFill>
+        <p:spPr>
+          <a:xfrm xmlns:a="http://schemas.openxmlformats.org/drawingml/2006/main">
+            <a:off x="9893718" y="209550"/>
+            <a:ext cx="1491414" cy="323850"/>
+          </a:xfrm>
+          <a:prstGeom xmlns:a="http://schemas.openxmlformats.org/drawingml/2006/main" prst="rect">
+            <a:avLst/>
+          </a:prstGeom>
+        </p:spPr>
+      </p:pic>
+      <p:sp>
+        <p:nvSpPr>
+          <p:cNvPr id="8" name="footer-rule">
+            <a:extLst xmlns:a="http://schemas.openxmlformats.org/drawingml/2006/main">
+              <a:ext uri="{FF2B5EF4-FFF2-40B4-BE49-F238E27FC236}">
+                <a16:creationId xmlns:a16="http://schemas.microsoft.com/office/drawing/2014/main" id="{B98F08F1-CAFB-4B51-9193-BA90A4D2C99E}"/>
               </a:ext>
             </a:extLst>
           </p:cNvPr>
@@ -6810,10 +7205,10 @@
       </p:sp>
       <p:sp>
         <p:nvSpPr>
-          <p:cNvPr id="7" name="footer">
-            <a:extLst xmlns:a="http://schemas.openxmlformats.org/drawingml/2006/main">
-              <a:ext uri="{FF2B5EF4-FFF2-40B4-BE49-F238E27FC236}">
-                <a16:creationId xmlns:a16="http://schemas.microsoft.com/office/drawing/2014/main" id="{454CBB9A-38C3-4193-B5DD-0831AFFED50D}"/>
+          <p:cNvPr id="9" name="footer">
+            <a:extLst xmlns:a="http://schemas.openxmlformats.org/drawingml/2006/main">
+              <a:ext uri="{FF2B5EF4-FFF2-40B4-BE49-F238E27FC236}">
+                <a16:creationId xmlns:a16="http://schemas.microsoft.com/office/drawing/2014/main" id="{846F20C9-4C49-4607-8E77-F2817E254146}"/>
               </a:ext>
             </a:extLst>
           </p:cNvPr>
@@ -6865,10 +7260,10 @@
       </p:sp>
       <p:sp>
         <p:nvSpPr>
-          <p:cNvPr id="8" name="page-number">
-            <a:extLst xmlns:a="http://schemas.openxmlformats.org/drawingml/2006/main">
-              <a:ext uri="{FF2B5EF4-FFF2-40B4-BE49-F238E27FC236}">
-                <a16:creationId xmlns:a16="http://schemas.microsoft.com/office/drawing/2014/main" id="{5D32E178-1201-405A-98AF-F6FF5136624C}"/>
+          <p:cNvPr id="10" name="page-number">
+            <a:extLst xmlns:a="http://schemas.openxmlformats.org/drawingml/2006/main">
+              <a:ext uri="{FF2B5EF4-FFF2-40B4-BE49-F238E27FC236}">
+                <a16:creationId xmlns:a16="http://schemas.microsoft.com/office/drawing/2014/main" id="{A4D09E77-D5F3-4BE4-82CF-937DEFABFF26}"/>
               </a:ext>
             </a:extLst>
           </p:cNvPr>
@@ -6921,7 +7316,7 @@
     </p:spTree>
     <p:extLst>
       <p:ext uri="{BB962C8B-B14F-4D97-AF65-F5344CB8AC3E}">
-        <p14:creationId xmlns:p14="http://schemas.microsoft.com/office/powerpoint/2010/main" val="391566557"/>
+        <p14:creationId xmlns:p14="http://schemas.microsoft.com/office/powerpoint/2010/main" val="503492370"/>
       </p:ext>
     </p:extLst>
   </p:cSld>
@@ -6949,10 +7344,10 @@
       </p:grpSpPr>
       <p:sp>
         <p:nvSpPr>
-          <p:cNvPr id="14" name="slide-title">
-            <a:extLst xmlns:a="http://schemas.openxmlformats.org/drawingml/2006/main">
-              <a:ext uri="{FF2B5EF4-FFF2-40B4-BE49-F238E27FC236}">
-                <a16:creationId xmlns:a16="http://schemas.microsoft.com/office/drawing/2014/main" id="{C129141C-B4C9-4A34-B753-A06CD4C7682A}"/>
+          <p:cNvPr id="16" name="slide-title">
+            <a:extLst xmlns:a="http://schemas.openxmlformats.org/drawingml/2006/main">
+              <a:ext uri="{FF2B5EF4-FFF2-40B4-BE49-F238E27FC236}">
+                <a16:creationId xmlns:a16="http://schemas.microsoft.com/office/drawing/2014/main" id="{0EE4EB64-6A67-4678-B500-45C00BF5D35A}"/>
               </a:ext>
             </a:extLst>
           </p:cNvPr>
@@ -7003,7 +7398,7 @@
           <p:cNvPr id="2" name="step-num-1">
             <a:extLst xmlns:a="http://schemas.openxmlformats.org/drawingml/2006/main">
               <a:ext uri="{FF2B5EF4-FFF2-40B4-BE49-F238E27FC236}">
-                <a16:creationId xmlns:a16="http://schemas.microsoft.com/office/drawing/2014/main" id="{FF711A6A-330D-441D-A5C7-6A820CC125A2}"/>
+                <a16:creationId xmlns:a16="http://schemas.microsoft.com/office/drawing/2014/main" id="{B7E534C1-ACD0-4764-ACA7-44D779CC3625}"/>
               </a:ext>
             </a:extLst>
           </p:cNvPr>
@@ -7054,7 +7449,7 @@
           <p:cNvPr id="3" name="step-label-1">
             <a:extLst xmlns:a="http://schemas.openxmlformats.org/drawingml/2006/main">
               <a:ext uri="{FF2B5EF4-FFF2-40B4-BE49-F238E27FC236}">
-                <a16:creationId xmlns:a16="http://schemas.microsoft.com/office/drawing/2014/main" id="{DFE4A4E8-B7EF-4BCB-982C-9293BA5FB647}"/>
+                <a16:creationId xmlns:a16="http://schemas.microsoft.com/office/drawing/2014/main" id="{DB4C5D0F-EAE0-4AE0-9BEE-4596C5CC3FB8}"/>
               </a:ext>
             </a:extLst>
           </p:cNvPr>
@@ -7105,7 +7500,7 @@
           <p:cNvPr id="4" name="step-line-1">
             <a:extLst xmlns:a="http://schemas.openxmlformats.org/drawingml/2006/main">
               <a:ext uri="{FF2B5EF4-FFF2-40B4-BE49-F238E27FC236}">
-                <a16:creationId xmlns:a16="http://schemas.microsoft.com/office/drawing/2014/main" id="{05A04294-CDDD-4EA5-BAB3-8F8DC21B8E13}"/>
+                <a16:creationId xmlns:a16="http://schemas.microsoft.com/office/drawing/2014/main" id="{6E8608C6-DD9C-40B6-8641-CF615B4FB4E5}"/>
               </a:ext>
             </a:extLst>
           </p:cNvPr>
@@ -7136,7 +7531,7 @@
           <p:cNvPr id="5" name="step-num-2">
             <a:extLst xmlns:a="http://schemas.openxmlformats.org/drawingml/2006/main">
               <a:ext uri="{FF2B5EF4-FFF2-40B4-BE49-F238E27FC236}">
-                <a16:creationId xmlns:a16="http://schemas.microsoft.com/office/drawing/2014/main" id="{AD437D5F-02D0-48CF-B069-33BE91E19D71}"/>
+                <a16:creationId xmlns:a16="http://schemas.microsoft.com/office/drawing/2014/main" id="{BBA57AED-DED2-4D62-A17E-75AF90C52FBF}"/>
               </a:ext>
             </a:extLst>
           </p:cNvPr>
@@ -7187,7 +7582,7 @@
           <p:cNvPr id="6" name="step-label-2">
             <a:extLst xmlns:a="http://schemas.openxmlformats.org/drawingml/2006/main">
               <a:ext uri="{FF2B5EF4-FFF2-40B4-BE49-F238E27FC236}">
-                <a16:creationId xmlns:a16="http://schemas.microsoft.com/office/drawing/2014/main" id="{BAD21469-2E8D-4E0E-B341-633A7B2B7315}"/>
+                <a16:creationId xmlns:a16="http://schemas.microsoft.com/office/drawing/2014/main" id="{09A37390-89B1-4257-9028-D8C46BACBA0A}"/>
               </a:ext>
             </a:extLst>
           </p:cNvPr>
@@ -7238,7 +7633,7 @@
           <p:cNvPr id="7" name="step-line-2">
             <a:extLst xmlns:a="http://schemas.openxmlformats.org/drawingml/2006/main">
               <a:ext uri="{FF2B5EF4-FFF2-40B4-BE49-F238E27FC236}">
-                <a16:creationId xmlns:a16="http://schemas.microsoft.com/office/drawing/2014/main" id="{ED2280D9-484E-481E-AFAD-DBDED5077BB3}"/>
+                <a16:creationId xmlns:a16="http://schemas.microsoft.com/office/drawing/2014/main" id="{35AD338C-F6D0-45FF-BD99-58D864E0E4EC}"/>
               </a:ext>
             </a:extLst>
           </p:cNvPr>
@@ -7269,7 +7664,7 @@
           <p:cNvPr id="8" name="step-num-3">
             <a:extLst xmlns:a="http://schemas.openxmlformats.org/drawingml/2006/main">
               <a:ext uri="{FF2B5EF4-FFF2-40B4-BE49-F238E27FC236}">
-                <a16:creationId xmlns:a16="http://schemas.microsoft.com/office/drawing/2014/main" id="{9BDF4973-3437-46E2-B221-E2F492DA12E6}"/>
+                <a16:creationId xmlns:a16="http://schemas.microsoft.com/office/drawing/2014/main" id="{12231837-EA46-45FF-BF5C-6DFCDEBF13CA}"/>
               </a:ext>
             </a:extLst>
           </p:cNvPr>
@@ -7320,7 +7715,7 @@
           <p:cNvPr id="9" name="step-label-3">
             <a:extLst xmlns:a="http://schemas.openxmlformats.org/drawingml/2006/main">
               <a:ext uri="{FF2B5EF4-FFF2-40B4-BE49-F238E27FC236}">
-                <a16:creationId xmlns:a16="http://schemas.microsoft.com/office/drawing/2014/main" id="{CFA3BEC7-DA91-4A26-B01E-1CB1FE6FECB2}"/>
+                <a16:creationId xmlns:a16="http://schemas.microsoft.com/office/drawing/2014/main" id="{0A7D94AB-76FA-42E0-86E5-2EE01BD2044A}"/>
               </a:ext>
             </a:extLst>
           </p:cNvPr>
@@ -7371,7 +7766,7 @@
           <p:cNvPr id="10" name="eyebrow">
             <a:extLst xmlns:a="http://schemas.openxmlformats.org/drawingml/2006/main">
               <a:ext uri="{FF2B5EF4-FFF2-40B4-BE49-F238E27FC236}">
-                <a16:creationId xmlns:a16="http://schemas.microsoft.com/office/drawing/2014/main" id="{9207D8B2-0663-468C-8066-D3C76B7C3F2A}"/>
+                <a16:creationId xmlns:a16="http://schemas.microsoft.com/office/drawing/2014/main" id="{0E1A791F-5E24-4223-BDB1-946095E2B67B}"/>
               </a:ext>
             </a:extLst>
           </p:cNvPr>
@@ -7419,10 +7814,69 @@
       </p:sp>
       <p:sp>
         <p:nvSpPr>
-          <p:cNvPr id="11" name="footer-rule">
-            <a:extLst xmlns:a="http://schemas.openxmlformats.org/drawingml/2006/main">
-              <a:ext uri="{FF2B5EF4-FFF2-40B4-BE49-F238E27FC236}">
-                <a16:creationId xmlns:a16="http://schemas.microsoft.com/office/drawing/2014/main" id="{48761173-5180-427B-B6D6-8618EB7FDBF3}"/>
+          <p:cNvPr id="11" name="rescue-point-logo-background">
+            <a:extLst xmlns:a="http://schemas.openxmlformats.org/drawingml/2006/main">
+              <a:ext uri="{FF2B5EF4-FFF2-40B4-BE49-F238E27FC236}">
+                <a16:creationId xmlns:a16="http://schemas.microsoft.com/office/drawing/2014/main" id="{458F969D-D296-477E-BE28-6DF670274110}"/>
+              </a:ext>
+            </a:extLst>
+          </p:cNvPr>
+          <p:cNvSpPr>
+            <a:spLocks xmlns:a="http://schemas.openxmlformats.org/drawingml/2006/main" noGrp="1"/>
+          </p:cNvSpPr>
+          <p:nvPr/>
+        </p:nvSpPr>
+        <p:spPr>
+          <a:xfrm xmlns:a="http://schemas.openxmlformats.org/drawingml/2006/main">
+            <a:off x="9772650" y="133350"/>
+            <a:ext cx="1733550" cy="457200"/>
+          </a:xfrm>
+          <a:prstGeom xmlns:a="http://schemas.openxmlformats.org/drawingml/2006/main" prst="roundRect">
+            <a:avLst>
+              <a:gd name="adj" fmla="val 16667"/>
+            </a:avLst>
+          </a:prstGeom>
+          <a:solidFill xmlns:a="http://schemas.openxmlformats.org/drawingml/2006/main">
+            <a:srgbClr val="06142E"/>
+          </a:solidFill>
+          <a:ln xmlns:a="http://schemas.openxmlformats.org/drawingml/2006/main" w="9525">
+            <a:solidFill>
+              <a:srgbClr val="1EC5FF">
+                <a:alpha val="33333"/>
+              </a:srgbClr>
+            </a:solidFill>
+            <a:prstDash val="solid"/>
+          </a:ln>
+        </p:spPr>
+      </p:sp>
+      <p:pic>
+        <p:nvPicPr>
+          <p:cNvPr id="29" name="" descr="Figura oficial da documentação dbt usada para explicar: Demonstração — observe — 01."/>
+          <p:cNvPicPr>
+            <a:picLocks xmlns:a="http://schemas.openxmlformats.org/drawingml/2006/main" noChangeAspect="1"/>
+          </p:cNvPicPr>
+          <p:nvPr/>
+        </p:nvPicPr>
+        <p:blipFill>
+          <a:blip xmlns:r="http://schemas.openxmlformats.org/officeDocument/2006/relationships" xmlns:a="http://schemas.openxmlformats.org/drawingml/2006/main" r:embed="Rd0c7da64f7d9405a"/>
+          <a:stretch xmlns:a="http://schemas.openxmlformats.org/drawingml/2006/main"/>
+        </p:blipFill>
+        <p:spPr>
+          <a:xfrm xmlns:a="http://schemas.openxmlformats.org/drawingml/2006/main">
+            <a:off x="9893718" y="209550"/>
+            <a:ext cx="1491414" cy="323850"/>
+          </a:xfrm>
+          <a:prstGeom xmlns:a="http://schemas.openxmlformats.org/drawingml/2006/main" prst="rect">
+            <a:avLst/>
+          </a:prstGeom>
+        </p:spPr>
+      </p:pic>
+      <p:sp>
+        <p:nvSpPr>
+          <p:cNvPr id="13" name="footer-rule">
+            <a:extLst xmlns:a="http://schemas.openxmlformats.org/drawingml/2006/main">
+              <a:ext uri="{FF2B5EF4-FFF2-40B4-BE49-F238E27FC236}">
+                <a16:creationId xmlns:a16="http://schemas.microsoft.com/office/drawing/2014/main" id="{0DA42596-4D34-49E3-9DC6-22F025A260CC}"/>
               </a:ext>
             </a:extLst>
           </p:cNvPr>
@@ -7452,10 +7906,10 @@
       </p:sp>
       <p:sp>
         <p:nvSpPr>
-          <p:cNvPr id="12" name="footer">
-            <a:extLst xmlns:a="http://schemas.openxmlformats.org/drawingml/2006/main">
-              <a:ext uri="{FF2B5EF4-FFF2-40B4-BE49-F238E27FC236}">
-                <a16:creationId xmlns:a16="http://schemas.microsoft.com/office/drawing/2014/main" id="{F4ACDB40-08EE-41AA-944C-C82A5322CCF8}"/>
+          <p:cNvPr id="14" name="footer">
+            <a:extLst xmlns:a="http://schemas.openxmlformats.org/drawingml/2006/main">
+              <a:ext uri="{FF2B5EF4-FFF2-40B4-BE49-F238E27FC236}">
+                <a16:creationId xmlns:a16="http://schemas.microsoft.com/office/drawing/2014/main" id="{F54A823E-3A80-4E0B-8948-8F3074379831}"/>
               </a:ext>
             </a:extLst>
           </p:cNvPr>
@@ -7507,10 +7961,10 @@
       </p:sp>
       <p:sp>
         <p:nvSpPr>
-          <p:cNvPr id="13" name="page-number">
-            <a:extLst xmlns:a="http://schemas.openxmlformats.org/drawingml/2006/main">
-              <a:ext uri="{FF2B5EF4-FFF2-40B4-BE49-F238E27FC236}">
-                <a16:creationId xmlns:a16="http://schemas.microsoft.com/office/drawing/2014/main" id="{726F9295-0940-44E0-AD25-195C8AF08AB6}"/>
+          <p:cNvPr id="15" name="page-number">
+            <a:extLst xmlns:a="http://schemas.openxmlformats.org/drawingml/2006/main">
+              <a:ext uri="{FF2B5EF4-FFF2-40B4-BE49-F238E27FC236}">
+                <a16:creationId xmlns:a16="http://schemas.microsoft.com/office/drawing/2014/main" id="{D94DD5AF-D723-46DD-B00A-B4B1D73AC487}"/>
               </a:ext>
             </a:extLst>
           </p:cNvPr>
@@ -7563,7 +8017,7 @@
     </p:spTree>
     <p:extLst>
       <p:ext uri="{BB962C8B-B14F-4D97-AF65-F5344CB8AC3E}">
-        <p14:creationId xmlns:p14="http://schemas.microsoft.com/office/powerpoint/2010/main" val="1265158240"/>
+        <p14:creationId xmlns:p14="http://schemas.microsoft.com/office/powerpoint/2010/main" val="1454444864"/>
       </p:ext>
     </p:extLst>
   </p:cSld>
@@ -7599,10 +8053,10 @@
       </p:grpSpPr>
       <p:sp>
         <p:nvSpPr>
-          <p:cNvPr id="10" name="result-label">
-            <a:extLst xmlns:a="http://schemas.openxmlformats.org/drawingml/2006/main">
-              <a:ext uri="{FF2B5EF4-FFF2-40B4-BE49-F238E27FC236}">
-                <a16:creationId xmlns:a16="http://schemas.microsoft.com/office/drawing/2014/main" id="{12C8930D-68F4-4029-A276-DA6393621057}"/>
+          <p:cNvPr id="12" name="result-label">
+            <a:extLst xmlns:a="http://schemas.openxmlformats.org/drawingml/2006/main">
+              <a:ext uri="{FF2B5EF4-FFF2-40B4-BE49-F238E27FC236}">
+                <a16:creationId xmlns:a16="http://schemas.microsoft.com/office/drawing/2014/main" id="{4C45F66F-94D9-4E19-AEE9-92717F47F6B5}"/>
               </a:ext>
             </a:extLst>
           </p:cNvPr>
@@ -7653,7 +8107,7 @@
           <p:cNvPr id="2" name="result">
             <a:extLst xmlns:a="http://schemas.openxmlformats.org/drawingml/2006/main">
               <a:ext uri="{FF2B5EF4-FFF2-40B4-BE49-F238E27FC236}">
-                <a16:creationId xmlns:a16="http://schemas.microsoft.com/office/drawing/2014/main" id="{E156717D-7B4A-4181-8C37-727060B39B43}"/>
+                <a16:creationId xmlns:a16="http://schemas.microsoft.com/office/drawing/2014/main" id="{B602DF17-E01E-41D9-BE8F-EEFF67B25DB9}"/>
               </a:ext>
             </a:extLst>
           </p:cNvPr>
@@ -7704,7 +8158,7 @@
           <p:cNvPr id="3" name="result-meta">
             <a:extLst xmlns:a="http://schemas.openxmlformats.org/drawingml/2006/main">
               <a:ext uri="{FF2B5EF4-FFF2-40B4-BE49-F238E27FC236}">
-                <a16:creationId xmlns:a16="http://schemas.microsoft.com/office/drawing/2014/main" id="{FD88B5F6-6277-4030-8F3E-4F694C748D28}"/>
+                <a16:creationId xmlns:a16="http://schemas.microsoft.com/office/drawing/2014/main" id="{C00F85BA-75AF-4023-9549-49CE448C0AE2}"/>
               </a:ext>
             </a:extLst>
           </p:cNvPr>
@@ -7755,7 +8209,7 @@
           <p:cNvPr id="4" name="ambient-glow">
             <a:extLst xmlns:a="http://schemas.openxmlformats.org/drawingml/2006/main">
               <a:ext uri="{FF2B5EF4-FFF2-40B4-BE49-F238E27FC236}">
-                <a16:creationId xmlns:a16="http://schemas.microsoft.com/office/drawing/2014/main" id="{79172C2F-B2EE-43BE-B73C-4C6AF1E6C298}"/>
+                <a16:creationId xmlns:a16="http://schemas.microsoft.com/office/drawing/2014/main" id="{35140F5B-5EAD-49FC-B1FD-197D7061A2AD}"/>
               </a:ext>
             </a:extLst>
           </p:cNvPr>
@@ -7792,7 +8246,7 @@
           <p:cNvPr id="5" name="ambient-core">
             <a:extLst xmlns:a="http://schemas.openxmlformats.org/drawingml/2006/main">
               <a:ext uri="{FF2B5EF4-FFF2-40B4-BE49-F238E27FC236}">
-                <a16:creationId xmlns:a16="http://schemas.microsoft.com/office/drawing/2014/main" id="{1EB22E22-920E-414A-8BC6-8184AB408370}"/>
+                <a16:creationId xmlns:a16="http://schemas.microsoft.com/office/drawing/2014/main" id="{94AE3DFA-675E-495F-A016-AF94386E61AC}"/>
               </a:ext>
             </a:extLst>
           </p:cNvPr>
@@ -7829,7 +8283,7 @@
           <p:cNvPr id="6" name="eyebrow">
             <a:extLst xmlns:a="http://schemas.openxmlformats.org/drawingml/2006/main">
               <a:ext uri="{FF2B5EF4-FFF2-40B4-BE49-F238E27FC236}">
-                <a16:creationId xmlns:a16="http://schemas.microsoft.com/office/drawing/2014/main" id="{3FEA6B61-897B-4E30-8FB9-D7FF916A48AB}"/>
+                <a16:creationId xmlns:a16="http://schemas.microsoft.com/office/drawing/2014/main" id="{AEF3D53F-9D08-40DB-B4D3-C3D1D60AF31A}"/>
               </a:ext>
             </a:extLst>
           </p:cNvPr>
@@ -7877,10 +8331,69 @@
       </p:sp>
       <p:sp>
         <p:nvSpPr>
-          <p:cNvPr id="7" name="footer-rule">
-            <a:extLst xmlns:a="http://schemas.openxmlformats.org/drawingml/2006/main">
-              <a:ext uri="{FF2B5EF4-FFF2-40B4-BE49-F238E27FC236}">
-                <a16:creationId xmlns:a16="http://schemas.microsoft.com/office/drawing/2014/main" id="{F1AEB381-18B7-4CE7-9D73-E5D4167DDADB}"/>
+          <p:cNvPr id="7" name="rescue-point-logo-background">
+            <a:extLst xmlns:a="http://schemas.openxmlformats.org/drawingml/2006/main">
+              <a:ext uri="{FF2B5EF4-FFF2-40B4-BE49-F238E27FC236}">
+                <a16:creationId xmlns:a16="http://schemas.microsoft.com/office/drawing/2014/main" id="{60AB2F21-9E02-4102-9735-1B5591A970A0}"/>
+              </a:ext>
+            </a:extLst>
+          </p:cNvPr>
+          <p:cNvSpPr>
+            <a:spLocks xmlns:a="http://schemas.openxmlformats.org/drawingml/2006/main" noGrp="1"/>
+          </p:cNvSpPr>
+          <p:nvPr/>
+        </p:nvSpPr>
+        <p:spPr>
+          <a:xfrm xmlns:a="http://schemas.openxmlformats.org/drawingml/2006/main">
+            <a:off x="9772650" y="133350"/>
+            <a:ext cx="1733550" cy="457200"/>
+          </a:xfrm>
+          <a:prstGeom xmlns:a="http://schemas.openxmlformats.org/drawingml/2006/main" prst="roundRect">
+            <a:avLst>
+              <a:gd name="adj" fmla="val 16667"/>
+            </a:avLst>
+          </a:prstGeom>
+          <a:solidFill xmlns:a="http://schemas.openxmlformats.org/drawingml/2006/main">
+            <a:srgbClr val="06142E"/>
+          </a:solidFill>
+          <a:ln xmlns:a="http://schemas.openxmlformats.org/drawingml/2006/main" w="9525">
+            <a:solidFill>
+              <a:srgbClr val="1EC5FF">
+                <a:alpha val="33333"/>
+              </a:srgbClr>
+            </a:solidFill>
+            <a:prstDash val="solid"/>
+          </a:ln>
+        </p:spPr>
+      </p:sp>
+      <p:pic>
+        <p:nvPicPr>
+          <p:cNvPr id="21" name="" descr="Figura oficial da documentação dbt usada para explicar: RESULTADO ESPERADO — Ground truth OK: 10 perguntas."/>
+          <p:cNvPicPr>
+            <a:picLocks xmlns:a="http://schemas.openxmlformats.org/drawingml/2006/main" noChangeAspect="1"/>
+          </p:cNvPicPr>
+          <p:nvPr/>
+        </p:nvPicPr>
+        <p:blipFill>
+          <a:blip xmlns:r="http://schemas.openxmlformats.org/officeDocument/2006/relationships" xmlns:a="http://schemas.openxmlformats.org/drawingml/2006/main" r:embed="R747096f463784e22"/>
+          <a:stretch xmlns:a="http://schemas.openxmlformats.org/drawingml/2006/main"/>
+        </p:blipFill>
+        <p:spPr>
+          <a:xfrm xmlns:a="http://schemas.openxmlformats.org/drawingml/2006/main">
+            <a:off x="9893718" y="209550"/>
+            <a:ext cx="1491414" cy="323850"/>
+          </a:xfrm>
+          <a:prstGeom xmlns:a="http://schemas.openxmlformats.org/drawingml/2006/main" prst="rect">
+            <a:avLst/>
+          </a:prstGeom>
+        </p:spPr>
+      </p:pic>
+      <p:sp>
+        <p:nvSpPr>
+          <p:cNvPr id="9" name="footer-rule">
+            <a:extLst xmlns:a="http://schemas.openxmlformats.org/drawingml/2006/main">
+              <a:ext uri="{FF2B5EF4-FFF2-40B4-BE49-F238E27FC236}">
+                <a16:creationId xmlns:a16="http://schemas.microsoft.com/office/drawing/2014/main" id="{B6EEF367-7957-4F52-8052-90112841EF9F}"/>
               </a:ext>
             </a:extLst>
           </p:cNvPr>
@@ -7910,10 +8423,10 @@
       </p:sp>
       <p:sp>
         <p:nvSpPr>
-          <p:cNvPr id="8" name="footer">
-            <a:extLst xmlns:a="http://schemas.openxmlformats.org/drawingml/2006/main">
-              <a:ext uri="{FF2B5EF4-FFF2-40B4-BE49-F238E27FC236}">
-                <a16:creationId xmlns:a16="http://schemas.microsoft.com/office/drawing/2014/main" id="{BC59D30E-E1A3-4BDB-9494-E0200EE4AE73}"/>
+          <p:cNvPr id="10" name="footer">
+            <a:extLst xmlns:a="http://schemas.openxmlformats.org/drawingml/2006/main">
+              <a:ext uri="{FF2B5EF4-FFF2-40B4-BE49-F238E27FC236}">
+                <a16:creationId xmlns:a16="http://schemas.microsoft.com/office/drawing/2014/main" id="{9CBE0F5C-A228-4102-865D-27D0DB168B0D}"/>
               </a:ext>
             </a:extLst>
           </p:cNvPr>
@@ -7965,10 +8478,10 @@
       </p:sp>
       <p:sp>
         <p:nvSpPr>
-          <p:cNvPr id="9" name="page-number">
-            <a:extLst xmlns:a="http://schemas.openxmlformats.org/drawingml/2006/main">
-              <a:ext uri="{FF2B5EF4-FFF2-40B4-BE49-F238E27FC236}">
-                <a16:creationId xmlns:a16="http://schemas.microsoft.com/office/drawing/2014/main" id="{9C4C19E5-F75D-4A01-BD10-7F283941221E}"/>
+          <p:cNvPr id="11" name="page-number">
+            <a:extLst xmlns:a="http://schemas.openxmlformats.org/drawingml/2006/main">
+              <a:ext uri="{FF2B5EF4-FFF2-40B4-BE49-F238E27FC236}">
+                <a16:creationId xmlns:a16="http://schemas.microsoft.com/office/drawing/2014/main" id="{520373A2-9348-4044-B56F-4B4EB1EAC0F2}"/>
               </a:ext>
             </a:extLst>
           </p:cNvPr>
@@ -8021,7 +8534,7 @@
     </p:spTree>
     <p:extLst>
       <p:ext uri="{BB962C8B-B14F-4D97-AF65-F5344CB8AC3E}">
-        <p14:creationId xmlns:p14="http://schemas.microsoft.com/office/powerpoint/2010/main" val="375522964"/>
+        <p14:creationId xmlns:p14="http://schemas.microsoft.com/office/powerpoint/2010/main" val="410218657"/>
       </p:ext>
     </p:extLst>
   </p:cSld>
@@ -8049,10 +8562,10 @@
       </p:grpSpPr>
       <p:sp>
         <p:nvSpPr>
-          <p:cNvPr id="14" name="slide-title">
-            <a:extLst xmlns:a="http://schemas.openxmlformats.org/drawingml/2006/main">
-              <a:ext uri="{FF2B5EF4-FFF2-40B4-BE49-F238E27FC236}">
-                <a16:creationId xmlns:a16="http://schemas.microsoft.com/office/drawing/2014/main" id="{141A6477-EAEF-4A79-B8BC-50C548A48EB1}"/>
+          <p:cNvPr id="16" name="slide-title">
+            <a:extLst xmlns:a="http://schemas.openxmlformats.org/drawingml/2006/main">
+              <a:ext uri="{FF2B5EF4-FFF2-40B4-BE49-F238E27FC236}">
+                <a16:creationId xmlns:a16="http://schemas.microsoft.com/office/drawing/2014/main" id="{FCA54CC6-F060-4B65-B66F-FE3F1C491639}"/>
               </a:ext>
             </a:extLst>
           </p:cNvPr>
@@ -8103,7 +8616,7 @@
           <p:cNvPr id="2" name="step-num-1">
             <a:extLst xmlns:a="http://schemas.openxmlformats.org/drawingml/2006/main">
               <a:ext uri="{FF2B5EF4-FFF2-40B4-BE49-F238E27FC236}">
-                <a16:creationId xmlns:a16="http://schemas.microsoft.com/office/drawing/2014/main" id="{4935CA3D-5C0F-4F1F-8B9A-E14A3DEE2E82}"/>
+                <a16:creationId xmlns:a16="http://schemas.microsoft.com/office/drawing/2014/main" id="{D3CCE117-F329-4FB5-A9E4-4F3E836D61EB}"/>
               </a:ext>
             </a:extLst>
           </p:cNvPr>
@@ -8154,7 +8667,7 @@
           <p:cNvPr id="3" name="step-label-1">
             <a:extLst xmlns:a="http://schemas.openxmlformats.org/drawingml/2006/main">
               <a:ext uri="{FF2B5EF4-FFF2-40B4-BE49-F238E27FC236}">
-                <a16:creationId xmlns:a16="http://schemas.microsoft.com/office/drawing/2014/main" id="{1B9748F7-DE36-40AE-9B0C-EC5E8A5B7E18}"/>
+                <a16:creationId xmlns:a16="http://schemas.microsoft.com/office/drawing/2014/main" id="{DBBB9CB5-4DAD-4B01-94D2-ED0508ECB136}"/>
               </a:ext>
             </a:extLst>
           </p:cNvPr>
@@ -8205,7 +8718,7 @@
           <p:cNvPr id="4" name="step-line-1">
             <a:extLst xmlns:a="http://schemas.openxmlformats.org/drawingml/2006/main">
               <a:ext uri="{FF2B5EF4-FFF2-40B4-BE49-F238E27FC236}">
-                <a16:creationId xmlns:a16="http://schemas.microsoft.com/office/drawing/2014/main" id="{BE9DF09A-3393-4B1F-9CC3-6956B7BA3965}"/>
+                <a16:creationId xmlns:a16="http://schemas.microsoft.com/office/drawing/2014/main" id="{066AE7C5-69BF-4393-BB99-1AC549DD732E}"/>
               </a:ext>
             </a:extLst>
           </p:cNvPr>
@@ -8236,7 +8749,7 @@
           <p:cNvPr id="5" name="step-num-2">
             <a:extLst xmlns:a="http://schemas.openxmlformats.org/drawingml/2006/main">
               <a:ext uri="{FF2B5EF4-FFF2-40B4-BE49-F238E27FC236}">
-                <a16:creationId xmlns:a16="http://schemas.microsoft.com/office/drawing/2014/main" id="{B1B54359-4DCB-4809-B991-028D4529B113}"/>
+                <a16:creationId xmlns:a16="http://schemas.microsoft.com/office/drawing/2014/main" id="{0E344945-82E2-403F-AC0A-958E8A8F15BC}"/>
               </a:ext>
             </a:extLst>
           </p:cNvPr>
@@ -8287,7 +8800,7 @@
           <p:cNvPr id="6" name="step-label-2">
             <a:extLst xmlns:a="http://schemas.openxmlformats.org/drawingml/2006/main">
               <a:ext uri="{FF2B5EF4-FFF2-40B4-BE49-F238E27FC236}">
-                <a16:creationId xmlns:a16="http://schemas.microsoft.com/office/drawing/2014/main" id="{5F8FC1E4-8025-412B-A151-F5BEAF3254D1}"/>
+                <a16:creationId xmlns:a16="http://schemas.microsoft.com/office/drawing/2014/main" id="{227F50AB-B7A5-4E15-AED5-555D42F699B6}"/>
               </a:ext>
             </a:extLst>
           </p:cNvPr>
@@ -8338,7 +8851,7 @@
           <p:cNvPr id="7" name="step-line-2">
             <a:extLst xmlns:a="http://schemas.openxmlformats.org/drawingml/2006/main">
               <a:ext uri="{FF2B5EF4-FFF2-40B4-BE49-F238E27FC236}">
-                <a16:creationId xmlns:a16="http://schemas.microsoft.com/office/drawing/2014/main" id="{E3B6F06E-782A-4917-B345-02EB7EDF7D31}"/>
+                <a16:creationId xmlns:a16="http://schemas.microsoft.com/office/drawing/2014/main" id="{D655F107-09D9-4701-90CB-6A655BFCC2CB}"/>
               </a:ext>
             </a:extLst>
           </p:cNvPr>
@@ -8369,7 +8882,7 @@
           <p:cNvPr id="8" name="step-num-3">
             <a:extLst xmlns:a="http://schemas.openxmlformats.org/drawingml/2006/main">
               <a:ext uri="{FF2B5EF4-FFF2-40B4-BE49-F238E27FC236}">
-                <a16:creationId xmlns:a16="http://schemas.microsoft.com/office/drawing/2014/main" id="{70DF80F4-B7D1-448D-9270-993971000D8E}"/>
+                <a16:creationId xmlns:a16="http://schemas.microsoft.com/office/drawing/2014/main" id="{79F0BE80-9D9D-49B5-ADCE-62A39597661F}"/>
               </a:ext>
             </a:extLst>
           </p:cNvPr>
@@ -8420,7 +8933,7 @@
           <p:cNvPr id="9" name="step-label-3">
             <a:extLst xmlns:a="http://schemas.openxmlformats.org/drawingml/2006/main">
               <a:ext uri="{FF2B5EF4-FFF2-40B4-BE49-F238E27FC236}">
-                <a16:creationId xmlns:a16="http://schemas.microsoft.com/office/drawing/2014/main" id="{E3DBF7FF-5211-4294-B695-8CD857D3B630}"/>
+                <a16:creationId xmlns:a16="http://schemas.microsoft.com/office/drawing/2014/main" id="{BE0BE9B7-0A6B-4556-96B6-3C814DBA22D5}"/>
               </a:ext>
             </a:extLst>
           </p:cNvPr>
@@ -8471,7 +8984,7 @@
           <p:cNvPr id="10" name="eyebrow">
             <a:extLst xmlns:a="http://schemas.openxmlformats.org/drawingml/2006/main">
               <a:ext uri="{FF2B5EF4-FFF2-40B4-BE49-F238E27FC236}">
-                <a16:creationId xmlns:a16="http://schemas.microsoft.com/office/drawing/2014/main" id="{234925FD-0969-4875-BE33-358B069566C5}"/>
+                <a16:creationId xmlns:a16="http://schemas.microsoft.com/office/drawing/2014/main" id="{38F4368D-4B7B-4E27-B265-3419DDDD5B2B}"/>
               </a:ext>
             </a:extLst>
           </p:cNvPr>
@@ -8519,10 +9032,69 @@
       </p:sp>
       <p:sp>
         <p:nvSpPr>
-          <p:cNvPr id="11" name="footer-rule">
-            <a:extLst xmlns:a="http://schemas.openxmlformats.org/drawingml/2006/main">
-              <a:ext uri="{FF2B5EF4-FFF2-40B4-BE49-F238E27FC236}">
-                <a16:creationId xmlns:a16="http://schemas.microsoft.com/office/drawing/2014/main" id="{F3F59AE2-80D9-4585-99B4-07763DB7879C}"/>
+          <p:cNvPr id="11" name="rescue-point-logo-background">
+            <a:extLst xmlns:a="http://schemas.openxmlformats.org/drawingml/2006/main">
+              <a:ext uri="{FF2B5EF4-FFF2-40B4-BE49-F238E27FC236}">
+                <a16:creationId xmlns:a16="http://schemas.microsoft.com/office/drawing/2014/main" id="{29135D2D-63A9-4FD1-97C3-F07F0E486A8E}"/>
+              </a:ext>
+            </a:extLst>
+          </p:cNvPr>
+          <p:cNvSpPr>
+            <a:spLocks xmlns:a="http://schemas.openxmlformats.org/drawingml/2006/main" noGrp="1"/>
+          </p:cNvSpPr>
+          <p:nvPr/>
+        </p:nvSpPr>
+        <p:spPr>
+          <a:xfrm xmlns:a="http://schemas.openxmlformats.org/drawingml/2006/main">
+            <a:off x="9772650" y="133350"/>
+            <a:ext cx="1733550" cy="457200"/>
+          </a:xfrm>
+          <a:prstGeom xmlns:a="http://schemas.openxmlformats.org/drawingml/2006/main" prst="roundRect">
+            <a:avLst>
+              <a:gd name="adj" fmla="val 16667"/>
+            </a:avLst>
+          </a:prstGeom>
+          <a:solidFill xmlns:a="http://schemas.openxmlformats.org/drawingml/2006/main">
+            <a:srgbClr val="06142E"/>
+          </a:solidFill>
+          <a:ln xmlns:a="http://schemas.openxmlformats.org/drawingml/2006/main" w="9525">
+            <a:solidFill>
+              <a:srgbClr val="1EC5FF">
+                <a:alpha val="33333"/>
+              </a:srgbClr>
+            </a:solidFill>
+            <a:prstDash val="solid"/>
+          </a:ln>
+        </p:spPr>
+      </p:sp>
+      <p:pic>
+        <p:nvPicPr>
+          <p:cNvPr id="29" name="" descr="Figura oficial da documentação dbt usada para explicar: O mesmo recurso afeta três decisões — 01."/>
+          <p:cNvPicPr>
+            <a:picLocks xmlns:a="http://schemas.openxmlformats.org/drawingml/2006/main" noChangeAspect="1"/>
+          </p:cNvPicPr>
+          <p:nvPr/>
+        </p:nvPicPr>
+        <p:blipFill>
+          <a:blip xmlns:r="http://schemas.openxmlformats.org/officeDocument/2006/relationships" xmlns:a="http://schemas.openxmlformats.org/drawingml/2006/main" r:embed="R07e446651ef5464d"/>
+          <a:stretch xmlns:a="http://schemas.openxmlformats.org/drawingml/2006/main"/>
+        </p:blipFill>
+        <p:spPr>
+          <a:xfrm xmlns:a="http://schemas.openxmlformats.org/drawingml/2006/main">
+            <a:off x="9893718" y="209550"/>
+            <a:ext cx="1491414" cy="323850"/>
+          </a:xfrm>
+          <a:prstGeom xmlns:a="http://schemas.openxmlformats.org/drawingml/2006/main" prst="rect">
+            <a:avLst/>
+          </a:prstGeom>
+        </p:spPr>
+      </p:pic>
+      <p:sp>
+        <p:nvSpPr>
+          <p:cNvPr id="13" name="footer-rule">
+            <a:extLst xmlns:a="http://schemas.openxmlformats.org/drawingml/2006/main">
+              <a:ext uri="{FF2B5EF4-FFF2-40B4-BE49-F238E27FC236}">
+                <a16:creationId xmlns:a16="http://schemas.microsoft.com/office/drawing/2014/main" id="{8920CBF0-1CB9-43C7-9CD1-85F901FFF7A7}"/>
               </a:ext>
             </a:extLst>
           </p:cNvPr>
@@ -8552,10 +9124,10 @@
       </p:sp>
       <p:sp>
         <p:nvSpPr>
-          <p:cNvPr id="12" name="footer">
-            <a:extLst xmlns:a="http://schemas.openxmlformats.org/drawingml/2006/main">
-              <a:ext uri="{FF2B5EF4-FFF2-40B4-BE49-F238E27FC236}">
-                <a16:creationId xmlns:a16="http://schemas.microsoft.com/office/drawing/2014/main" id="{A1532A7C-BC45-4C67-98F6-58CCED862486}"/>
+          <p:cNvPr id="14" name="footer">
+            <a:extLst xmlns:a="http://schemas.openxmlformats.org/drawingml/2006/main">
+              <a:ext uri="{FF2B5EF4-FFF2-40B4-BE49-F238E27FC236}">
+                <a16:creationId xmlns:a16="http://schemas.microsoft.com/office/drawing/2014/main" id="{60A5C4A0-2B0B-487D-95A7-AC54098F1129}"/>
               </a:ext>
             </a:extLst>
           </p:cNvPr>
@@ -8607,10 +9179,10 @@
       </p:sp>
       <p:sp>
         <p:nvSpPr>
-          <p:cNvPr id="13" name="page-number">
-            <a:extLst xmlns:a="http://schemas.openxmlformats.org/drawingml/2006/main">
-              <a:ext uri="{FF2B5EF4-FFF2-40B4-BE49-F238E27FC236}">
-                <a16:creationId xmlns:a16="http://schemas.microsoft.com/office/drawing/2014/main" id="{6172CD0B-4CA0-4AA9-A212-19490C1E83EE}"/>
+          <p:cNvPr id="15" name="page-number">
+            <a:extLst xmlns:a="http://schemas.openxmlformats.org/drawingml/2006/main">
+              <a:ext uri="{FF2B5EF4-FFF2-40B4-BE49-F238E27FC236}">
+                <a16:creationId xmlns:a16="http://schemas.microsoft.com/office/drawing/2014/main" id="{DC453057-0A9D-41DB-931C-5D4A5234D07D}"/>
               </a:ext>
             </a:extLst>
           </p:cNvPr>
@@ -8663,7 +9235,7 @@
     </p:spTree>
     <p:extLst>
       <p:ext uri="{BB962C8B-B14F-4D97-AF65-F5344CB8AC3E}">
-        <p14:creationId xmlns:p14="http://schemas.microsoft.com/office/powerpoint/2010/main" val="376688022"/>
+        <p14:creationId xmlns:p14="http://schemas.microsoft.com/office/powerpoint/2010/main" val="864632826"/>
       </p:ext>
     </p:extLst>
   </p:cSld>
@@ -8699,10 +9271,10 @@
       </p:grpSpPr>
       <p:sp>
         <p:nvSpPr>
-          <p:cNvPr id="9" name="case-number">
-            <a:extLst xmlns:a="http://schemas.openxmlformats.org/drawingml/2006/main">
-              <a:ext uri="{FF2B5EF4-FFF2-40B4-BE49-F238E27FC236}">
-                <a16:creationId xmlns:a16="http://schemas.microsoft.com/office/drawing/2014/main" id="{C8577BE5-73E9-4786-8E5B-4D8C1F8AE706}"/>
+          <p:cNvPr id="11" name="case-number">
+            <a:extLst xmlns:a="http://schemas.openxmlformats.org/drawingml/2006/main">
+              <a:ext uri="{FF2B5EF4-FFF2-40B4-BE49-F238E27FC236}">
+                <a16:creationId xmlns:a16="http://schemas.microsoft.com/office/drawing/2014/main" id="{3C7D1082-8549-4043-BDFE-C518FDB29648}"/>
               </a:ext>
             </a:extLst>
           </p:cNvPr>
@@ -8753,7 +9325,7 @@
           <p:cNvPr id="2" name="case-label">
             <a:extLst xmlns:a="http://schemas.openxmlformats.org/drawingml/2006/main">
               <a:ext uri="{FF2B5EF4-FFF2-40B4-BE49-F238E27FC236}">
-                <a16:creationId xmlns:a16="http://schemas.microsoft.com/office/drawing/2014/main" id="{0E6EE956-4105-4F90-9AD2-63802A1F37E9}"/>
+                <a16:creationId xmlns:a16="http://schemas.microsoft.com/office/drawing/2014/main" id="{ED70640C-62A3-479E-9067-D530C140E718}"/>
               </a:ext>
             </a:extLst>
           </p:cNvPr>
@@ -8804,7 +9376,7 @@
           <p:cNvPr id="3" name="case-divider">
             <a:extLst xmlns:a="http://schemas.openxmlformats.org/drawingml/2006/main">
               <a:ext uri="{FF2B5EF4-FFF2-40B4-BE49-F238E27FC236}">
-                <a16:creationId xmlns:a16="http://schemas.microsoft.com/office/drawing/2014/main" id="{64E917AE-4AE0-4A92-9F33-5CE2AF133E6C}"/>
+                <a16:creationId xmlns:a16="http://schemas.microsoft.com/office/drawing/2014/main" id="{F159B7FB-46C4-489A-9B81-C76FEFEA561F}"/>
               </a:ext>
             </a:extLst>
           </p:cNvPr>
@@ -8837,7 +9409,7 @@
           <p:cNvPr id="4" name="case-caveat">
             <a:extLst xmlns:a="http://schemas.openxmlformats.org/drawingml/2006/main">
               <a:ext uri="{FF2B5EF4-FFF2-40B4-BE49-F238E27FC236}">
-                <a16:creationId xmlns:a16="http://schemas.microsoft.com/office/drawing/2014/main" id="{7E033DF2-CB92-4A9D-9D5E-2C3B0ABC50B9}"/>
+                <a16:creationId xmlns:a16="http://schemas.microsoft.com/office/drawing/2014/main" id="{8590CDBD-6E8E-46F0-908B-0D0A00A4764A}"/>
               </a:ext>
             </a:extLst>
           </p:cNvPr>
@@ -8888,7 +9460,7 @@
           <p:cNvPr id="5" name="eyebrow">
             <a:extLst xmlns:a="http://schemas.openxmlformats.org/drawingml/2006/main">
               <a:ext uri="{FF2B5EF4-FFF2-40B4-BE49-F238E27FC236}">
-                <a16:creationId xmlns:a16="http://schemas.microsoft.com/office/drawing/2014/main" id="{7D63EDCB-CF09-41C4-945D-262CC36BBD1B}"/>
+                <a16:creationId xmlns:a16="http://schemas.microsoft.com/office/drawing/2014/main" id="{7D4F23C3-C124-4548-9BF6-1010B706741F}"/>
               </a:ext>
             </a:extLst>
           </p:cNvPr>
@@ -8936,10 +9508,69 @@
       </p:sp>
       <p:sp>
         <p:nvSpPr>
-          <p:cNvPr id="6" name="footer-rule">
-            <a:extLst xmlns:a="http://schemas.openxmlformats.org/drawingml/2006/main">
-              <a:ext uri="{FF2B5EF4-FFF2-40B4-BE49-F238E27FC236}">
-                <a16:creationId xmlns:a16="http://schemas.microsoft.com/office/drawing/2014/main" id="{9258A743-7E04-4D6C-990E-204DD6D73F85}"/>
+          <p:cNvPr id="6" name="rescue-point-logo-background">
+            <a:extLst xmlns:a="http://schemas.openxmlformats.org/drawingml/2006/main">
+              <a:ext uri="{FF2B5EF4-FFF2-40B4-BE49-F238E27FC236}">
+                <a16:creationId xmlns:a16="http://schemas.microsoft.com/office/drawing/2014/main" id="{D515E80E-0747-4506-8274-771596EECDD3}"/>
+              </a:ext>
+            </a:extLst>
+          </p:cNvPr>
+          <p:cNvSpPr>
+            <a:spLocks xmlns:a="http://schemas.openxmlformats.org/drawingml/2006/main" noGrp="1"/>
+          </p:cNvSpPr>
+          <p:nvPr/>
+        </p:nvSpPr>
+        <p:spPr>
+          <a:xfrm xmlns:a="http://schemas.openxmlformats.org/drawingml/2006/main">
+            <a:off x="9772650" y="133350"/>
+            <a:ext cx="1733550" cy="457200"/>
+          </a:xfrm>
+          <a:prstGeom xmlns:a="http://schemas.openxmlformats.org/drawingml/2006/main" prst="roundRect">
+            <a:avLst>
+              <a:gd name="adj" fmla="val 16667"/>
+            </a:avLst>
+          </a:prstGeom>
+          <a:solidFill xmlns:a="http://schemas.openxmlformats.org/drawingml/2006/main">
+            <a:srgbClr val="06142E"/>
+          </a:solidFill>
+          <a:ln xmlns:a="http://schemas.openxmlformats.org/drawingml/2006/main" w="9525">
+            <a:solidFill>
+              <a:srgbClr val="1EC5FF">
+                <a:alpha val="33333"/>
+              </a:srgbClr>
+            </a:solidFill>
+            <a:prstDash val="solid"/>
+          </a:ln>
+        </p:spPr>
+      </p:sp>
+      <p:pic>
+        <p:nvPicPr>
+          <p:cNvPr id="19" name="" descr="Figura oficial da documentação dbt usada para explicar: 83 métricas — centralizadas pela Inventa."/>
+          <p:cNvPicPr>
+            <a:picLocks xmlns:a="http://schemas.openxmlformats.org/drawingml/2006/main" noChangeAspect="1"/>
+          </p:cNvPicPr>
+          <p:nvPr/>
+        </p:nvPicPr>
+        <p:blipFill>
+          <a:blip xmlns:r="http://schemas.openxmlformats.org/officeDocument/2006/relationships" xmlns:a="http://schemas.openxmlformats.org/drawingml/2006/main" r:embed="Rb9b60baf581f47ea"/>
+          <a:stretch xmlns:a="http://schemas.openxmlformats.org/drawingml/2006/main"/>
+        </p:blipFill>
+        <p:spPr>
+          <a:xfrm xmlns:a="http://schemas.openxmlformats.org/drawingml/2006/main">
+            <a:off x="9893718" y="209550"/>
+            <a:ext cx="1491414" cy="323850"/>
+          </a:xfrm>
+          <a:prstGeom xmlns:a="http://schemas.openxmlformats.org/drawingml/2006/main" prst="rect">
+            <a:avLst/>
+          </a:prstGeom>
+        </p:spPr>
+      </p:pic>
+      <p:sp>
+        <p:nvSpPr>
+          <p:cNvPr id="8" name="footer-rule">
+            <a:extLst xmlns:a="http://schemas.openxmlformats.org/drawingml/2006/main">
+              <a:ext uri="{FF2B5EF4-FFF2-40B4-BE49-F238E27FC236}">
+                <a16:creationId xmlns:a16="http://schemas.microsoft.com/office/drawing/2014/main" id="{5E637652-1C42-4D02-B639-D46F0B0465D6}"/>
               </a:ext>
             </a:extLst>
           </p:cNvPr>
@@ -8969,10 +9600,10 @@
       </p:sp>
       <p:sp>
         <p:nvSpPr>
-          <p:cNvPr id="7" name="footer">
-            <a:extLst xmlns:a="http://schemas.openxmlformats.org/drawingml/2006/main">
-              <a:ext uri="{FF2B5EF4-FFF2-40B4-BE49-F238E27FC236}">
-                <a16:creationId xmlns:a16="http://schemas.microsoft.com/office/drawing/2014/main" id="{62D74A28-23C5-42FD-B7EE-10D4D2FFFE86}"/>
+          <p:cNvPr id="9" name="footer">
+            <a:extLst xmlns:a="http://schemas.openxmlformats.org/drawingml/2006/main">
+              <a:ext uri="{FF2B5EF4-FFF2-40B4-BE49-F238E27FC236}">
+                <a16:creationId xmlns:a16="http://schemas.microsoft.com/office/drawing/2014/main" id="{5A29CAFB-5921-4F79-8029-4971121DF9A5}"/>
               </a:ext>
             </a:extLst>
           </p:cNvPr>
@@ -9024,10 +9655,10 @@
       </p:sp>
       <p:sp>
         <p:nvSpPr>
-          <p:cNvPr id="8" name="page-number">
-            <a:extLst xmlns:a="http://schemas.openxmlformats.org/drawingml/2006/main">
-              <a:ext uri="{FF2B5EF4-FFF2-40B4-BE49-F238E27FC236}">
-                <a16:creationId xmlns:a16="http://schemas.microsoft.com/office/drawing/2014/main" id="{420492FE-DE6B-4E9A-A438-9E049CA71F51}"/>
+          <p:cNvPr id="10" name="page-number">
+            <a:extLst xmlns:a="http://schemas.openxmlformats.org/drawingml/2006/main">
+              <a:ext uri="{FF2B5EF4-FFF2-40B4-BE49-F238E27FC236}">
+                <a16:creationId xmlns:a16="http://schemas.microsoft.com/office/drawing/2014/main" id="{E454F933-7C62-4873-B3D5-FE1E09381242}"/>
               </a:ext>
             </a:extLst>
           </p:cNvPr>
@@ -9080,7 +9711,7 @@
     </p:spTree>
     <p:extLst>
       <p:ext uri="{BB962C8B-B14F-4D97-AF65-F5344CB8AC3E}">
-        <p14:creationId xmlns:p14="http://schemas.microsoft.com/office/powerpoint/2010/main" val="1517578420"/>
+        <p14:creationId xmlns:p14="http://schemas.microsoft.com/office/powerpoint/2010/main" val="995312672"/>
       </p:ext>
     </p:extLst>
   </p:cSld>
@@ -9108,10 +9739,10 @@
       </p:grpSpPr>
       <p:sp>
         <p:nvSpPr>
-          <p:cNvPr id="7" name="slide-title">
-            <a:extLst xmlns:a="http://schemas.openxmlformats.org/drawingml/2006/main">
-              <a:ext uri="{FF2B5EF4-FFF2-40B4-BE49-F238E27FC236}">
-                <a16:creationId xmlns:a16="http://schemas.microsoft.com/office/drawing/2014/main" id="{F083699F-92D3-4457-B9AB-73199022AB19}"/>
+          <p:cNvPr id="9" name="slide-title">
+            <a:extLst xmlns:a="http://schemas.openxmlformats.org/drawingml/2006/main">
+              <a:ext uri="{FF2B5EF4-FFF2-40B4-BE49-F238E27FC236}">
+                <a16:creationId xmlns:a16="http://schemas.microsoft.com/office/drawing/2014/main" id="{C5E73C3C-B2FC-44A5-8F33-076B542BA9C5}"/>
               </a:ext>
             </a:extLst>
           </p:cNvPr>
@@ -9162,7 +9793,7 @@
           <p:cNvPr id="2" name="bullets">
             <a:extLst xmlns:a="http://schemas.openxmlformats.org/drawingml/2006/main">
               <a:ext uri="{FF2B5EF4-FFF2-40B4-BE49-F238E27FC236}">
-                <a16:creationId xmlns:a16="http://schemas.microsoft.com/office/drawing/2014/main" id="{2B318D0D-F23B-4B74-B59B-BD7E8AE31F3A}"/>
+                <a16:creationId xmlns:a16="http://schemas.microsoft.com/office/drawing/2014/main" id="{0DAC155C-66D8-4824-A5FA-59BBE6378622}"/>
               </a:ext>
             </a:extLst>
           </p:cNvPr>
@@ -9249,7 +9880,7 @@
           <p:cNvPr id="3" name="eyebrow">
             <a:extLst xmlns:a="http://schemas.openxmlformats.org/drawingml/2006/main">
               <a:ext uri="{FF2B5EF4-FFF2-40B4-BE49-F238E27FC236}">
-                <a16:creationId xmlns:a16="http://schemas.microsoft.com/office/drawing/2014/main" id="{C1D29695-50D1-4F71-B846-23212E681035}"/>
+                <a16:creationId xmlns:a16="http://schemas.microsoft.com/office/drawing/2014/main" id="{F651E1A0-DD76-4B5A-A8C2-A2D85CF4D6DB}"/>
               </a:ext>
             </a:extLst>
           </p:cNvPr>
@@ -9297,10 +9928,69 @@
       </p:sp>
       <p:sp>
         <p:nvSpPr>
-          <p:cNvPr id="4" name="footer-rule">
-            <a:extLst xmlns:a="http://schemas.openxmlformats.org/drawingml/2006/main">
-              <a:ext uri="{FF2B5EF4-FFF2-40B4-BE49-F238E27FC236}">
-                <a16:creationId xmlns:a16="http://schemas.microsoft.com/office/drawing/2014/main" id="{9A84F281-39A3-445D-90E9-912EFD8F15A3}"/>
+          <p:cNvPr id="4" name="rescue-point-logo-background">
+            <a:extLst xmlns:a="http://schemas.openxmlformats.org/drawingml/2006/main">
+              <a:ext uri="{FF2B5EF4-FFF2-40B4-BE49-F238E27FC236}">
+                <a16:creationId xmlns:a16="http://schemas.microsoft.com/office/drawing/2014/main" id="{262366FE-36CA-4814-9903-5CC03088062A}"/>
+              </a:ext>
+            </a:extLst>
+          </p:cNvPr>
+          <p:cNvSpPr>
+            <a:spLocks xmlns:a="http://schemas.openxmlformats.org/drawingml/2006/main" noGrp="1"/>
+          </p:cNvSpPr>
+          <p:nvPr/>
+        </p:nvSpPr>
+        <p:spPr>
+          <a:xfrm xmlns:a="http://schemas.openxmlformats.org/drawingml/2006/main">
+            <a:off x="9772650" y="133350"/>
+            <a:ext cx="1733550" cy="457200"/>
+          </a:xfrm>
+          <a:prstGeom xmlns:a="http://schemas.openxmlformats.org/drawingml/2006/main" prst="roundRect">
+            <a:avLst>
+              <a:gd name="adj" fmla="val 16667"/>
+            </a:avLst>
+          </a:prstGeom>
+          <a:solidFill xmlns:a="http://schemas.openxmlformats.org/drawingml/2006/main">
+            <a:srgbClr val="06142E"/>
+          </a:solidFill>
+          <a:ln xmlns:a="http://schemas.openxmlformats.org/drawingml/2006/main" w="9525">
+            <a:solidFill>
+              <a:srgbClr val="1EC5FF">
+                <a:alpha val="33333"/>
+              </a:srgbClr>
+            </a:solidFill>
+            <a:prstDash val="solid"/>
+          </a:ln>
+        </p:spPr>
+      </p:sp>
+      <p:pic>
+        <p:nvPicPr>
+          <p:cNvPr id="15" name="" descr="Figura oficial da documentação dbt usada para explicar: Limitações que precisam permanecer visíveis — • YAML não resolve desacordo de negócio."/>
+          <p:cNvPicPr>
+            <a:picLocks xmlns:a="http://schemas.openxmlformats.org/drawingml/2006/main" noChangeAspect="1"/>
+          </p:cNvPicPr>
+          <p:nvPr/>
+        </p:nvPicPr>
+        <p:blipFill>
+          <a:blip xmlns:r="http://schemas.openxmlformats.org/officeDocument/2006/relationships" xmlns:a="http://schemas.openxmlformats.org/drawingml/2006/main" r:embed="R63db1a001b2344fd"/>
+          <a:stretch xmlns:a="http://schemas.openxmlformats.org/drawingml/2006/main"/>
+        </p:blipFill>
+        <p:spPr>
+          <a:xfrm xmlns:a="http://schemas.openxmlformats.org/drawingml/2006/main">
+            <a:off x="9893718" y="209550"/>
+            <a:ext cx="1491414" cy="323850"/>
+          </a:xfrm>
+          <a:prstGeom xmlns:a="http://schemas.openxmlformats.org/drawingml/2006/main" prst="rect">
+            <a:avLst/>
+          </a:prstGeom>
+        </p:spPr>
+      </p:pic>
+      <p:sp>
+        <p:nvSpPr>
+          <p:cNvPr id="6" name="footer-rule">
+            <a:extLst xmlns:a="http://schemas.openxmlformats.org/drawingml/2006/main">
+              <a:ext uri="{FF2B5EF4-FFF2-40B4-BE49-F238E27FC236}">
+                <a16:creationId xmlns:a16="http://schemas.microsoft.com/office/drawing/2014/main" id="{74507FF5-E2D7-4C58-9271-81E84B805696}"/>
               </a:ext>
             </a:extLst>
           </p:cNvPr>
@@ -9330,10 +10020,10 @@
       </p:sp>
       <p:sp>
         <p:nvSpPr>
-          <p:cNvPr id="5" name="footer">
-            <a:extLst xmlns:a="http://schemas.openxmlformats.org/drawingml/2006/main">
-              <a:ext uri="{FF2B5EF4-FFF2-40B4-BE49-F238E27FC236}">
-                <a16:creationId xmlns:a16="http://schemas.microsoft.com/office/drawing/2014/main" id="{676E26F5-8F1D-4D04-A34B-5BB2038BD116}"/>
+          <p:cNvPr id="7" name="footer">
+            <a:extLst xmlns:a="http://schemas.openxmlformats.org/drawingml/2006/main">
+              <a:ext uri="{FF2B5EF4-FFF2-40B4-BE49-F238E27FC236}">
+                <a16:creationId xmlns:a16="http://schemas.microsoft.com/office/drawing/2014/main" id="{5C8EA4CD-D889-47A2-855B-06E039E9B5A3}"/>
               </a:ext>
             </a:extLst>
           </p:cNvPr>
@@ -9385,10 +10075,10 @@
       </p:sp>
       <p:sp>
         <p:nvSpPr>
-          <p:cNvPr id="6" name="page-number">
-            <a:extLst xmlns:a="http://schemas.openxmlformats.org/drawingml/2006/main">
-              <a:ext uri="{FF2B5EF4-FFF2-40B4-BE49-F238E27FC236}">
-                <a16:creationId xmlns:a16="http://schemas.microsoft.com/office/drawing/2014/main" id="{96577157-E753-4445-9CD5-E539DDA44508}"/>
+          <p:cNvPr id="8" name="page-number">
+            <a:extLst xmlns:a="http://schemas.openxmlformats.org/drawingml/2006/main">
+              <a:ext uri="{FF2B5EF4-FFF2-40B4-BE49-F238E27FC236}">
+                <a16:creationId xmlns:a16="http://schemas.microsoft.com/office/drawing/2014/main" id="{FBC2D37F-DC26-49A4-8D43-B53AA1DE8694}"/>
               </a:ext>
             </a:extLst>
           </p:cNvPr>
@@ -9441,7 +10131,7 @@
     </p:spTree>
     <p:extLst>
       <p:ext uri="{BB962C8B-B14F-4D97-AF65-F5344CB8AC3E}">
-        <p14:creationId xmlns:p14="http://schemas.microsoft.com/office/powerpoint/2010/main" val="481865121"/>
+        <p14:creationId xmlns:p14="http://schemas.microsoft.com/office/powerpoint/2010/main" val="1753988799"/>
       </p:ext>
     </p:extLst>
   </p:cSld>
@@ -9477,10 +10167,10 @@
       </p:grpSpPr>
       <p:sp>
         <p:nvSpPr>
-          <p:cNvPr id="10" name="radar-label">
-            <a:extLst xmlns:a="http://schemas.openxmlformats.org/drawingml/2006/main">
-              <a:ext uri="{FF2B5EF4-FFF2-40B4-BE49-F238E27FC236}">
-                <a16:creationId xmlns:a16="http://schemas.microsoft.com/office/drawing/2014/main" id="{16DAFB41-5172-44FD-9630-C121B91C6C7F}"/>
+          <p:cNvPr id="12" name="radar-label">
+            <a:extLst xmlns:a="http://schemas.openxmlformats.org/drawingml/2006/main">
+              <a:ext uri="{FF2B5EF4-FFF2-40B4-BE49-F238E27FC236}">
+                <a16:creationId xmlns:a16="http://schemas.microsoft.com/office/drawing/2014/main" id="{212090E1-8772-4199-9695-CA9E240FF9A0}"/>
               </a:ext>
             </a:extLst>
           </p:cNvPr>
@@ -9531,7 +10221,7 @@
           <p:cNvPr id="2" name="radar-text">
             <a:extLst xmlns:a="http://schemas.openxmlformats.org/drawingml/2006/main">
               <a:ext uri="{FF2B5EF4-FFF2-40B4-BE49-F238E27FC236}">
-                <a16:creationId xmlns:a16="http://schemas.microsoft.com/office/drawing/2014/main" id="{16379F26-B41A-41E6-BC58-D49750C72246}"/>
+                <a16:creationId xmlns:a16="http://schemas.microsoft.com/office/drawing/2014/main" id="{741C97D7-E0AF-4CDF-A182-B4D58421D5AD}"/>
               </a:ext>
             </a:extLst>
           </p:cNvPr>
@@ -9582,7 +10272,7 @@
           <p:cNvPr id="3" name="radar-rule">
             <a:extLst xmlns:a="http://schemas.openxmlformats.org/drawingml/2006/main">
               <a:ext uri="{FF2B5EF4-FFF2-40B4-BE49-F238E27FC236}">
-                <a16:creationId xmlns:a16="http://schemas.microsoft.com/office/drawing/2014/main" id="{3C946D33-A2FF-4167-920F-0AB92D6CE77E}"/>
+                <a16:creationId xmlns:a16="http://schemas.microsoft.com/office/drawing/2014/main" id="{9FD9CB0D-9B9A-46AF-9181-4B03DB15D539}"/>
               </a:ext>
             </a:extLst>
           </p:cNvPr>
@@ -9633,7 +10323,7 @@
           <p:cNvPr id="4" name="ambient-glow">
             <a:extLst xmlns:a="http://schemas.openxmlformats.org/drawingml/2006/main">
               <a:ext uri="{FF2B5EF4-FFF2-40B4-BE49-F238E27FC236}">
-                <a16:creationId xmlns:a16="http://schemas.microsoft.com/office/drawing/2014/main" id="{91784085-4504-484F-8B24-FE987D321EE4}"/>
+                <a16:creationId xmlns:a16="http://schemas.microsoft.com/office/drawing/2014/main" id="{55335B04-D0B1-455E-8A21-9C74B2D4275C}"/>
               </a:ext>
             </a:extLst>
           </p:cNvPr>
@@ -9670,7 +10360,7 @@
           <p:cNvPr id="5" name="ambient-core">
             <a:extLst xmlns:a="http://schemas.openxmlformats.org/drawingml/2006/main">
               <a:ext uri="{FF2B5EF4-FFF2-40B4-BE49-F238E27FC236}">
-                <a16:creationId xmlns:a16="http://schemas.microsoft.com/office/drawing/2014/main" id="{4B5A0313-EACD-4BB9-8A72-F79162C4A7EC}"/>
+                <a16:creationId xmlns:a16="http://schemas.microsoft.com/office/drawing/2014/main" id="{5FCE37A6-F565-4377-927F-305F64D3C69A}"/>
               </a:ext>
             </a:extLst>
           </p:cNvPr>
@@ -9707,7 +10397,7 @@
           <p:cNvPr id="6" name="eyebrow">
             <a:extLst xmlns:a="http://schemas.openxmlformats.org/drawingml/2006/main">
               <a:ext uri="{FF2B5EF4-FFF2-40B4-BE49-F238E27FC236}">
-                <a16:creationId xmlns:a16="http://schemas.microsoft.com/office/drawing/2014/main" id="{EB824805-ED50-4945-BEC6-3159C3431BEB}"/>
+                <a16:creationId xmlns:a16="http://schemas.microsoft.com/office/drawing/2014/main" id="{F697CF1C-9D70-48F8-958F-DF4778F37BF1}"/>
               </a:ext>
             </a:extLst>
           </p:cNvPr>
@@ -9755,10 +10445,69 @@
       </p:sp>
       <p:sp>
         <p:nvSpPr>
-          <p:cNvPr id="7" name="footer-rule">
-            <a:extLst xmlns:a="http://schemas.openxmlformats.org/drawingml/2006/main">
-              <a:ext uri="{FF2B5EF4-FFF2-40B4-BE49-F238E27FC236}">
-                <a16:creationId xmlns:a16="http://schemas.microsoft.com/office/drawing/2014/main" id="{0D87F862-521E-4884-AE3D-C00B0C071CFE}"/>
+          <p:cNvPr id="7" name="rescue-point-logo-background">
+            <a:extLst xmlns:a="http://schemas.openxmlformats.org/drawingml/2006/main">
+              <a:ext uri="{FF2B5EF4-FFF2-40B4-BE49-F238E27FC236}">
+                <a16:creationId xmlns:a16="http://schemas.microsoft.com/office/drawing/2014/main" id="{7933AA5A-C0FB-4455-87CF-87EF71A49A7B}"/>
+              </a:ext>
+            </a:extLst>
+          </p:cNvPr>
+          <p:cNvSpPr>
+            <a:spLocks xmlns:a="http://schemas.openxmlformats.org/drawingml/2006/main" noGrp="1"/>
+          </p:cNvSpPr>
+          <p:nvPr/>
+        </p:nvSpPr>
+        <p:spPr>
+          <a:xfrm xmlns:a="http://schemas.openxmlformats.org/drawingml/2006/main">
+            <a:off x="9772650" y="133350"/>
+            <a:ext cx="1733550" cy="457200"/>
+          </a:xfrm>
+          <a:prstGeom xmlns:a="http://schemas.openxmlformats.org/drawingml/2006/main" prst="roundRect">
+            <a:avLst>
+              <a:gd name="adj" fmla="val 16667"/>
+            </a:avLst>
+          </a:prstGeom>
+          <a:solidFill xmlns:a="http://schemas.openxmlformats.org/drawingml/2006/main">
+            <a:srgbClr val="06142E"/>
+          </a:solidFill>
+          <a:ln xmlns:a="http://schemas.openxmlformats.org/drawingml/2006/main" w="9525">
+            <a:solidFill>
+              <a:srgbClr val="1EC5FF">
+                <a:alpha val="33333"/>
+              </a:srgbClr>
+            </a:solidFill>
+            <a:prstDash val="solid"/>
+          </a:ln>
+        </p:spPr>
+      </p:sp>
+      <p:pic>
+        <p:nvPicPr>
+          <p:cNvPr id="21" name="" descr="Figura oficial da documentação dbt usada para explicar: RADAR — A sintaxe executada é a spec suportada no Core 1.12; cross-project futuro fica no Radar.."/>
+          <p:cNvPicPr>
+            <a:picLocks xmlns:a="http://schemas.openxmlformats.org/drawingml/2006/main" noChangeAspect="1"/>
+          </p:cNvPicPr>
+          <p:nvPr/>
+        </p:nvPicPr>
+        <p:blipFill>
+          <a:blip xmlns:r="http://schemas.openxmlformats.org/officeDocument/2006/relationships" xmlns:a="http://schemas.openxmlformats.org/drawingml/2006/main" r:embed="R2f0188a87ccc406b"/>
+          <a:stretch xmlns:a="http://schemas.openxmlformats.org/drawingml/2006/main"/>
+        </p:blipFill>
+        <p:spPr>
+          <a:xfrm xmlns:a="http://schemas.openxmlformats.org/drawingml/2006/main">
+            <a:off x="9893718" y="209550"/>
+            <a:ext cx="1491414" cy="323850"/>
+          </a:xfrm>
+          <a:prstGeom xmlns:a="http://schemas.openxmlformats.org/drawingml/2006/main" prst="rect">
+            <a:avLst/>
+          </a:prstGeom>
+        </p:spPr>
+      </p:pic>
+      <p:sp>
+        <p:nvSpPr>
+          <p:cNvPr id="9" name="footer-rule">
+            <a:extLst xmlns:a="http://schemas.openxmlformats.org/drawingml/2006/main">
+              <a:ext uri="{FF2B5EF4-FFF2-40B4-BE49-F238E27FC236}">
+                <a16:creationId xmlns:a16="http://schemas.microsoft.com/office/drawing/2014/main" id="{CDF720AF-0C41-467F-B2CB-53DB93A419DE}"/>
               </a:ext>
             </a:extLst>
           </p:cNvPr>
@@ -9788,10 +10537,10 @@
       </p:sp>
       <p:sp>
         <p:nvSpPr>
-          <p:cNvPr id="8" name="footer">
-            <a:extLst xmlns:a="http://schemas.openxmlformats.org/drawingml/2006/main">
-              <a:ext uri="{FF2B5EF4-FFF2-40B4-BE49-F238E27FC236}">
-                <a16:creationId xmlns:a16="http://schemas.microsoft.com/office/drawing/2014/main" id="{553814C8-9CF0-4C66-9BDF-1A57C0701F68}"/>
+          <p:cNvPr id="10" name="footer">
+            <a:extLst xmlns:a="http://schemas.openxmlformats.org/drawingml/2006/main">
+              <a:ext uri="{FF2B5EF4-FFF2-40B4-BE49-F238E27FC236}">
+                <a16:creationId xmlns:a16="http://schemas.microsoft.com/office/drawing/2014/main" id="{F5253641-6861-4E44-BA08-67AE82945011}"/>
               </a:ext>
             </a:extLst>
           </p:cNvPr>
@@ -9843,10 +10592,10 @@
       </p:sp>
       <p:sp>
         <p:nvSpPr>
-          <p:cNvPr id="9" name="page-number">
-            <a:extLst xmlns:a="http://schemas.openxmlformats.org/drawingml/2006/main">
-              <a:ext uri="{FF2B5EF4-FFF2-40B4-BE49-F238E27FC236}">
-                <a16:creationId xmlns:a16="http://schemas.microsoft.com/office/drawing/2014/main" id="{2DA29358-2E23-4095-B71E-BCC8486D3F17}"/>
+          <p:cNvPr id="11" name="page-number">
+            <a:extLst xmlns:a="http://schemas.openxmlformats.org/drawingml/2006/main">
+              <a:ext uri="{FF2B5EF4-FFF2-40B4-BE49-F238E27FC236}">
+                <a16:creationId xmlns:a16="http://schemas.microsoft.com/office/drawing/2014/main" id="{26059F57-9E5A-475A-883F-662F20012ACC}"/>
               </a:ext>
             </a:extLst>
           </p:cNvPr>
@@ -9899,7 +10648,7 @@
     </p:spTree>
     <p:extLst>
       <p:ext uri="{BB962C8B-B14F-4D97-AF65-F5344CB8AC3E}">
-        <p14:creationId xmlns:p14="http://schemas.microsoft.com/office/powerpoint/2010/main" val="761234390"/>
+        <p14:creationId xmlns:p14="http://schemas.microsoft.com/office/powerpoint/2010/main" val="987225809"/>
       </p:ext>
     </p:extLst>
   </p:cSld>
@@ -9927,10 +10676,10 @@
       </p:grpSpPr>
       <p:sp>
         <p:nvSpPr>
-          <p:cNvPr id="10" name="hook">
-            <a:extLst xmlns:a="http://schemas.openxmlformats.org/drawingml/2006/main">
-              <a:ext uri="{FF2B5EF4-FFF2-40B4-BE49-F238E27FC236}">
-                <a16:creationId xmlns:a16="http://schemas.microsoft.com/office/drawing/2014/main" id="{AE37DC28-B9EC-420E-B5AC-88F203DBCE8C}"/>
+          <p:cNvPr id="12" name="hook">
+            <a:extLst xmlns:a="http://schemas.openxmlformats.org/drawingml/2006/main">
+              <a:ext uri="{FF2B5EF4-FFF2-40B4-BE49-F238E27FC236}">
+                <a16:creationId xmlns:a16="http://schemas.microsoft.com/office/drawing/2014/main" id="{8EE84B3E-C912-422B-9258-C7357C984879}"/>
               </a:ext>
             </a:extLst>
           </p:cNvPr>
@@ -9981,7 +10730,7 @@
           <p:cNvPr id="2" name="hook-rule">
             <a:extLst xmlns:a="http://schemas.openxmlformats.org/drawingml/2006/main">
               <a:ext uri="{FF2B5EF4-FFF2-40B4-BE49-F238E27FC236}">
-                <a16:creationId xmlns:a16="http://schemas.microsoft.com/office/drawing/2014/main" id="{DDF64EA5-C580-44E2-8C9D-9A2B0E6F81D8}"/>
+                <a16:creationId xmlns:a16="http://schemas.microsoft.com/office/drawing/2014/main" id="{4EE18D65-5BEE-4A71-83FA-6593B913B9F1}"/>
               </a:ext>
             </a:extLst>
           </p:cNvPr>
@@ -10012,7 +10761,7 @@
           <p:cNvPr id="3" name="hook-label">
             <a:extLst xmlns:a="http://schemas.openxmlformats.org/drawingml/2006/main">
               <a:ext uri="{FF2B5EF4-FFF2-40B4-BE49-F238E27FC236}">
-                <a16:creationId xmlns:a16="http://schemas.microsoft.com/office/drawing/2014/main" id="{3A8D7D01-3BBC-46E6-AC02-B2F8647AA0D3}"/>
+                <a16:creationId xmlns:a16="http://schemas.microsoft.com/office/drawing/2014/main" id="{7AA20F5C-351B-40EF-93D7-36E5A4BD79BD}"/>
               </a:ext>
             </a:extLst>
           </p:cNvPr>
@@ -10063,7 +10812,7 @@
           <p:cNvPr id="4" name="diagram-surface">
             <a:extLst xmlns:a="http://schemas.openxmlformats.org/drawingml/2006/main">
               <a:ext uri="{FF2B5EF4-FFF2-40B4-BE49-F238E27FC236}">
-                <a16:creationId xmlns:a16="http://schemas.microsoft.com/office/drawing/2014/main" id="{F9976C9E-6239-484E-9B10-7FD456C29A4E}"/>
+                <a16:creationId xmlns:a16="http://schemas.microsoft.com/office/drawing/2014/main" id="{2D467DD9-CA23-4CDF-BA11-F9ADB950F7C1}"/>
               </a:ext>
             </a:extLst>
           </p:cNvPr>
@@ -10095,14 +10844,14 @@
       </p:sp>
       <p:pic>
         <p:nvPicPr>
-          <p:cNvPr id="16" name="" descr="Diagrama didático autoral que apresenta: Duas tabelas Gold corretas ainda podem responder receita com números diferentes. — A pergunta que guia a aula."/>
+          <p:cNvPr id="19" name="" descr="Diagrama didático autoral que apresenta: Duas tabelas Gold corretas ainda podem responder receita com números diferentes. — A pergunta que guia a aula."/>
           <p:cNvPicPr>
             <a:picLocks xmlns:a="http://schemas.openxmlformats.org/drawingml/2006/main" noChangeAspect="1"/>
           </p:cNvPicPr>
           <p:nvPr/>
         </p:nvPicPr>
         <p:blipFill>
-          <a:blip xmlns:r="http://schemas.openxmlformats.org/officeDocument/2006/relationships" xmlns:a="http://schemas.openxmlformats.org/drawingml/2006/main" r:embed="Rd58adf72332849e5"/>
+          <a:blip xmlns:r="http://schemas.openxmlformats.org/officeDocument/2006/relationships" xmlns:a="http://schemas.openxmlformats.org/drawingml/2006/main" r:embed="R225c1972f53e4a60"/>
           <a:stretch xmlns:a="http://schemas.openxmlformats.org/drawingml/2006/main"/>
         </p:blipFill>
         <p:spPr>
@@ -10120,7 +10869,7 @@
           <p:cNvPr id="6" name="eyebrow">
             <a:extLst xmlns:a="http://schemas.openxmlformats.org/drawingml/2006/main">
               <a:ext uri="{FF2B5EF4-FFF2-40B4-BE49-F238E27FC236}">
-                <a16:creationId xmlns:a16="http://schemas.microsoft.com/office/drawing/2014/main" id="{9D5B26E6-7A5F-41F9-BB01-6239F0E5741F}"/>
+                <a16:creationId xmlns:a16="http://schemas.microsoft.com/office/drawing/2014/main" id="{278004D8-6270-4D12-A442-7D1FB8EB70DC}"/>
               </a:ext>
             </a:extLst>
           </p:cNvPr>
@@ -10168,10 +10917,69 @@
       </p:sp>
       <p:sp>
         <p:nvSpPr>
-          <p:cNvPr id="7" name="footer-rule">
-            <a:extLst xmlns:a="http://schemas.openxmlformats.org/drawingml/2006/main">
-              <a:ext uri="{FF2B5EF4-FFF2-40B4-BE49-F238E27FC236}">
-                <a16:creationId xmlns:a16="http://schemas.microsoft.com/office/drawing/2014/main" id="{537F19D6-3F08-47E5-843E-FF19CACDFB02}"/>
+          <p:cNvPr id="7" name="rescue-point-logo-background">
+            <a:extLst xmlns:a="http://schemas.openxmlformats.org/drawingml/2006/main">
+              <a:ext uri="{FF2B5EF4-FFF2-40B4-BE49-F238E27FC236}">
+                <a16:creationId xmlns:a16="http://schemas.microsoft.com/office/drawing/2014/main" id="{435E95C0-D944-4E3D-93C0-2A00BABE4DE3}"/>
+              </a:ext>
+            </a:extLst>
+          </p:cNvPr>
+          <p:cNvSpPr>
+            <a:spLocks xmlns:a="http://schemas.openxmlformats.org/drawingml/2006/main" noGrp="1"/>
+          </p:cNvSpPr>
+          <p:nvPr/>
+        </p:nvSpPr>
+        <p:spPr>
+          <a:xfrm xmlns:a="http://schemas.openxmlformats.org/drawingml/2006/main">
+            <a:off x="9772650" y="133350"/>
+            <a:ext cx="1733550" cy="457200"/>
+          </a:xfrm>
+          <a:prstGeom xmlns:a="http://schemas.openxmlformats.org/drawingml/2006/main" prst="roundRect">
+            <a:avLst>
+              <a:gd name="adj" fmla="val 16667"/>
+            </a:avLst>
+          </a:prstGeom>
+          <a:solidFill xmlns:a="http://schemas.openxmlformats.org/drawingml/2006/main">
+            <a:srgbClr val="06142E"/>
+          </a:solidFill>
+          <a:ln xmlns:a="http://schemas.openxmlformats.org/drawingml/2006/main" w="9525">
+            <a:solidFill>
+              <a:srgbClr val="1EC5FF">
+                <a:alpha val="33333"/>
+              </a:srgbClr>
+            </a:solidFill>
+            <a:prstDash val="solid"/>
+          </a:ln>
+        </p:spPr>
+      </p:sp>
+      <p:pic>
+        <p:nvPicPr>
+          <p:cNvPr id="22" name="" descr="Diagrama didático autoral que apresenta: Duas tabelas Gold corretas ainda podem responder receita com números diferentes. — A pergunta que guia a aula."/>
+          <p:cNvPicPr>
+            <a:picLocks xmlns:a="http://schemas.openxmlformats.org/drawingml/2006/main" noChangeAspect="1"/>
+          </p:cNvPicPr>
+          <p:nvPr/>
+        </p:nvPicPr>
+        <p:blipFill>
+          <a:blip xmlns:r="http://schemas.openxmlformats.org/officeDocument/2006/relationships" xmlns:a="http://schemas.openxmlformats.org/drawingml/2006/main" r:embed="Rfd81a3064de54c57"/>
+          <a:stretch xmlns:a="http://schemas.openxmlformats.org/drawingml/2006/main"/>
+        </p:blipFill>
+        <p:spPr>
+          <a:xfrm xmlns:a="http://schemas.openxmlformats.org/drawingml/2006/main">
+            <a:off x="9893718" y="209550"/>
+            <a:ext cx="1491414" cy="323850"/>
+          </a:xfrm>
+          <a:prstGeom xmlns:a="http://schemas.openxmlformats.org/drawingml/2006/main" prst="rect">
+            <a:avLst/>
+          </a:prstGeom>
+        </p:spPr>
+      </p:pic>
+      <p:sp>
+        <p:nvSpPr>
+          <p:cNvPr id="9" name="footer-rule">
+            <a:extLst xmlns:a="http://schemas.openxmlformats.org/drawingml/2006/main">
+              <a:ext uri="{FF2B5EF4-FFF2-40B4-BE49-F238E27FC236}">
+                <a16:creationId xmlns:a16="http://schemas.microsoft.com/office/drawing/2014/main" id="{FD9AFA16-B3E8-48DF-B4C4-FA45EFC4CE75}"/>
               </a:ext>
             </a:extLst>
           </p:cNvPr>
@@ -10201,10 +11009,10 @@
       </p:sp>
       <p:sp>
         <p:nvSpPr>
-          <p:cNvPr id="8" name="footer">
-            <a:extLst xmlns:a="http://schemas.openxmlformats.org/drawingml/2006/main">
-              <a:ext uri="{FF2B5EF4-FFF2-40B4-BE49-F238E27FC236}">
-                <a16:creationId xmlns:a16="http://schemas.microsoft.com/office/drawing/2014/main" id="{6FD18E31-5E83-434E-9103-DB7E7C0C3FF7}"/>
+          <p:cNvPr id="10" name="footer">
+            <a:extLst xmlns:a="http://schemas.openxmlformats.org/drawingml/2006/main">
+              <a:ext uri="{FF2B5EF4-FFF2-40B4-BE49-F238E27FC236}">
+                <a16:creationId xmlns:a16="http://schemas.microsoft.com/office/drawing/2014/main" id="{FC379938-532B-4E89-9F4C-C0010A7DF5A8}"/>
               </a:ext>
             </a:extLst>
           </p:cNvPr>
@@ -10256,10 +11064,10 @@
       </p:sp>
       <p:sp>
         <p:nvSpPr>
-          <p:cNvPr id="9" name="page-number">
-            <a:extLst xmlns:a="http://schemas.openxmlformats.org/drawingml/2006/main">
-              <a:ext uri="{FF2B5EF4-FFF2-40B4-BE49-F238E27FC236}">
-                <a16:creationId xmlns:a16="http://schemas.microsoft.com/office/drawing/2014/main" id="{FBBF2893-CD64-4793-A6A4-ECBF9EF8F9B8}"/>
+          <p:cNvPr id="11" name="page-number">
+            <a:extLst xmlns:a="http://schemas.openxmlformats.org/drawingml/2006/main">
+              <a:ext uri="{FF2B5EF4-FFF2-40B4-BE49-F238E27FC236}">
+                <a16:creationId xmlns:a16="http://schemas.microsoft.com/office/drawing/2014/main" id="{5B742CD4-8C9F-4F73-85C2-2F53B9370BE1}"/>
               </a:ext>
             </a:extLst>
           </p:cNvPr>
@@ -10312,7 +11120,7 @@
     </p:spTree>
     <p:extLst>
       <p:ext uri="{BB962C8B-B14F-4D97-AF65-F5344CB8AC3E}">
-        <p14:creationId xmlns:p14="http://schemas.microsoft.com/office/powerpoint/2010/main" val="1217007459"/>
+        <p14:creationId xmlns:p14="http://schemas.microsoft.com/office/powerpoint/2010/main" val="244070389"/>
       </p:ext>
     </p:extLst>
   </p:cSld>
@@ -10340,10 +11148,10 @@
       </p:grpSpPr>
       <p:sp>
         <p:nvSpPr>
-          <p:cNvPr id="8" name="cta-label">
-            <a:extLst xmlns:a="http://schemas.openxmlformats.org/drawingml/2006/main">
-              <a:ext uri="{FF2B5EF4-FFF2-40B4-BE49-F238E27FC236}">
-                <a16:creationId xmlns:a16="http://schemas.microsoft.com/office/drawing/2014/main" id="{9CCC3FF1-D737-4436-AE69-99659ECFDF63}"/>
+          <p:cNvPr id="10" name="cta-label">
+            <a:extLst xmlns:a="http://schemas.openxmlformats.org/drawingml/2006/main">
+              <a:ext uri="{FF2B5EF4-FFF2-40B4-BE49-F238E27FC236}">
+                <a16:creationId xmlns:a16="http://schemas.microsoft.com/office/drawing/2014/main" id="{AFA30C0D-CCC5-4E21-884B-C5CAD8EBDE4F}"/>
               </a:ext>
             </a:extLst>
           </p:cNvPr>
@@ -10394,7 +11202,7 @@
           <p:cNvPr id="2" name="cta">
             <a:extLst xmlns:a="http://schemas.openxmlformats.org/drawingml/2006/main">
               <a:ext uri="{FF2B5EF4-FFF2-40B4-BE49-F238E27FC236}">
-                <a16:creationId xmlns:a16="http://schemas.microsoft.com/office/drawing/2014/main" id="{A6AAC372-4C55-4ACE-AB5A-1A8D63621DE9}"/>
+                <a16:creationId xmlns:a16="http://schemas.microsoft.com/office/drawing/2014/main" id="{ECDD9CE0-D312-4683-A691-D5F8A08920A7}"/>
               </a:ext>
             </a:extLst>
           </p:cNvPr>
@@ -10445,7 +11253,7 @@
           <p:cNvPr id="3" name="cta-meta">
             <a:extLst xmlns:a="http://schemas.openxmlformats.org/drawingml/2006/main">
               <a:ext uri="{FF2B5EF4-FFF2-40B4-BE49-F238E27FC236}">
-                <a16:creationId xmlns:a16="http://schemas.microsoft.com/office/drawing/2014/main" id="{AADB8BD4-937F-4AB2-9DBD-F3B6590D888B}"/>
+                <a16:creationId xmlns:a16="http://schemas.microsoft.com/office/drawing/2014/main" id="{7F6DBD4A-C6DE-447F-9DE6-0A7BAAF06599}"/>
               </a:ext>
             </a:extLst>
           </p:cNvPr>
@@ -10496,7 +11304,7 @@
           <p:cNvPr id="4" name="eyebrow">
             <a:extLst xmlns:a="http://schemas.openxmlformats.org/drawingml/2006/main">
               <a:ext uri="{FF2B5EF4-FFF2-40B4-BE49-F238E27FC236}">
-                <a16:creationId xmlns:a16="http://schemas.microsoft.com/office/drawing/2014/main" id="{89156F0F-C4B0-46BE-A2B6-B40C7F405FAB}"/>
+                <a16:creationId xmlns:a16="http://schemas.microsoft.com/office/drawing/2014/main" id="{88DC8D97-9168-4EAA-8577-0474656BE823}"/>
               </a:ext>
             </a:extLst>
           </p:cNvPr>
@@ -10544,10 +11352,69 @@
       </p:sp>
       <p:sp>
         <p:nvSpPr>
-          <p:cNvPr id="5" name="footer-rule">
-            <a:extLst xmlns:a="http://schemas.openxmlformats.org/drawingml/2006/main">
-              <a:ext uri="{FF2B5EF4-FFF2-40B4-BE49-F238E27FC236}">
-                <a16:creationId xmlns:a16="http://schemas.microsoft.com/office/drawing/2014/main" id="{FA768782-EA25-49DB-BF2F-ABDDBBB05354}"/>
+          <p:cNvPr id="5" name="rescue-point-logo-background">
+            <a:extLst xmlns:a="http://schemas.openxmlformats.org/drawingml/2006/main">
+              <a:ext uri="{FF2B5EF4-FFF2-40B4-BE49-F238E27FC236}">
+                <a16:creationId xmlns:a16="http://schemas.microsoft.com/office/drawing/2014/main" id="{25B3CF81-EA44-4A47-BE43-4988D5B84F22}"/>
+              </a:ext>
+            </a:extLst>
+          </p:cNvPr>
+          <p:cNvSpPr>
+            <a:spLocks xmlns:a="http://schemas.openxmlformats.org/drawingml/2006/main" noGrp="1"/>
+          </p:cNvSpPr>
+          <p:nvPr/>
+        </p:nvSpPr>
+        <p:spPr>
+          <a:xfrm xmlns:a="http://schemas.openxmlformats.org/drawingml/2006/main">
+            <a:off x="9772650" y="133350"/>
+            <a:ext cx="1733550" cy="457200"/>
+          </a:xfrm>
+          <a:prstGeom xmlns:a="http://schemas.openxmlformats.org/drawingml/2006/main" prst="roundRect">
+            <a:avLst>
+              <a:gd name="adj" fmla="val 16667"/>
+            </a:avLst>
+          </a:prstGeom>
+          <a:solidFill xmlns:a="http://schemas.openxmlformats.org/drawingml/2006/main">
+            <a:srgbClr val="06142E"/>
+          </a:solidFill>
+          <a:ln xmlns:a="http://schemas.openxmlformats.org/drawingml/2006/main" w="9525">
+            <a:solidFill>
+              <a:srgbClr val="1EC5FF">
+                <a:alpha val="33333"/>
+              </a:srgbClr>
+            </a:solidFill>
+            <a:prstDash val="solid"/>
+          </a:ln>
+        </p:spPr>
+      </p:sp>
+      <p:pic>
+        <p:nvPicPr>
+          <p:cNvPr id="17" name="" descr="Figura oficial da documentação dbt usada para explicar: PRÓXIMO PASSO — Documente nome, pergunta, grão, filtro, data e owner de três métricas.."/>
+          <p:cNvPicPr>
+            <a:picLocks xmlns:a="http://schemas.openxmlformats.org/drawingml/2006/main" noChangeAspect="1"/>
+          </p:cNvPicPr>
+          <p:nvPr/>
+        </p:nvPicPr>
+        <p:blipFill>
+          <a:blip xmlns:r="http://schemas.openxmlformats.org/officeDocument/2006/relationships" xmlns:a="http://schemas.openxmlformats.org/drawingml/2006/main" r:embed="R33867f3eee0848ef"/>
+          <a:stretch xmlns:a="http://schemas.openxmlformats.org/drawingml/2006/main"/>
+        </p:blipFill>
+        <p:spPr>
+          <a:xfrm xmlns:a="http://schemas.openxmlformats.org/drawingml/2006/main">
+            <a:off x="9893718" y="209550"/>
+            <a:ext cx="1491414" cy="323850"/>
+          </a:xfrm>
+          <a:prstGeom xmlns:a="http://schemas.openxmlformats.org/drawingml/2006/main" prst="rect">
+            <a:avLst/>
+          </a:prstGeom>
+        </p:spPr>
+      </p:pic>
+      <p:sp>
+        <p:nvSpPr>
+          <p:cNvPr id="7" name="footer-rule">
+            <a:extLst xmlns:a="http://schemas.openxmlformats.org/drawingml/2006/main">
+              <a:ext uri="{FF2B5EF4-FFF2-40B4-BE49-F238E27FC236}">
+                <a16:creationId xmlns:a16="http://schemas.microsoft.com/office/drawing/2014/main" id="{87BF253B-B9DC-4730-86CD-902711AE6482}"/>
               </a:ext>
             </a:extLst>
           </p:cNvPr>
@@ -10577,10 +11444,10 @@
       </p:sp>
       <p:sp>
         <p:nvSpPr>
-          <p:cNvPr id="6" name="footer">
-            <a:extLst xmlns:a="http://schemas.openxmlformats.org/drawingml/2006/main">
-              <a:ext uri="{FF2B5EF4-FFF2-40B4-BE49-F238E27FC236}">
-                <a16:creationId xmlns:a16="http://schemas.microsoft.com/office/drawing/2014/main" id="{93C58774-D324-4F77-A712-7E4A7DD8CC3B}"/>
+          <p:cNvPr id="8" name="footer">
+            <a:extLst xmlns:a="http://schemas.openxmlformats.org/drawingml/2006/main">
+              <a:ext uri="{FF2B5EF4-FFF2-40B4-BE49-F238E27FC236}">
+                <a16:creationId xmlns:a16="http://schemas.microsoft.com/office/drawing/2014/main" id="{66FBC75C-EC2F-4520-A7C0-82BA11F72158}"/>
               </a:ext>
             </a:extLst>
           </p:cNvPr>
@@ -10632,10 +11499,10 @@
       </p:sp>
       <p:sp>
         <p:nvSpPr>
-          <p:cNvPr id="7" name="page-number">
-            <a:extLst xmlns:a="http://schemas.openxmlformats.org/drawingml/2006/main">
-              <a:ext uri="{FF2B5EF4-FFF2-40B4-BE49-F238E27FC236}">
-                <a16:creationId xmlns:a16="http://schemas.microsoft.com/office/drawing/2014/main" id="{582A6A5C-6A74-479B-BC0C-B731BC83F5F6}"/>
+          <p:cNvPr id="9" name="page-number">
+            <a:extLst xmlns:a="http://schemas.openxmlformats.org/drawingml/2006/main">
+              <a:ext uri="{FF2B5EF4-FFF2-40B4-BE49-F238E27FC236}">
+                <a16:creationId xmlns:a16="http://schemas.microsoft.com/office/drawing/2014/main" id="{8F7CE6E9-62E7-4785-8EC6-88BB2FA06328}"/>
               </a:ext>
             </a:extLst>
           </p:cNvPr>
@@ -10688,7 +11555,7 @@
     </p:spTree>
     <p:extLst>
       <p:ext uri="{BB962C8B-B14F-4D97-AF65-F5344CB8AC3E}">
-        <p14:creationId xmlns:p14="http://schemas.microsoft.com/office/powerpoint/2010/main" val="62123620"/>
+        <p14:creationId xmlns:p14="http://schemas.microsoft.com/office/powerpoint/2010/main" val="1029796573"/>
       </p:ext>
     </p:extLst>
   </p:cSld>
@@ -10724,10 +11591,10 @@
       </p:grpSpPr>
       <p:sp>
         <p:nvSpPr>
-          <p:cNvPr id="14" name="slide-title">
-            <a:extLst xmlns:a="http://schemas.openxmlformats.org/drawingml/2006/main">
-              <a:ext uri="{FF2B5EF4-FFF2-40B4-BE49-F238E27FC236}">
-                <a16:creationId xmlns:a16="http://schemas.microsoft.com/office/drawing/2014/main" id="{602C04DF-3153-4A98-8C4B-D26D36B80558}"/>
+          <p:cNvPr id="16" name="slide-title">
+            <a:extLst xmlns:a="http://schemas.openxmlformats.org/drawingml/2006/main">
+              <a:ext uri="{FF2B5EF4-FFF2-40B4-BE49-F238E27FC236}">
+                <a16:creationId xmlns:a16="http://schemas.microsoft.com/office/drawing/2014/main" id="{7AEC9645-94A7-40B1-81B9-67E52212D590}"/>
               </a:ext>
             </a:extLst>
           </p:cNvPr>
@@ -10778,7 +11645,7 @@
           <p:cNvPr id="2" name="step-num-1">
             <a:extLst xmlns:a="http://schemas.openxmlformats.org/drawingml/2006/main">
               <a:ext uri="{FF2B5EF4-FFF2-40B4-BE49-F238E27FC236}">
-                <a16:creationId xmlns:a16="http://schemas.microsoft.com/office/drawing/2014/main" id="{F104F685-C418-4AEB-9FC5-B92A693C1226}"/>
+                <a16:creationId xmlns:a16="http://schemas.microsoft.com/office/drawing/2014/main" id="{9BFDCD9E-3A14-4268-A9E6-AA2746156409}"/>
               </a:ext>
             </a:extLst>
           </p:cNvPr>
@@ -10829,7 +11696,7 @@
           <p:cNvPr id="3" name="step-label-1">
             <a:extLst xmlns:a="http://schemas.openxmlformats.org/drawingml/2006/main">
               <a:ext uri="{FF2B5EF4-FFF2-40B4-BE49-F238E27FC236}">
-                <a16:creationId xmlns:a16="http://schemas.microsoft.com/office/drawing/2014/main" id="{A10340FE-7D2D-4102-9424-9CC52287CFC8}"/>
+                <a16:creationId xmlns:a16="http://schemas.microsoft.com/office/drawing/2014/main" id="{FC421406-0BCD-47EE-9551-AB398D8834DE}"/>
               </a:ext>
             </a:extLst>
           </p:cNvPr>
@@ -10880,7 +11747,7 @@
           <p:cNvPr id="4" name="step-line-1">
             <a:extLst xmlns:a="http://schemas.openxmlformats.org/drawingml/2006/main">
               <a:ext uri="{FF2B5EF4-FFF2-40B4-BE49-F238E27FC236}">
-                <a16:creationId xmlns:a16="http://schemas.microsoft.com/office/drawing/2014/main" id="{06444E58-104F-4AAF-AFCF-C446B56D351C}"/>
+                <a16:creationId xmlns:a16="http://schemas.microsoft.com/office/drawing/2014/main" id="{C11CABCD-85B1-4A83-8B28-401782708F8A}"/>
               </a:ext>
             </a:extLst>
           </p:cNvPr>
@@ -10911,7 +11778,7 @@
           <p:cNvPr id="5" name="step-num-2">
             <a:extLst xmlns:a="http://schemas.openxmlformats.org/drawingml/2006/main">
               <a:ext uri="{FF2B5EF4-FFF2-40B4-BE49-F238E27FC236}">
-                <a16:creationId xmlns:a16="http://schemas.microsoft.com/office/drawing/2014/main" id="{F91EFBD5-FDDB-43C0-92B5-D2C772690674}"/>
+                <a16:creationId xmlns:a16="http://schemas.microsoft.com/office/drawing/2014/main" id="{0F769D9E-D0A6-46B3-A8C9-02BE492C3467}"/>
               </a:ext>
             </a:extLst>
           </p:cNvPr>
@@ -10962,7 +11829,7 @@
           <p:cNvPr id="6" name="step-label-2">
             <a:extLst xmlns:a="http://schemas.openxmlformats.org/drawingml/2006/main">
               <a:ext uri="{FF2B5EF4-FFF2-40B4-BE49-F238E27FC236}">
-                <a16:creationId xmlns:a16="http://schemas.microsoft.com/office/drawing/2014/main" id="{718E837D-E0EB-407B-9513-CB11BE179C1F}"/>
+                <a16:creationId xmlns:a16="http://schemas.microsoft.com/office/drawing/2014/main" id="{3978E13D-DC77-4E7D-B8D6-7828FC28C5B0}"/>
               </a:ext>
             </a:extLst>
           </p:cNvPr>
@@ -11013,7 +11880,7 @@
           <p:cNvPr id="7" name="step-line-2">
             <a:extLst xmlns:a="http://schemas.openxmlformats.org/drawingml/2006/main">
               <a:ext uri="{FF2B5EF4-FFF2-40B4-BE49-F238E27FC236}">
-                <a16:creationId xmlns:a16="http://schemas.microsoft.com/office/drawing/2014/main" id="{0705502A-6A0D-4076-B9AC-7BABCC2F7A19}"/>
+                <a16:creationId xmlns:a16="http://schemas.microsoft.com/office/drawing/2014/main" id="{68FC1021-B553-4B09-B64E-4FE855C811EA}"/>
               </a:ext>
             </a:extLst>
           </p:cNvPr>
@@ -11044,7 +11911,7 @@
           <p:cNvPr id="8" name="step-num-3">
             <a:extLst xmlns:a="http://schemas.openxmlformats.org/drawingml/2006/main">
               <a:ext uri="{FF2B5EF4-FFF2-40B4-BE49-F238E27FC236}">
-                <a16:creationId xmlns:a16="http://schemas.microsoft.com/office/drawing/2014/main" id="{6924E2BA-69B2-4331-AB80-B157718DB86A}"/>
+                <a16:creationId xmlns:a16="http://schemas.microsoft.com/office/drawing/2014/main" id="{9C08F32A-149F-4781-B408-C12342472205}"/>
               </a:ext>
             </a:extLst>
           </p:cNvPr>
@@ -11095,7 +11962,7 @@
           <p:cNvPr id="9" name="step-label-3">
             <a:extLst xmlns:a="http://schemas.openxmlformats.org/drawingml/2006/main">
               <a:ext uri="{FF2B5EF4-FFF2-40B4-BE49-F238E27FC236}">
-                <a16:creationId xmlns:a16="http://schemas.microsoft.com/office/drawing/2014/main" id="{3013BBCD-A69D-43BA-871E-64B107C2EE61}"/>
+                <a16:creationId xmlns:a16="http://schemas.microsoft.com/office/drawing/2014/main" id="{2A543E5F-D2A9-4011-88BD-39D600CAB7AC}"/>
               </a:ext>
             </a:extLst>
           </p:cNvPr>
@@ -11146,7 +12013,7 @@
           <p:cNvPr id="10" name="eyebrow">
             <a:extLst xmlns:a="http://schemas.openxmlformats.org/drawingml/2006/main">
               <a:ext uri="{FF2B5EF4-FFF2-40B4-BE49-F238E27FC236}">
-                <a16:creationId xmlns:a16="http://schemas.microsoft.com/office/drawing/2014/main" id="{AA920842-CA9F-4767-8F1B-37F78EFB21A1}"/>
+                <a16:creationId xmlns:a16="http://schemas.microsoft.com/office/drawing/2014/main" id="{3949561B-1719-48F3-B04E-EFC5131E3186}"/>
               </a:ext>
             </a:extLst>
           </p:cNvPr>
@@ -11194,10 +12061,69 @@
       </p:sp>
       <p:sp>
         <p:nvSpPr>
-          <p:cNvPr id="11" name="footer-rule">
-            <a:extLst xmlns:a="http://schemas.openxmlformats.org/drawingml/2006/main">
-              <a:ext uri="{FF2B5EF4-FFF2-40B4-BE49-F238E27FC236}">
-                <a16:creationId xmlns:a16="http://schemas.microsoft.com/office/drawing/2014/main" id="{1551812F-A7B8-4327-B985-00E4FDC6BB2A}"/>
+          <p:cNvPr id="11" name="rescue-point-logo-background">
+            <a:extLst xmlns:a="http://schemas.openxmlformats.org/drawingml/2006/main">
+              <a:ext uri="{FF2B5EF4-FFF2-40B4-BE49-F238E27FC236}">
+                <a16:creationId xmlns:a16="http://schemas.microsoft.com/office/drawing/2014/main" id="{AACC7A3D-6775-4821-80BA-5D97D34E4B41}"/>
+              </a:ext>
+            </a:extLst>
+          </p:cNvPr>
+          <p:cNvSpPr>
+            <a:spLocks xmlns:a="http://schemas.openxmlformats.org/drawingml/2006/main" noGrp="1"/>
+          </p:cNvSpPr>
+          <p:nvPr/>
+        </p:nvSpPr>
+        <p:spPr>
+          <a:xfrm xmlns:a="http://schemas.openxmlformats.org/drawingml/2006/main">
+            <a:off x="9772650" y="133350"/>
+            <a:ext cx="1733550" cy="457200"/>
+          </a:xfrm>
+          <a:prstGeom xmlns:a="http://schemas.openxmlformats.org/drawingml/2006/main" prst="roundRect">
+            <a:avLst>
+              <a:gd name="adj" fmla="val 16667"/>
+            </a:avLst>
+          </a:prstGeom>
+          <a:solidFill xmlns:a="http://schemas.openxmlformats.org/drawingml/2006/main">
+            <a:srgbClr val="06142E"/>
+          </a:solidFill>
+          <a:ln xmlns:a="http://schemas.openxmlformats.org/drawingml/2006/main" w="9525">
+            <a:solidFill>
+              <a:srgbClr val="1EC5FF">
+                <a:alpha val="33333"/>
+              </a:srgbClr>
+            </a:solidFill>
+            <a:prstDash val="solid"/>
+          </a:ln>
+        </p:spPr>
+      </p:sp>
+      <p:pic>
+        <p:nvPicPr>
+          <p:cNvPr id="29" name="" descr="Figura oficial da documentação dbt usada para explicar: Ao final, você consegue... — 01."/>
+          <p:cNvPicPr>
+            <a:picLocks xmlns:a="http://schemas.openxmlformats.org/drawingml/2006/main" noChangeAspect="1"/>
+          </p:cNvPicPr>
+          <p:nvPr/>
+        </p:nvPicPr>
+        <p:blipFill>
+          <a:blip xmlns:r="http://schemas.openxmlformats.org/officeDocument/2006/relationships" xmlns:a="http://schemas.openxmlformats.org/drawingml/2006/main" r:embed="Rf1419102319c42c4"/>
+          <a:stretch xmlns:a="http://schemas.openxmlformats.org/drawingml/2006/main"/>
+        </p:blipFill>
+        <p:spPr>
+          <a:xfrm xmlns:a="http://schemas.openxmlformats.org/drawingml/2006/main">
+            <a:off x="9893718" y="209550"/>
+            <a:ext cx="1491414" cy="323850"/>
+          </a:xfrm>
+          <a:prstGeom xmlns:a="http://schemas.openxmlformats.org/drawingml/2006/main" prst="rect">
+            <a:avLst/>
+          </a:prstGeom>
+        </p:spPr>
+      </p:pic>
+      <p:sp>
+        <p:nvSpPr>
+          <p:cNvPr id="13" name="footer-rule">
+            <a:extLst xmlns:a="http://schemas.openxmlformats.org/drawingml/2006/main">
+              <a:ext uri="{FF2B5EF4-FFF2-40B4-BE49-F238E27FC236}">
+                <a16:creationId xmlns:a16="http://schemas.microsoft.com/office/drawing/2014/main" id="{75C2D201-1E2C-477D-A274-2326888992E7}"/>
               </a:ext>
             </a:extLst>
           </p:cNvPr>
@@ -11227,10 +12153,10 @@
       </p:sp>
       <p:sp>
         <p:nvSpPr>
-          <p:cNvPr id="12" name="footer">
-            <a:extLst xmlns:a="http://schemas.openxmlformats.org/drawingml/2006/main">
-              <a:ext uri="{FF2B5EF4-FFF2-40B4-BE49-F238E27FC236}">
-                <a16:creationId xmlns:a16="http://schemas.microsoft.com/office/drawing/2014/main" id="{74E51114-FA59-4C4D-BC49-A6A07DC27E2E}"/>
+          <p:cNvPr id="14" name="footer">
+            <a:extLst xmlns:a="http://schemas.openxmlformats.org/drawingml/2006/main">
+              <a:ext uri="{FF2B5EF4-FFF2-40B4-BE49-F238E27FC236}">
+                <a16:creationId xmlns:a16="http://schemas.microsoft.com/office/drawing/2014/main" id="{939D9186-524A-4739-827A-AC477648F555}"/>
               </a:ext>
             </a:extLst>
           </p:cNvPr>
@@ -11282,10 +12208,10 @@
       </p:sp>
       <p:sp>
         <p:nvSpPr>
-          <p:cNvPr id="13" name="page-number">
-            <a:extLst xmlns:a="http://schemas.openxmlformats.org/drawingml/2006/main">
-              <a:ext uri="{FF2B5EF4-FFF2-40B4-BE49-F238E27FC236}">
-                <a16:creationId xmlns:a16="http://schemas.microsoft.com/office/drawing/2014/main" id="{4A042300-A71E-421E-B5E6-C9F3A00B03ED}"/>
+          <p:cNvPr id="15" name="page-number">
+            <a:extLst xmlns:a="http://schemas.openxmlformats.org/drawingml/2006/main">
+              <a:ext uri="{FF2B5EF4-FFF2-40B4-BE49-F238E27FC236}">
+                <a16:creationId xmlns:a16="http://schemas.microsoft.com/office/drawing/2014/main" id="{9EBF8255-2E2D-4E01-8899-E594F2EF195D}"/>
               </a:ext>
             </a:extLst>
           </p:cNvPr>
@@ -11338,7 +12264,7 @@
     </p:spTree>
     <p:extLst>
       <p:ext uri="{BB962C8B-B14F-4D97-AF65-F5344CB8AC3E}">
-        <p14:creationId xmlns:p14="http://schemas.microsoft.com/office/powerpoint/2010/main" val="1098638317"/>
+        <p14:creationId xmlns:p14="http://schemas.microsoft.com/office/powerpoint/2010/main" val="1700884134"/>
       </p:ext>
     </p:extLst>
   </p:cSld>
@@ -11374,10 +12300,10 @@
       </p:grpSpPr>
       <p:sp>
         <p:nvSpPr>
-          <p:cNvPr id="11" name="slide-title">
-            <a:extLst xmlns:a="http://schemas.openxmlformats.org/drawingml/2006/main">
-              <a:ext uri="{FF2B5EF4-FFF2-40B4-BE49-F238E27FC236}">
-                <a16:creationId xmlns:a16="http://schemas.microsoft.com/office/drawing/2014/main" id="{87620293-2F50-4584-933A-6DC15B1DF8D0}"/>
+          <p:cNvPr id="13" name="slide-title">
+            <a:extLst xmlns:a="http://schemas.openxmlformats.org/drawingml/2006/main">
+              <a:ext uri="{FF2B5EF4-FFF2-40B4-BE49-F238E27FC236}">
+                <a16:creationId xmlns:a16="http://schemas.microsoft.com/office/drawing/2014/main" id="{16F482CC-C396-4509-B80A-04AC9217C4C6}"/>
               </a:ext>
             </a:extLst>
           </p:cNvPr>
@@ -11428,7 +12354,7 @@
           <p:cNvPr id="2" name="slide-subtitle">
             <a:extLst xmlns:a="http://schemas.openxmlformats.org/drawingml/2006/main">
               <a:ext uri="{FF2B5EF4-FFF2-40B4-BE49-F238E27FC236}">
-                <a16:creationId xmlns:a16="http://schemas.microsoft.com/office/drawing/2014/main" id="{CF2BC4CA-0F97-4A07-AA40-1E527DA857A8}"/>
+                <a16:creationId xmlns:a16="http://schemas.microsoft.com/office/drawing/2014/main" id="{BF5FFDBE-2AA3-4620-812E-0521624DDF4F}"/>
               </a:ext>
             </a:extLst>
           </p:cNvPr>
@@ -11479,7 +12405,7 @@
           <p:cNvPr id="3" name="bullets">
             <a:extLst xmlns:a="http://schemas.openxmlformats.org/drawingml/2006/main">
               <a:ext uri="{FF2B5EF4-FFF2-40B4-BE49-F238E27FC236}">
-                <a16:creationId xmlns:a16="http://schemas.microsoft.com/office/drawing/2014/main" id="{93E20AF9-250C-4F42-BF76-6F6DF9581AF3}"/>
+                <a16:creationId xmlns:a16="http://schemas.microsoft.com/office/drawing/2014/main" id="{0FAAF33A-4BB7-4B74-9DA8-8A42471ECF9C}"/>
               </a:ext>
             </a:extLst>
           </p:cNvPr>
@@ -11566,7 +12492,7 @@
           <p:cNvPr id="4" name="ambient-glow">
             <a:extLst xmlns:a="http://schemas.openxmlformats.org/drawingml/2006/main">
               <a:ext uri="{FF2B5EF4-FFF2-40B4-BE49-F238E27FC236}">
-                <a16:creationId xmlns:a16="http://schemas.microsoft.com/office/drawing/2014/main" id="{CC7AF6F8-1F77-4C51-835F-4AAE2152734C}"/>
+                <a16:creationId xmlns:a16="http://schemas.microsoft.com/office/drawing/2014/main" id="{C0AF8920-64A6-4294-9D96-212446497E57}"/>
               </a:ext>
             </a:extLst>
           </p:cNvPr>
@@ -11603,7 +12529,7 @@
           <p:cNvPr id="5" name="ambient-core">
             <a:extLst xmlns:a="http://schemas.openxmlformats.org/drawingml/2006/main">
               <a:ext uri="{FF2B5EF4-FFF2-40B4-BE49-F238E27FC236}">
-                <a16:creationId xmlns:a16="http://schemas.microsoft.com/office/drawing/2014/main" id="{F1F24F38-6998-4ACC-A56A-3CB99BC5B691}"/>
+                <a16:creationId xmlns:a16="http://schemas.microsoft.com/office/drawing/2014/main" id="{FB76AEFC-25B0-4818-93EA-6BD283B9DDB6}"/>
               </a:ext>
             </a:extLst>
           </p:cNvPr>
@@ -11640,7 +12566,7 @@
           <p:cNvPr id="6" name="section-number">
             <a:extLst xmlns:a="http://schemas.openxmlformats.org/drawingml/2006/main">
               <a:ext uri="{FF2B5EF4-FFF2-40B4-BE49-F238E27FC236}">
-                <a16:creationId xmlns:a16="http://schemas.microsoft.com/office/drawing/2014/main" id="{6342AF27-A933-4D4E-B56C-9CE45E75A4C9}"/>
+                <a16:creationId xmlns:a16="http://schemas.microsoft.com/office/drawing/2014/main" id="{F8AFC875-0DB7-4E55-9385-003BD1BE9CD6}"/>
               </a:ext>
             </a:extLst>
           </p:cNvPr>
@@ -11691,7 +12617,7 @@
           <p:cNvPr id="7" name="eyebrow">
             <a:extLst xmlns:a="http://schemas.openxmlformats.org/drawingml/2006/main">
               <a:ext uri="{FF2B5EF4-FFF2-40B4-BE49-F238E27FC236}">
-                <a16:creationId xmlns:a16="http://schemas.microsoft.com/office/drawing/2014/main" id="{29799D6A-CF0A-4F20-BB56-E056201237FD}"/>
+                <a16:creationId xmlns:a16="http://schemas.microsoft.com/office/drawing/2014/main" id="{3BFE30E2-7AC5-48B8-B2FA-E3A97AB9F0F0}"/>
               </a:ext>
             </a:extLst>
           </p:cNvPr>
@@ -11739,10 +12665,69 @@
       </p:sp>
       <p:sp>
         <p:nvSpPr>
-          <p:cNvPr id="8" name="footer-rule">
-            <a:extLst xmlns:a="http://schemas.openxmlformats.org/drawingml/2006/main">
-              <a:ext uri="{FF2B5EF4-FFF2-40B4-BE49-F238E27FC236}">
-                <a16:creationId xmlns:a16="http://schemas.microsoft.com/office/drawing/2014/main" id="{B311BB7C-5D7D-4203-B63F-773EF9D5EEB6}"/>
+          <p:cNvPr id="8" name="rescue-point-logo-background">
+            <a:extLst xmlns:a="http://schemas.openxmlformats.org/drawingml/2006/main">
+              <a:ext uri="{FF2B5EF4-FFF2-40B4-BE49-F238E27FC236}">
+                <a16:creationId xmlns:a16="http://schemas.microsoft.com/office/drawing/2014/main" id="{1A228BE2-BD53-4720-B6E3-A6BABAC3CEDC}"/>
+              </a:ext>
+            </a:extLst>
+          </p:cNvPr>
+          <p:cNvSpPr>
+            <a:spLocks xmlns:a="http://schemas.openxmlformats.org/drawingml/2006/main" noGrp="1"/>
+          </p:cNvSpPr>
+          <p:nvPr/>
+        </p:nvSpPr>
+        <p:spPr>
+          <a:xfrm xmlns:a="http://schemas.openxmlformats.org/drawingml/2006/main">
+            <a:off x="9772650" y="133350"/>
+            <a:ext cx="1733550" cy="457200"/>
+          </a:xfrm>
+          <a:prstGeom xmlns:a="http://schemas.openxmlformats.org/drawingml/2006/main" prst="roundRect">
+            <a:avLst>
+              <a:gd name="adj" fmla="val 16667"/>
+            </a:avLst>
+          </a:prstGeom>
+          <a:solidFill xmlns:a="http://schemas.openxmlformats.org/drawingml/2006/main">
+            <a:srgbClr val="06142E"/>
+          </a:solidFill>
+          <a:ln xmlns:a="http://schemas.openxmlformats.org/drawingml/2006/main" w="9525">
+            <a:solidFill>
+              <a:srgbClr val="1EC5FF">
+                <a:alpha val="33333"/>
+              </a:srgbClr>
+            </a:solidFill>
+            <a:prstDash val="solid"/>
+          </a:ln>
+        </p:spPr>
+      </p:sp>
+      <p:pic>
+        <p:nvPicPr>
+          <p:cNvPr id="23" name="" descr="Figura oficial da documentação dbt usada para explicar: Quatro perguntas revelam a interface ausente — Grão, filtro, data e chave não podem ficar só na cabeça do autor.."/>
+          <p:cNvPicPr>
+            <a:picLocks xmlns:a="http://schemas.openxmlformats.org/drawingml/2006/main" noChangeAspect="1"/>
+          </p:cNvPicPr>
+          <p:nvPr/>
+        </p:nvPicPr>
+        <p:blipFill>
+          <a:blip xmlns:r="http://schemas.openxmlformats.org/officeDocument/2006/relationships" xmlns:a="http://schemas.openxmlformats.org/drawingml/2006/main" r:embed="Rd611cdb934124d3e"/>
+          <a:stretch xmlns:a="http://schemas.openxmlformats.org/drawingml/2006/main"/>
+        </p:blipFill>
+        <p:spPr>
+          <a:xfrm xmlns:a="http://schemas.openxmlformats.org/drawingml/2006/main">
+            <a:off x="9893718" y="209550"/>
+            <a:ext cx="1491414" cy="323850"/>
+          </a:xfrm>
+          <a:prstGeom xmlns:a="http://schemas.openxmlformats.org/drawingml/2006/main" prst="rect">
+            <a:avLst/>
+          </a:prstGeom>
+        </p:spPr>
+      </p:pic>
+      <p:sp>
+        <p:nvSpPr>
+          <p:cNvPr id="10" name="footer-rule">
+            <a:extLst xmlns:a="http://schemas.openxmlformats.org/drawingml/2006/main">
+              <a:ext uri="{FF2B5EF4-FFF2-40B4-BE49-F238E27FC236}">
+                <a16:creationId xmlns:a16="http://schemas.microsoft.com/office/drawing/2014/main" id="{2B2678EA-39DA-4F62-9E54-0A4707177C03}"/>
               </a:ext>
             </a:extLst>
           </p:cNvPr>
@@ -11772,10 +12757,10 @@
       </p:sp>
       <p:sp>
         <p:nvSpPr>
-          <p:cNvPr id="9" name="footer">
-            <a:extLst xmlns:a="http://schemas.openxmlformats.org/drawingml/2006/main">
-              <a:ext uri="{FF2B5EF4-FFF2-40B4-BE49-F238E27FC236}">
-                <a16:creationId xmlns:a16="http://schemas.microsoft.com/office/drawing/2014/main" id="{D4A53EC4-8C64-48A7-B0EC-FE5AAF7E3D8B}"/>
+          <p:cNvPr id="11" name="footer">
+            <a:extLst xmlns:a="http://schemas.openxmlformats.org/drawingml/2006/main">
+              <a:ext uri="{FF2B5EF4-FFF2-40B4-BE49-F238E27FC236}">
+                <a16:creationId xmlns:a16="http://schemas.microsoft.com/office/drawing/2014/main" id="{6CD13C7F-E6EE-4A29-9965-35E7B80113C0}"/>
               </a:ext>
             </a:extLst>
           </p:cNvPr>
@@ -11827,10 +12812,10 @@
       </p:sp>
       <p:sp>
         <p:nvSpPr>
-          <p:cNvPr id="10" name="page-number">
-            <a:extLst xmlns:a="http://schemas.openxmlformats.org/drawingml/2006/main">
-              <a:ext uri="{FF2B5EF4-FFF2-40B4-BE49-F238E27FC236}">
-                <a16:creationId xmlns:a16="http://schemas.microsoft.com/office/drawing/2014/main" id="{D9198A5B-CC85-4050-8785-89E1BA586077}"/>
+          <p:cNvPr id="12" name="page-number">
+            <a:extLst xmlns:a="http://schemas.openxmlformats.org/drawingml/2006/main">
+              <a:ext uri="{FF2B5EF4-FFF2-40B4-BE49-F238E27FC236}">
+                <a16:creationId xmlns:a16="http://schemas.microsoft.com/office/drawing/2014/main" id="{F7D5B2D1-9EE7-448F-8E00-85D38A9F43A9}"/>
               </a:ext>
             </a:extLst>
           </p:cNvPr>
@@ -11883,7 +12868,7 @@
     </p:spTree>
     <p:extLst>
       <p:ext uri="{BB962C8B-B14F-4D97-AF65-F5344CB8AC3E}">
-        <p14:creationId xmlns:p14="http://schemas.microsoft.com/office/powerpoint/2010/main" val="1182829726"/>
+        <p14:creationId xmlns:p14="http://schemas.microsoft.com/office/powerpoint/2010/main" val="1847250443"/>
       </p:ext>
     </p:extLst>
   </p:cSld>
@@ -11911,10 +12896,10 @@
       </p:grpSpPr>
       <p:sp>
         <p:nvSpPr>
-          <p:cNvPr id="11" name="slide-title">
-            <a:extLst xmlns:a="http://schemas.openxmlformats.org/drawingml/2006/main">
-              <a:ext uri="{FF2B5EF4-FFF2-40B4-BE49-F238E27FC236}">
-                <a16:creationId xmlns:a16="http://schemas.microsoft.com/office/drawing/2014/main" id="{741E86DD-E906-4083-B4E3-955F9CB5ED6E}"/>
+          <p:cNvPr id="13" name="slide-title">
+            <a:extLst xmlns:a="http://schemas.openxmlformats.org/drawingml/2006/main">
+              <a:ext uri="{FF2B5EF4-FFF2-40B4-BE49-F238E27FC236}">
+                <a16:creationId xmlns:a16="http://schemas.microsoft.com/office/drawing/2014/main" id="{A6A23BC5-2C45-4B36-8CF4-E8095FCDD04E}"/>
               </a:ext>
             </a:extLst>
           </p:cNvPr>
@@ -11965,7 +12950,7 @@
           <p:cNvPr id="2" name="slide-subtitle">
             <a:extLst xmlns:a="http://schemas.openxmlformats.org/drawingml/2006/main">
               <a:ext uri="{FF2B5EF4-FFF2-40B4-BE49-F238E27FC236}">
-                <a16:creationId xmlns:a16="http://schemas.microsoft.com/office/drawing/2014/main" id="{68957261-E54A-4D64-A90B-30D5970CC28A}"/>
+                <a16:creationId xmlns:a16="http://schemas.microsoft.com/office/drawing/2014/main" id="{4342A5C6-9E27-444F-9950-2F99452C682B}"/>
               </a:ext>
             </a:extLst>
           </p:cNvPr>
@@ -12016,7 +13001,7 @@
           <p:cNvPr id="3" name="bullets">
             <a:extLst xmlns:a="http://schemas.openxmlformats.org/drawingml/2006/main">
               <a:ext uri="{FF2B5EF4-FFF2-40B4-BE49-F238E27FC236}">
-                <a16:creationId xmlns:a16="http://schemas.microsoft.com/office/drawing/2014/main" id="{DF0302C0-1CCF-44CE-8505-1E31B0D2581C}"/>
+                <a16:creationId xmlns:a16="http://schemas.microsoft.com/office/drawing/2014/main" id="{19787EEF-1E3B-4C5A-8FBA-C660A0CB1FCF}"/>
               </a:ext>
             </a:extLst>
           </p:cNvPr>
@@ -12121,7 +13106,7 @@
           <p:cNvPr id="4" name="ambient-glow">
             <a:extLst xmlns:a="http://schemas.openxmlformats.org/drawingml/2006/main">
               <a:ext uri="{FF2B5EF4-FFF2-40B4-BE49-F238E27FC236}">
-                <a16:creationId xmlns:a16="http://schemas.microsoft.com/office/drawing/2014/main" id="{D2C1A3E7-BE67-492D-907D-58559B1555DD}"/>
+                <a16:creationId xmlns:a16="http://schemas.microsoft.com/office/drawing/2014/main" id="{0A82AD00-619B-40DE-8FB4-7637FD3ADB5F}"/>
               </a:ext>
             </a:extLst>
           </p:cNvPr>
@@ -12158,7 +13143,7 @@
           <p:cNvPr id="5" name="ambient-core">
             <a:extLst xmlns:a="http://schemas.openxmlformats.org/drawingml/2006/main">
               <a:ext uri="{FF2B5EF4-FFF2-40B4-BE49-F238E27FC236}">
-                <a16:creationId xmlns:a16="http://schemas.microsoft.com/office/drawing/2014/main" id="{BC09D711-76F3-4BF4-8F89-3C932D55B1BB}"/>
+                <a16:creationId xmlns:a16="http://schemas.microsoft.com/office/drawing/2014/main" id="{2FA2BD59-7E72-4A7C-95FC-159FA14B2908}"/>
               </a:ext>
             </a:extLst>
           </p:cNvPr>
@@ -12195,7 +13180,7 @@
           <p:cNvPr id="6" name="section-number">
             <a:extLst xmlns:a="http://schemas.openxmlformats.org/drawingml/2006/main">
               <a:ext uri="{FF2B5EF4-FFF2-40B4-BE49-F238E27FC236}">
-                <a16:creationId xmlns:a16="http://schemas.microsoft.com/office/drawing/2014/main" id="{C78863C2-EA4E-4034-9D76-55BA8C872D14}"/>
+                <a16:creationId xmlns:a16="http://schemas.microsoft.com/office/drawing/2014/main" id="{54BDCD61-1E96-44F4-8F4C-2073F5CA0085}"/>
               </a:ext>
             </a:extLst>
           </p:cNvPr>
@@ -12246,7 +13231,7 @@
           <p:cNvPr id="7" name="eyebrow">
             <a:extLst xmlns:a="http://schemas.openxmlformats.org/drawingml/2006/main">
               <a:ext uri="{FF2B5EF4-FFF2-40B4-BE49-F238E27FC236}">
-                <a16:creationId xmlns:a16="http://schemas.microsoft.com/office/drawing/2014/main" id="{BF99D184-1F6F-4810-A17F-2BAA2F326074}"/>
+                <a16:creationId xmlns:a16="http://schemas.microsoft.com/office/drawing/2014/main" id="{B30098AA-6FD6-4C41-9BD8-5B7D9E6E9E2D}"/>
               </a:ext>
             </a:extLst>
           </p:cNvPr>
@@ -12294,10 +13279,69 @@
       </p:sp>
       <p:sp>
         <p:nvSpPr>
-          <p:cNvPr id="8" name="footer-rule">
-            <a:extLst xmlns:a="http://schemas.openxmlformats.org/drawingml/2006/main">
-              <a:ext uri="{FF2B5EF4-FFF2-40B4-BE49-F238E27FC236}">
-                <a16:creationId xmlns:a16="http://schemas.microsoft.com/office/drawing/2014/main" id="{B0C21FDF-3CC4-4CB9-9362-DCA3EBE88F06}"/>
+          <p:cNvPr id="8" name="rescue-point-logo-background">
+            <a:extLst xmlns:a="http://schemas.openxmlformats.org/drawingml/2006/main">
+              <a:ext uri="{FF2B5EF4-FFF2-40B4-BE49-F238E27FC236}">
+                <a16:creationId xmlns:a16="http://schemas.microsoft.com/office/drawing/2014/main" id="{CE118580-45D5-44F8-8DA9-E628B76FCCB0}"/>
+              </a:ext>
+            </a:extLst>
+          </p:cNvPr>
+          <p:cNvSpPr>
+            <a:spLocks xmlns:a="http://schemas.openxmlformats.org/drawingml/2006/main" noGrp="1"/>
+          </p:cNvSpPr>
+          <p:nvPr/>
+        </p:nvSpPr>
+        <p:spPr>
+          <a:xfrm xmlns:a="http://schemas.openxmlformats.org/drawingml/2006/main">
+            <a:off x="9772650" y="133350"/>
+            <a:ext cx="1733550" cy="457200"/>
+          </a:xfrm>
+          <a:prstGeom xmlns:a="http://schemas.openxmlformats.org/drawingml/2006/main" prst="roundRect">
+            <a:avLst>
+              <a:gd name="adj" fmla="val 16667"/>
+            </a:avLst>
+          </a:prstGeom>
+          <a:solidFill xmlns:a="http://schemas.openxmlformats.org/drawingml/2006/main">
+            <a:srgbClr val="06142E"/>
+          </a:solidFill>
+          <a:ln xmlns:a="http://schemas.openxmlformats.org/drawingml/2006/main" w="9525">
+            <a:solidFill>
+              <a:srgbClr val="1EC5FF">
+                <a:alpha val="33333"/>
+              </a:srgbClr>
+            </a:solidFill>
+            <a:prstDash val="solid"/>
+          </a:ln>
+        </p:spPr>
+      </p:sp>
+      <p:pic>
+        <p:nvPicPr>
+          <p:cNvPr id="23" name="" descr="Figura oficial da documentação dbt usada para explicar: Cinco conceitos, cinco responsabilidades — Tabela Gold, dimensional, semantic model, métrica e serviço não são sinônimos.."/>
+          <p:cNvPicPr>
+            <a:picLocks xmlns:a="http://schemas.openxmlformats.org/drawingml/2006/main" noChangeAspect="1"/>
+          </p:cNvPicPr>
+          <p:nvPr/>
+        </p:nvPicPr>
+        <p:blipFill>
+          <a:blip xmlns:r="http://schemas.openxmlformats.org/officeDocument/2006/relationships" xmlns:a="http://schemas.openxmlformats.org/drawingml/2006/main" r:embed="R6b9938c989684592"/>
+          <a:stretch xmlns:a="http://schemas.openxmlformats.org/drawingml/2006/main"/>
+        </p:blipFill>
+        <p:spPr>
+          <a:xfrm xmlns:a="http://schemas.openxmlformats.org/drawingml/2006/main">
+            <a:off x="9893718" y="209550"/>
+            <a:ext cx="1491414" cy="323850"/>
+          </a:xfrm>
+          <a:prstGeom xmlns:a="http://schemas.openxmlformats.org/drawingml/2006/main" prst="rect">
+            <a:avLst/>
+          </a:prstGeom>
+        </p:spPr>
+      </p:pic>
+      <p:sp>
+        <p:nvSpPr>
+          <p:cNvPr id="10" name="footer-rule">
+            <a:extLst xmlns:a="http://schemas.openxmlformats.org/drawingml/2006/main">
+              <a:ext uri="{FF2B5EF4-FFF2-40B4-BE49-F238E27FC236}">
+                <a16:creationId xmlns:a16="http://schemas.microsoft.com/office/drawing/2014/main" id="{401648FF-678F-45C9-A099-4BB39BE91143}"/>
               </a:ext>
             </a:extLst>
           </p:cNvPr>
@@ -12327,10 +13371,10 @@
       </p:sp>
       <p:sp>
         <p:nvSpPr>
-          <p:cNvPr id="9" name="footer">
-            <a:extLst xmlns:a="http://schemas.openxmlformats.org/drawingml/2006/main">
-              <a:ext uri="{FF2B5EF4-FFF2-40B4-BE49-F238E27FC236}">
-                <a16:creationId xmlns:a16="http://schemas.microsoft.com/office/drawing/2014/main" id="{F40DD7CA-76DE-4242-BD7F-37B62851914A}"/>
+          <p:cNvPr id="11" name="footer">
+            <a:extLst xmlns:a="http://schemas.openxmlformats.org/drawingml/2006/main">
+              <a:ext uri="{FF2B5EF4-FFF2-40B4-BE49-F238E27FC236}">
+                <a16:creationId xmlns:a16="http://schemas.microsoft.com/office/drawing/2014/main" id="{59A48E1F-7F3B-4D26-96DE-18F1A1FA6B53}"/>
               </a:ext>
             </a:extLst>
           </p:cNvPr>
@@ -12382,10 +13426,10 @@
       </p:sp>
       <p:sp>
         <p:nvSpPr>
-          <p:cNvPr id="10" name="page-number">
-            <a:extLst xmlns:a="http://schemas.openxmlformats.org/drawingml/2006/main">
-              <a:ext uri="{FF2B5EF4-FFF2-40B4-BE49-F238E27FC236}">
-                <a16:creationId xmlns:a16="http://schemas.microsoft.com/office/drawing/2014/main" id="{7EE867A4-0F25-4D77-A0AE-2F04D241464A}"/>
+          <p:cNvPr id="12" name="page-number">
+            <a:extLst xmlns:a="http://schemas.openxmlformats.org/drawingml/2006/main">
+              <a:ext uri="{FF2B5EF4-FFF2-40B4-BE49-F238E27FC236}">
+                <a16:creationId xmlns:a16="http://schemas.microsoft.com/office/drawing/2014/main" id="{797B73A4-D698-4F87-9966-302CF9578912}"/>
               </a:ext>
             </a:extLst>
           </p:cNvPr>
@@ -12438,7 +13482,7 @@
     </p:spTree>
     <p:extLst>
       <p:ext uri="{BB962C8B-B14F-4D97-AF65-F5344CB8AC3E}">
-        <p14:creationId xmlns:p14="http://schemas.microsoft.com/office/powerpoint/2010/main" val="2069076728"/>
+        <p14:creationId xmlns:p14="http://schemas.microsoft.com/office/powerpoint/2010/main" val="1057507432"/>
       </p:ext>
     </p:extLst>
   </p:cSld>
@@ -12474,10 +13518,10 @@
       </p:grpSpPr>
       <p:sp>
         <p:nvSpPr>
-          <p:cNvPr id="15" name="slide-title">
-            <a:extLst xmlns:a="http://schemas.openxmlformats.org/drawingml/2006/main">
-              <a:ext uri="{FF2B5EF4-FFF2-40B4-BE49-F238E27FC236}">
-                <a16:creationId xmlns:a16="http://schemas.microsoft.com/office/drawing/2014/main" id="{7B178313-A631-4F3A-94A8-0C73A9FED71B}"/>
+          <p:cNvPr id="17" name="slide-title">
+            <a:extLst xmlns:a="http://schemas.openxmlformats.org/drawingml/2006/main">
+              <a:ext uri="{FF2B5EF4-FFF2-40B4-BE49-F238E27FC236}">
+                <a16:creationId xmlns:a16="http://schemas.microsoft.com/office/drawing/2014/main" id="{05B38BF8-CA0C-4635-9C8C-035634F20688}"/>
               </a:ext>
             </a:extLst>
           </p:cNvPr>
@@ -12528,7 +13572,7 @@
           <p:cNvPr id="2" name="flow-1">
             <a:extLst xmlns:a="http://schemas.openxmlformats.org/drawingml/2006/main">
               <a:ext uri="{FF2B5EF4-FFF2-40B4-BE49-F238E27FC236}">
-                <a16:creationId xmlns:a16="http://schemas.microsoft.com/office/drawing/2014/main" id="{1F9AD077-D068-441E-9A00-D2CECF328DA8}"/>
+                <a16:creationId xmlns:a16="http://schemas.microsoft.com/office/drawing/2014/main" id="{7773F7D0-C2D0-4E16-8243-EFCD823856DE}"/>
               </a:ext>
             </a:extLst>
           </p:cNvPr>
@@ -12585,7 +13629,7 @@
           <p:cNvPr id="3" name="flow-2">
             <a:extLst xmlns:a="http://schemas.openxmlformats.org/drawingml/2006/main">
               <a:ext uri="{FF2B5EF4-FFF2-40B4-BE49-F238E27FC236}">
-                <a16:creationId xmlns:a16="http://schemas.microsoft.com/office/drawing/2014/main" id="{FE0A4E88-C795-4614-BF48-EC8419C7140C}"/>
+                <a16:creationId xmlns:a16="http://schemas.microsoft.com/office/drawing/2014/main" id="{084480C8-C4FF-4A0B-AFFD-D50C17C713F8}"/>
               </a:ext>
             </a:extLst>
           </p:cNvPr>
@@ -12642,7 +13686,7 @@
           <p:cNvPr id="4" name="flow-3">
             <a:extLst xmlns:a="http://schemas.openxmlformats.org/drawingml/2006/main">
               <a:ext uri="{FF2B5EF4-FFF2-40B4-BE49-F238E27FC236}">
-                <a16:creationId xmlns:a16="http://schemas.microsoft.com/office/drawing/2014/main" id="{2C437A93-898D-4BC0-8019-C05B2F299FC7}"/>
+                <a16:creationId xmlns:a16="http://schemas.microsoft.com/office/drawing/2014/main" id="{6266A27D-FD2E-4FAD-999D-739B2B87BA77}"/>
               </a:ext>
             </a:extLst>
           </p:cNvPr>
@@ -12699,7 +13743,7 @@
           <p:cNvPr id="5" name="flow-4">
             <a:extLst xmlns:a="http://schemas.openxmlformats.org/drawingml/2006/main">
               <a:ext uri="{FF2B5EF4-FFF2-40B4-BE49-F238E27FC236}">
-                <a16:creationId xmlns:a16="http://schemas.microsoft.com/office/drawing/2014/main" id="{CBB1A484-1C9C-4B5C-A72F-207DAF3CA983}"/>
+                <a16:creationId xmlns:a16="http://schemas.microsoft.com/office/drawing/2014/main" id="{0D395124-72F1-4389-AC2B-4870D5C28885}"/>
               </a:ext>
             </a:extLst>
           </p:cNvPr>
@@ -12756,7 +13800,7 @@
           <p:cNvPr id="6" name="flow-5">
             <a:extLst xmlns:a="http://schemas.openxmlformats.org/drawingml/2006/main">
               <a:ext uri="{FF2B5EF4-FFF2-40B4-BE49-F238E27FC236}">
-                <a16:creationId xmlns:a16="http://schemas.microsoft.com/office/drawing/2014/main" id="{31C29850-85DB-442B-8066-BDE3BBC5660C}"/>
+                <a16:creationId xmlns:a16="http://schemas.microsoft.com/office/drawing/2014/main" id="{ADCE9C4B-DC5C-4CA9-BE1E-D6C944245A21}"/>
               </a:ext>
             </a:extLst>
           </p:cNvPr>
@@ -12810,7 +13854,7 @@
       </p:sp>
       <p:cxnSp>
         <p:nvCxnSpPr>
-          <p:cNvPr id="31" name=""/>
+          <p:cNvPr id="34" name=""/>
           <p:cNvCxnSpPr>
             <a:stCxn xmlns:a="http://schemas.openxmlformats.org/drawingml/2006/main" id="2" idx="3"/>
             <a:endCxn xmlns:a="http://schemas.openxmlformats.org/drawingml/2006/main" id="3" idx="1"/>
@@ -12836,7 +13880,7 @@
       </p:cxnSp>
       <p:cxnSp>
         <p:nvCxnSpPr>
-          <p:cNvPr id="32" name=""/>
+          <p:cNvPr id="35" name=""/>
           <p:cNvCxnSpPr>
             <a:stCxn xmlns:a="http://schemas.openxmlformats.org/drawingml/2006/main" id="3" idx="3"/>
             <a:endCxn xmlns:a="http://schemas.openxmlformats.org/drawingml/2006/main" id="4" idx="1"/>
@@ -12862,7 +13906,7 @@
       </p:cxnSp>
       <p:cxnSp>
         <p:nvCxnSpPr>
-          <p:cNvPr id="33" name=""/>
+          <p:cNvPr id="36" name=""/>
           <p:cNvCxnSpPr>
             <a:stCxn xmlns:a="http://schemas.openxmlformats.org/drawingml/2006/main" id="4" idx="3"/>
             <a:endCxn xmlns:a="http://schemas.openxmlformats.org/drawingml/2006/main" id="5" idx="1"/>
@@ -12888,7 +13932,7 @@
       </p:cxnSp>
       <p:cxnSp>
         <p:nvCxnSpPr>
-          <p:cNvPr id="34" name=""/>
+          <p:cNvPr id="37" name=""/>
           <p:cNvCxnSpPr>
             <a:stCxn xmlns:a="http://schemas.openxmlformats.org/drawingml/2006/main" id="5" idx="3"/>
             <a:endCxn xmlns:a="http://schemas.openxmlformats.org/drawingml/2006/main" id="6" idx="1"/>
@@ -12917,7 +13961,7 @@
           <p:cNvPr id="11" name="eyebrow">
             <a:extLst xmlns:a="http://schemas.openxmlformats.org/drawingml/2006/main">
               <a:ext uri="{FF2B5EF4-FFF2-40B4-BE49-F238E27FC236}">
-                <a16:creationId xmlns:a16="http://schemas.microsoft.com/office/drawing/2014/main" id="{57508C70-7339-4657-A943-429B2FB95595}"/>
+                <a16:creationId xmlns:a16="http://schemas.microsoft.com/office/drawing/2014/main" id="{0B1989BC-BA5B-445D-BE4B-13CCDCC87474}"/>
               </a:ext>
             </a:extLst>
           </p:cNvPr>
@@ -12965,10 +14009,69 @@
       </p:sp>
       <p:sp>
         <p:nvSpPr>
-          <p:cNvPr id="12" name="footer-rule">
-            <a:extLst xmlns:a="http://schemas.openxmlformats.org/drawingml/2006/main">
-              <a:ext uri="{FF2B5EF4-FFF2-40B4-BE49-F238E27FC236}">
-                <a16:creationId xmlns:a16="http://schemas.microsoft.com/office/drawing/2014/main" id="{C0E634EA-B90D-4C02-9A29-F2FFDEDCDAC5}"/>
+          <p:cNvPr id="12" name="rescue-point-logo-background">
+            <a:extLst xmlns:a="http://schemas.openxmlformats.org/drawingml/2006/main">
+              <a:ext uri="{FF2B5EF4-FFF2-40B4-BE49-F238E27FC236}">
+                <a16:creationId xmlns:a16="http://schemas.microsoft.com/office/drawing/2014/main" id="{3BF026D9-90CA-4914-96F1-E3351CD5E989}"/>
+              </a:ext>
+            </a:extLst>
+          </p:cNvPr>
+          <p:cNvSpPr>
+            <a:spLocks xmlns:a="http://schemas.openxmlformats.org/drawingml/2006/main" noGrp="1"/>
+          </p:cNvSpPr>
+          <p:nvPr/>
+        </p:nvSpPr>
+        <p:spPr>
+          <a:xfrm xmlns:a="http://schemas.openxmlformats.org/drawingml/2006/main">
+            <a:off x="9772650" y="133350"/>
+            <a:ext cx="1733550" cy="457200"/>
+          </a:xfrm>
+          <a:prstGeom xmlns:a="http://schemas.openxmlformats.org/drawingml/2006/main" prst="roundRect">
+            <a:avLst>
+              <a:gd name="adj" fmla="val 16667"/>
+            </a:avLst>
+          </a:prstGeom>
+          <a:solidFill xmlns:a="http://schemas.openxmlformats.org/drawingml/2006/main">
+            <a:srgbClr val="06142E"/>
+          </a:solidFill>
+          <a:ln xmlns:a="http://schemas.openxmlformats.org/drawingml/2006/main" w="9525">
+            <a:solidFill>
+              <a:srgbClr val="1EC5FF">
+                <a:alpha val="33333"/>
+              </a:srgbClr>
+            </a:solidFill>
+            <a:prstDash val="solid"/>
+          </a:ln>
+        </p:spPr>
+      </p:sp>
+      <p:pic>
+        <p:nvPicPr>
+          <p:cNvPr id="40" name="" descr="Figura oficial da documentação dbt usada para explicar: Cinco conceitos, cinco responsabilidades — Gold."/>
+          <p:cNvPicPr>
+            <a:picLocks xmlns:a="http://schemas.openxmlformats.org/drawingml/2006/main" noChangeAspect="1"/>
+          </p:cNvPicPr>
+          <p:nvPr/>
+        </p:nvPicPr>
+        <p:blipFill>
+          <a:blip xmlns:r="http://schemas.openxmlformats.org/officeDocument/2006/relationships" xmlns:a="http://schemas.openxmlformats.org/drawingml/2006/main" r:embed="R9c2f60ee85dc4b0b"/>
+          <a:stretch xmlns:a="http://schemas.openxmlformats.org/drawingml/2006/main"/>
+        </p:blipFill>
+        <p:spPr>
+          <a:xfrm xmlns:a="http://schemas.openxmlformats.org/drawingml/2006/main">
+            <a:off x="9893718" y="209550"/>
+            <a:ext cx="1491414" cy="323850"/>
+          </a:xfrm>
+          <a:prstGeom xmlns:a="http://schemas.openxmlformats.org/drawingml/2006/main" prst="rect">
+            <a:avLst/>
+          </a:prstGeom>
+        </p:spPr>
+      </p:pic>
+      <p:sp>
+        <p:nvSpPr>
+          <p:cNvPr id="14" name="footer-rule">
+            <a:extLst xmlns:a="http://schemas.openxmlformats.org/drawingml/2006/main">
+              <a:ext uri="{FF2B5EF4-FFF2-40B4-BE49-F238E27FC236}">
+                <a16:creationId xmlns:a16="http://schemas.microsoft.com/office/drawing/2014/main" id="{5353FC2A-7531-4736-8205-E160EC2F39A9}"/>
               </a:ext>
             </a:extLst>
           </p:cNvPr>
@@ -12998,10 +14101,10 @@
       </p:sp>
       <p:sp>
         <p:nvSpPr>
-          <p:cNvPr id="13" name="footer">
-            <a:extLst xmlns:a="http://schemas.openxmlformats.org/drawingml/2006/main">
-              <a:ext uri="{FF2B5EF4-FFF2-40B4-BE49-F238E27FC236}">
-                <a16:creationId xmlns:a16="http://schemas.microsoft.com/office/drawing/2014/main" id="{FBA891A6-67BA-4A7B-ACD2-9ADD929A2021}"/>
+          <p:cNvPr id="15" name="footer">
+            <a:extLst xmlns:a="http://schemas.openxmlformats.org/drawingml/2006/main">
+              <a:ext uri="{FF2B5EF4-FFF2-40B4-BE49-F238E27FC236}">
+                <a16:creationId xmlns:a16="http://schemas.microsoft.com/office/drawing/2014/main" id="{58C059CA-3973-4596-8F94-3FA657B24F54}"/>
               </a:ext>
             </a:extLst>
           </p:cNvPr>
@@ -13053,10 +14156,10 @@
       </p:sp>
       <p:sp>
         <p:nvSpPr>
-          <p:cNvPr id="14" name="page-number">
-            <a:extLst xmlns:a="http://schemas.openxmlformats.org/drawingml/2006/main">
-              <a:ext uri="{FF2B5EF4-FFF2-40B4-BE49-F238E27FC236}">
-                <a16:creationId xmlns:a16="http://schemas.microsoft.com/office/drawing/2014/main" id="{12ED1981-3CA1-4841-A266-AFAD4CF75D2C}"/>
+          <p:cNvPr id="16" name="page-number">
+            <a:extLst xmlns:a="http://schemas.openxmlformats.org/drawingml/2006/main">
+              <a:ext uri="{FF2B5EF4-FFF2-40B4-BE49-F238E27FC236}">
+                <a16:creationId xmlns:a16="http://schemas.microsoft.com/office/drawing/2014/main" id="{4C8B76E8-DE92-42A1-8A6B-9AB72A23D773}"/>
               </a:ext>
             </a:extLst>
           </p:cNvPr>
@@ -13109,7 +14212,7 @@
     </p:spTree>
     <p:extLst>
       <p:ext uri="{BB962C8B-B14F-4D97-AF65-F5344CB8AC3E}">
-        <p14:creationId xmlns:p14="http://schemas.microsoft.com/office/powerpoint/2010/main" val="178638190"/>
+        <p14:creationId xmlns:p14="http://schemas.microsoft.com/office/powerpoint/2010/main" val="2092028250"/>
       </p:ext>
     </p:extLst>
   </p:cSld>
@@ -13145,10 +14248,10 @@
       </p:grpSpPr>
       <p:sp>
         <p:nvSpPr>
-          <p:cNvPr id="11" name="slide-title">
-            <a:extLst xmlns:a="http://schemas.openxmlformats.org/drawingml/2006/main">
-              <a:ext uri="{FF2B5EF4-FFF2-40B4-BE49-F238E27FC236}">
-                <a16:creationId xmlns:a16="http://schemas.microsoft.com/office/drawing/2014/main" id="{5E293796-F2B5-4BF7-8574-414E1555E33B}"/>
+          <p:cNvPr id="13" name="slide-title">
+            <a:extLst xmlns:a="http://schemas.openxmlformats.org/drawingml/2006/main">
+              <a:ext uri="{FF2B5EF4-FFF2-40B4-BE49-F238E27FC236}">
+                <a16:creationId xmlns:a16="http://schemas.microsoft.com/office/drawing/2014/main" id="{2447DE1E-94E1-4120-AB01-3F4C8622123A}"/>
               </a:ext>
             </a:extLst>
           </p:cNvPr>
@@ -13199,7 +14302,7 @@
           <p:cNvPr id="2" name="slide-subtitle">
             <a:extLst xmlns:a="http://schemas.openxmlformats.org/drawingml/2006/main">
               <a:ext uri="{FF2B5EF4-FFF2-40B4-BE49-F238E27FC236}">
-                <a16:creationId xmlns:a16="http://schemas.microsoft.com/office/drawing/2014/main" id="{1DBB8660-1101-4222-8840-93EE4E79F811}"/>
+                <a16:creationId xmlns:a16="http://schemas.microsoft.com/office/drawing/2014/main" id="{7F9C2386-2934-4E5B-A41D-27E35D0C6567}"/>
               </a:ext>
             </a:extLst>
           </p:cNvPr>
@@ -13250,7 +14353,7 @@
           <p:cNvPr id="3" name="bullets">
             <a:extLst xmlns:a="http://schemas.openxmlformats.org/drawingml/2006/main">
               <a:ext uri="{FF2B5EF4-FFF2-40B4-BE49-F238E27FC236}">
-                <a16:creationId xmlns:a16="http://schemas.microsoft.com/office/drawing/2014/main" id="{9D0CB180-2A00-4C5F-84AB-4DE5DB25E189}"/>
+                <a16:creationId xmlns:a16="http://schemas.microsoft.com/office/drawing/2014/main" id="{9D887B58-6758-42AA-A747-4D00E28E5531}"/>
               </a:ext>
             </a:extLst>
           </p:cNvPr>
@@ -13337,7 +14440,7 @@
           <p:cNvPr id="4" name="ambient-glow">
             <a:extLst xmlns:a="http://schemas.openxmlformats.org/drawingml/2006/main">
               <a:ext uri="{FF2B5EF4-FFF2-40B4-BE49-F238E27FC236}">
-                <a16:creationId xmlns:a16="http://schemas.microsoft.com/office/drawing/2014/main" id="{7707EDE3-E4BF-4D0E-A22B-30625EB55C5B}"/>
+                <a16:creationId xmlns:a16="http://schemas.microsoft.com/office/drawing/2014/main" id="{D7923A23-6A95-4B6A-BF2B-DDBE49B2BF75}"/>
               </a:ext>
             </a:extLst>
           </p:cNvPr>
@@ -13374,7 +14477,7 @@
           <p:cNvPr id="5" name="ambient-core">
             <a:extLst xmlns:a="http://schemas.openxmlformats.org/drawingml/2006/main">
               <a:ext uri="{FF2B5EF4-FFF2-40B4-BE49-F238E27FC236}">
-                <a16:creationId xmlns:a16="http://schemas.microsoft.com/office/drawing/2014/main" id="{5FBD0E02-AFE1-4F4D-ADF4-80F525BDA98A}"/>
+                <a16:creationId xmlns:a16="http://schemas.microsoft.com/office/drawing/2014/main" id="{661BEB8A-67D4-4520-9FCA-D7CEB7260E3D}"/>
               </a:ext>
             </a:extLst>
           </p:cNvPr>
@@ -13411,7 +14514,7 @@
           <p:cNvPr id="6" name="section-number">
             <a:extLst xmlns:a="http://schemas.openxmlformats.org/drawingml/2006/main">
               <a:ext uri="{FF2B5EF4-FFF2-40B4-BE49-F238E27FC236}">
-                <a16:creationId xmlns:a16="http://schemas.microsoft.com/office/drawing/2014/main" id="{CC34E344-C704-4AD7-97EF-8783BCB31016}"/>
+                <a16:creationId xmlns:a16="http://schemas.microsoft.com/office/drawing/2014/main" id="{47D1A0E5-A1EF-4B1B-9A66-9B9A80947EC3}"/>
               </a:ext>
             </a:extLst>
           </p:cNvPr>
@@ -13462,7 +14565,7 @@
           <p:cNvPr id="7" name="eyebrow">
             <a:extLst xmlns:a="http://schemas.openxmlformats.org/drawingml/2006/main">
               <a:ext uri="{FF2B5EF4-FFF2-40B4-BE49-F238E27FC236}">
-                <a16:creationId xmlns:a16="http://schemas.microsoft.com/office/drawing/2014/main" id="{0E72BA4B-752D-4E5E-8975-23A5E00C45C2}"/>
+                <a16:creationId xmlns:a16="http://schemas.microsoft.com/office/drawing/2014/main" id="{F7DC5F7B-3087-4C07-B437-70ABD221DEEA}"/>
               </a:ext>
             </a:extLst>
           </p:cNvPr>
@@ -13510,10 +14613,69 @@
       </p:sp>
       <p:sp>
         <p:nvSpPr>
-          <p:cNvPr id="8" name="footer-rule">
-            <a:extLst xmlns:a="http://schemas.openxmlformats.org/drawingml/2006/main">
-              <a:ext uri="{FF2B5EF4-FFF2-40B4-BE49-F238E27FC236}">
-                <a16:creationId xmlns:a16="http://schemas.microsoft.com/office/drawing/2014/main" id="{3FE8C069-D1FD-461E-AD92-D4E3B53C50F5}"/>
+          <p:cNvPr id="8" name="rescue-point-logo-background">
+            <a:extLst xmlns:a="http://schemas.openxmlformats.org/drawingml/2006/main">
+              <a:ext uri="{FF2B5EF4-FFF2-40B4-BE49-F238E27FC236}">
+                <a16:creationId xmlns:a16="http://schemas.microsoft.com/office/drawing/2014/main" id="{F3FD3EB0-1DBA-4913-8AE8-9F49C3165E57}"/>
+              </a:ext>
+            </a:extLst>
+          </p:cNvPr>
+          <p:cNvSpPr>
+            <a:spLocks xmlns:a="http://schemas.openxmlformats.org/drawingml/2006/main" noGrp="1"/>
+          </p:cNvSpPr>
+          <p:nvPr/>
+        </p:nvSpPr>
+        <p:spPr>
+          <a:xfrm xmlns:a="http://schemas.openxmlformats.org/drawingml/2006/main">
+            <a:off x="9772650" y="133350"/>
+            <a:ext cx="1733550" cy="457200"/>
+          </a:xfrm>
+          <a:prstGeom xmlns:a="http://schemas.openxmlformats.org/drawingml/2006/main" prst="roundRect">
+            <a:avLst>
+              <a:gd name="adj" fmla="val 16667"/>
+            </a:avLst>
+          </a:prstGeom>
+          <a:solidFill xmlns:a="http://schemas.openxmlformats.org/drawingml/2006/main">
+            <a:srgbClr val="06142E"/>
+          </a:solidFill>
+          <a:ln xmlns:a="http://schemas.openxmlformats.org/drawingml/2006/main" w="9525">
+            <a:solidFill>
+              <a:srgbClr val="1EC5FF">
+                <a:alpha val="33333"/>
+              </a:srgbClr>
+            </a:solidFill>
+            <a:prstDash val="solid"/>
+          </a:ln>
+        </p:spPr>
+      </p:sp>
+      <p:pic>
+        <p:nvPicPr>
+          <p:cNvPr id="23" name="" descr="Figura oficial da documentação dbt usada para explicar: Join válido pode multiplicar dinheiro — Dois itens × dois pagamentos produzem quatro combinações.."/>
+          <p:cNvPicPr>
+            <a:picLocks xmlns:a="http://schemas.openxmlformats.org/drawingml/2006/main" noChangeAspect="1"/>
+          </p:cNvPicPr>
+          <p:nvPr/>
+        </p:nvPicPr>
+        <p:blipFill>
+          <a:blip xmlns:r="http://schemas.openxmlformats.org/officeDocument/2006/relationships" xmlns:a="http://schemas.openxmlformats.org/drawingml/2006/main" r:embed="R343debb7f2584494"/>
+          <a:stretch xmlns:a="http://schemas.openxmlformats.org/drawingml/2006/main"/>
+        </p:blipFill>
+        <p:spPr>
+          <a:xfrm xmlns:a="http://schemas.openxmlformats.org/drawingml/2006/main">
+            <a:off x="9893718" y="209550"/>
+            <a:ext cx="1491414" cy="323850"/>
+          </a:xfrm>
+          <a:prstGeom xmlns:a="http://schemas.openxmlformats.org/drawingml/2006/main" prst="rect">
+            <a:avLst/>
+          </a:prstGeom>
+        </p:spPr>
+      </p:pic>
+      <p:sp>
+        <p:nvSpPr>
+          <p:cNvPr id="10" name="footer-rule">
+            <a:extLst xmlns:a="http://schemas.openxmlformats.org/drawingml/2006/main">
+              <a:ext uri="{FF2B5EF4-FFF2-40B4-BE49-F238E27FC236}">
+                <a16:creationId xmlns:a16="http://schemas.microsoft.com/office/drawing/2014/main" id="{34FBB1DA-BD0D-4590-B967-4C4BC0484F3D}"/>
               </a:ext>
             </a:extLst>
           </p:cNvPr>
@@ -13543,10 +14705,10 @@
       </p:sp>
       <p:sp>
         <p:nvSpPr>
-          <p:cNvPr id="9" name="footer">
-            <a:extLst xmlns:a="http://schemas.openxmlformats.org/drawingml/2006/main">
-              <a:ext uri="{FF2B5EF4-FFF2-40B4-BE49-F238E27FC236}">
-                <a16:creationId xmlns:a16="http://schemas.microsoft.com/office/drawing/2014/main" id="{00479D52-56CB-42F7-A664-1FE2B6822EC8}"/>
+          <p:cNvPr id="11" name="footer">
+            <a:extLst xmlns:a="http://schemas.openxmlformats.org/drawingml/2006/main">
+              <a:ext uri="{FF2B5EF4-FFF2-40B4-BE49-F238E27FC236}">
+                <a16:creationId xmlns:a16="http://schemas.microsoft.com/office/drawing/2014/main" id="{BD5CE13C-F193-4D02-BA9B-477C9DF3603B}"/>
               </a:ext>
             </a:extLst>
           </p:cNvPr>
@@ -13598,10 +14760,10 @@
       </p:sp>
       <p:sp>
         <p:nvSpPr>
-          <p:cNvPr id="10" name="page-number">
-            <a:extLst xmlns:a="http://schemas.openxmlformats.org/drawingml/2006/main">
-              <a:ext uri="{FF2B5EF4-FFF2-40B4-BE49-F238E27FC236}">
-                <a16:creationId xmlns:a16="http://schemas.microsoft.com/office/drawing/2014/main" id="{B5D121BF-3379-4D4F-804A-4D909EACC6A1}"/>
+          <p:cNvPr id="12" name="page-number">
+            <a:extLst xmlns:a="http://schemas.openxmlformats.org/drawingml/2006/main">
+              <a:ext uri="{FF2B5EF4-FFF2-40B4-BE49-F238E27FC236}">
+                <a16:creationId xmlns:a16="http://schemas.microsoft.com/office/drawing/2014/main" id="{DEE7427A-E4B2-4A76-907F-06D0C1A8EE15}"/>
               </a:ext>
             </a:extLst>
           </p:cNvPr>
@@ -13654,7 +14816,7 @@
     </p:spTree>
     <p:extLst>
       <p:ext uri="{BB962C8B-B14F-4D97-AF65-F5344CB8AC3E}">
-        <p14:creationId xmlns:p14="http://schemas.microsoft.com/office/powerpoint/2010/main" val="407535315"/>
+        <p14:creationId xmlns:p14="http://schemas.microsoft.com/office/powerpoint/2010/main" val="1246759955"/>
       </p:ext>
     </p:extLst>
   </p:cSld>
@@ -13682,10 +14844,10 @@
       </p:grpSpPr>
       <p:sp>
         <p:nvSpPr>
-          <p:cNvPr id="9" name="slide-title">
-            <a:extLst xmlns:a="http://schemas.openxmlformats.org/drawingml/2006/main">
-              <a:ext uri="{FF2B5EF4-FFF2-40B4-BE49-F238E27FC236}">
-                <a16:creationId xmlns:a16="http://schemas.microsoft.com/office/drawing/2014/main" id="{858E420F-A0AC-44D7-B5CC-BB9B379A5E6C}"/>
+          <p:cNvPr id="11" name="slide-title">
+            <a:extLst xmlns:a="http://schemas.openxmlformats.org/drawingml/2006/main">
+              <a:ext uri="{FF2B5EF4-FFF2-40B4-BE49-F238E27FC236}">
+                <a16:creationId xmlns:a16="http://schemas.microsoft.com/office/drawing/2014/main" id="{861A6295-9480-492C-BF61-748E6EED07EE}"/>
               </a:ext>
             </a:extLst>
           </p:cNvPr>
@@ -13736,7 +14898,7 @@
           <p:cNvPr id="2" name="metric-primary">
             <a:extLst xmlns:a="http://schemas.openxmlformats.org/drawingml/2006/main">
               <a:ext uri="{FF2B5EF4-FFF2-40B4-BE49-F238E27FC236}">
-                <a16:creationId xmlns:a16="http://schemas.microsoft.com/office/drawing/2014/main" id="{4F7E3B2E-A1BF-4264-98D4-39F7668DCA33}"/>
+                <a16:creationId xmlns:a16="http://schemas.microsoft.com/office/drawing/2014/main" id="{47880858-BF69-4989-8628-497E5087800B}"/>
               </a:ext>
             </a:extLst>
           </p:cNvPr>
@@ -13787,7 +14949,7 @@
           <p:cNvPr id="3" name="metric-inputs">
             <a:extLst xmlns:a="http://schemas.openxmlformats.org/drawingml/2006/main">
               <a:ext uri="{FF2B5EF4-FFF2-40B4-BE49-F238E27FC236}">
-                <a16:creationId xmlns:a16="http://schemas.microsoft.com/office/drawing/2014/main" id="{3C60D06F-8F8E-40A5-937D-05BDFDCCD2A4}"/>
+                <a16:creationId xmlns:a16="http://schemas.microsoft.com/office/drawing/2014/main" id="{ACB081BA-9E8E-494C-ADEF-C8319C8E1ABB}"/>
               </a:ext>
             </a:extLst>
           </p:cNvPr>
@@ -13838,7 +15000,7 @@
           <p:cNvPr id="4" name="metric-arrow">
             <a:extLst xmlns:a="http://schemas.openxmlformats.org/drawingml/2006/main">
               <a:ext uri="{FF2B5EF4-FFF2-40B4-BE49-F238E27FC236}">
-                <a16:creationId xmlns:a16="http://schemas.microsoft.com/office/drawing/2014/main" id="{5BD069FF-BAAB-4B97-B74E-D10457C1EC3B}"/>
+                <a16:creationId xmlns:a16="http://schemas.microsoft.com/office/drawing/2014/main" id="{6E6B70E7-D539-444B-B088-783A3F32672C}"/>
               </a:ext>
             </a:extLst>
           </p:cNvPr>
@@ -13869,7 +15031,7 @@
           <p:cNvPr id="5" name="eyebrow">
             <a:extLst xmlns:a="http://schemas.openxmlformats.org/drawingml/2006/main">
               <a:ext uri="{FF2B5EF4-FFF2-40B4-BE49-F238E27FC236}">
-                <a16:creationId xmlns:a16="http://schemas.microsoft.com/office/drawing/2014/main" id="{5FED4DE1-E367-42DB-9FCC-B764EF9C3E25}"/>
+                <a16:creationId xmlns:a16="http://schemas.microsoft.com/office/drawing/2014/main" id="{B950455D-249F-4C07-ABEB-F1DECBA72B9E}"/>
               </a:ext>
             </a:extLst>
           </p:cNvPr>
@@ -13917,10 +15079,69 @@
       </p:sp>
       <p:sp>
         <p:nvSpPr>
-          <p:cNvPr id="6" name="footer-rule">
-            <a:extLst xmlns:a="http://schemas.openxmlformats.org/drawingml/2006/main">
-              <a:ext uri="{FF2B5EF4-FFF2-40B4-BE49-F238E27FC236}">
-                <a16:creationId xmlns:a16="http://schemas.microsoft.com/office/drawing/2014/main" id="{AB114F8A-F32D-4C48-BCB2-F825FF5C3D78}"/>
+          <p:cNvPr id="6" name="rescue-point-logo-background">
+            <a:extLst xmlns:a="http://schemas.openxmlformats.org/drawingml/2006/main">
+              <a:ext uri="{FF2B5EF4-FFF2-40B4-BE49-F238E27FC236}">
+                <a16:creationId xmlns:a16="http://schemas.microsoft.com/office/drawing/2014/main" id="{FD96A0C9-956F-406D-900A-F52D2C6A897B}"/>
+              </a:ext>
+            </a:extLst>
+          </p:cNvPr>
+          <p:cNvSpPr>
+            <a:spLocks xmlns:a="http://schemas.openxmlformats.org/drawingml/2006/main" noGrp="1"/>
+          </p:cNvSpPr>
+          <p:nvPr/>
+        </p:nvSpPr>
+        <p:spPr>
+          <a:xfrm xmlns:a="http://schemas.openxmlformats.org/drawingml/2006/main">
+            <a:off x="9772650" y="133350"/>
+            <a:ext cx="1733550" cy="457200"/>
+          </a:xfrm>
+          <a:prstGeom xmlns:a="http://schemas.openxmlformats.org/drawingml/2006/main" prst="roundRect">
+            <a:avLst>
+              <a:gd name="adj" fmla="val 16667"/>
+            </a:avLst>
+          </a:prstGeom>
+          <a:solidFill xmlns:a="http://schemas.openxmlformats.org/drawingml/2006/main">
+            <a:srgbClr val="06142E"/>
+          </a:solidFill>
+          <a:ln xmlns:a="http://schemas.openxmlformats.org/drawingml/2006/main" w="9525">
+            <a:solidFill>
+              <a:srgbClr val="1EC5FF">
+                <a:alpha val="33333"/>
+              </a:srgbClr>
+            </a:solidFill>
+            <a:prstDash val="solid"/>
+          </a:ln>
+        </p:spPr>
+      </p:sp>
+      <p:pic>
+        <p:nvPicPr>
+          <p:cNvPr id="19" name="" descr="Figura oficial da documentação dbt usada para explicar: Join válido pode multiplicar dinheiro — 4 linhas."/>
+          <p:cNvPicPr>
+            <a:picLocks xmlns:a="http://schemas.openxmlformats.org/drawingml/2006/main" noChangeAspect="1"/>
+          </p:cNvPicPr>
+          <p:nvPr/>
+        </p:nvPicPr>
+        <p:blipFill>
+          <a:blip xmlns:r="http://schemas.openxmlformats.org/officeDocument/2006/relationships" xmlns:a="http://schemas.openxmlformats.org/drawingml/2006/main" r:embed="Rb7da46fd2ffa4bcf"/>
+          <a:stretch xmlns:a="http://schemas.openxmlformats.org/drawingml/2006/main"/>
+        </p:blipFill>
+        <p:spPr>
+          <a:xfrm xmlns:a="http://schemas.openxmlformats.org/drawingml/2006/main">
+            <a:off x="9893718" y="209550"/>
+            <a:ext cx="1491414" cy="323850"/>
+          </a:xfrm>
+          <a:prstGeom xmlns:a="http://schemas.openxmlformats.org/drawingml/2006/main" prst="rect">
+            <a:avLst/>
+          </a:prstGeom>
+        </p:spPr>
+      </p:pic>
+      <p:sp>
+        <p:nvSpPr>
+          <p:cNvPr id="8" name="footer-rule">
+            <a:extLst xmlns:a="http://schemas.openxmlformats.org/drawingml/2006/main">
+              <a:ext uri="{FF2B5EF4-FFF2-40B4-BE49-F238E27FC236}">
+                <a16:creationId xmlns:a16="http://schemas.microsoft.com/office/drawing/2014/main" id="{743F8C3B-CCBA-4239-B422-ECECEC829C0C}"/>
               </a:ext>
             </a:extLst>
           </p:cNvPr>
@@ -13950,10 +15171,10 @@
       </p:sp>
       <p:sp>
         <p:nvSpPr>
-          <p:cNvPr id="7" name="footer">
-            <a:extLst xmlns:a="http://schemas.openxmlformats.org/drawingml/2006/main">
-              <a:ext uri="{FF2B5EF4-FFF2-40B4-BE49-F238E27FC236}">
-                <a16:creationId xmlns:a16="http://schemas.microsoft.com/office/drawing/2014/main" id="{2900DCCD-1159-45A5-A397-A8C70EB1F4F8}"/>
+          <p:cNvPr id="9" name="footer">
+            <a:extLst xmlns:a="http://schemas.openxmlformats.org/drawingml/2006/main">
+              <a:ext uri="{FF2B5EF4-FFF2-40B4-BE49-F238E27FC236}">
+                <a16:creationId xmlns:a16="http://schemas.microsoft.com/office/drawing/2014/main" id="{03A9BA43-19CD-47B8-A498-66D5B963E2BA}"/>
               </a:ext>
             </a:extLst>
           </p:cNvPr>
@@ -14005,10 +15226,10 @@
       </p:sp>
       <p:sp>
         <p:nvSpPr>
-          <p:cNvPr id="8" name="page-number">
-            <a:extLst xmlns:a="http://schemas.openxmlformats.org/drawingml/2006/main">
-              <a:ext uri="{FF2B5EF4-FFF2-40B4-BE49-F238E27FC236}">
-                <a16:creationId xmlns:a16="http://schemas.microsoft.com/office/drawing/2014/main" id="{DEF51EFE-CDFF-4B03-92A0-860C14ED6EE5}"/>
+          <p:cNvPr id="10" name="page-number">
+            <a:extLst xmlns:a="http://schemas.openxmlformats.org/drawingml/2006/main">
+              <a:ext uri="{FF2B5EF4-FFF2-40B4-BE49-F238E27FC236}">
+                <a16:creationId xmlns:a16="http://schemas.microsoft.com/office/drawing/2014/main" id="{2022F00F-2EB9-40E3-B8DB-697E2B7024A7}"/>
               </a:ext>
             </a:extLst>
           </p:cNvPr>
@@ -14061,7 +15282,7 @@
     </p:spTree>
     <p:extLst>
       <p:ext uri="{BB962C8B-B14F-4D97-AF65-F5344CB8AC3E}">
-        <p14:creationId xmlns:p14="http://schemas.microsoft.com/office/powerpoint/2010/main" val="857043523"/>
+        <p14:creationId xmlns:p14="http://schemas.microsoft.com/office/powerpoint/2010/main" val="273745485"/>
       </p:ext>
     </p:extLst>
   </p:cSld>
@@ -14089,10 +15310,10 @@
       </p:grpSpPr>
       <p:sp>
         <p:nvSpPr>
-          <p:cNvPr id="11" name="slide-title">
-            <a:extLst xmlns:a="http://schemas.openxmlformats.org/drawingml/2006/main">
-              <a:ext uri="{FF2B5EF4-FFF2-40B4-BE49-F238E27FC236}">
-                <a16:creationId xmlns:a16="http://schemas.microsoft.com/office/drawing/2014/main" id="{815138A0-CF67-46FC-A71E-2A2AAA5460A1}"/>
+          <p:cNvPr id="13" name="slide-title">
+            <a:extLst xmlns:a="http://schemas.openxmlformats.org/drawingml/2006/main">
+              <a:ext uri="{FF2B5EF4-FFF2-40B4-BE49-F238E27FC236}">
+                <a16:creationId xmlns:a16="http://schemas.microsoft.com/office/drawing/2014/main" id="{0E206293-1EC4-44F6-8663-340A8C337F5F}"/>
               </a:ext>
             </a:extLst>
           </p:cNvPr>
@@ -14143,7 +15364,7 @@
           <p:cNvPr id="2" name="slide-subtitle">
             <a:extLst xmlns:a="http://schemas.openxmlformats.org/drawingml/2006/main">
               <a:ext uri="{FF2B5EF4-FFF2-40B4-BE49-F238E27FC236}">
-                <a16:creationId xmlns:a16="http://schemas.microsoft.com/office/drawing/2014/main" id="{4AFDC4DF-41A0-4574-98ED-E30AB4B9147D}"/>
+                <a16:creationId xmlns:a16="http://schemas.microsoft.com/office/drawing/2014/main" id="{313F7C68-30E2-4074-84DA-6C4225D2A221}"/>
               </a:ext>
             </a:extLst>
           </p:cNvPr>
@@ -14194,7 +15415,7 @@
           <p:cNvPr id="3" name="bullets">
             <a:extLst xmlns:a="http://schemas.openxmlformats.org/drawingml/2006/main">
               <a:ext uri="{FF2B5EF4-FFF2-40B4-BE49-F238E27FC236}">
-                <a16:creationId xmlns:a16="http://schemas.microsoft.com/office/drawing/2014/main" id="{E02D9B4E-32AE-4BC8-90FE-DFDB3B223B05}"/>
+                <a16:creationId xmlns:a16="http://schemas.microsoft.com/office/drawing/2014/main" id="{6929098B-F868-4001-86E0-A080FB0ACF9C}"/>
               </a:ext>
             </a:extLst>
           </p:cNvPr>
@@ -14281,7 +15502,7 @@
           <p:cNvPr id="4" name="ambient-glow">
             <a:extLst xmlns:a="http://schemas.openxmlformats.org/drawingml/2006/main">
               <a:ext uri="{FF2B5EF4-FFF2-40B4-BE49-F238E27FC236}">
-                <a16:creationId xmlns:a16="http://schemas.microsoft.com/office/drawing/2014/main" id="{69427131-7E2A-47DA-BEC5-8914597A4FF5}"/>
+                <a16:creationId xmlns:a16="http://schemas.microsoft.com/office/drawing/2014/main" id="{EC608A1D-A64B-4106-A426-4CF0E253254D}"/>
               </a:ext>
             </a:extLst>
           </p:cNvPr>
@@ -14318,7 +15539,7 @@
           <p:cNvPr id="5" name="ambient-core">
             <a:extLst xmlns:a="http://schemas.openxmlformats.org/drawingml/2006/main">
               <a:ext uri="{FF2B5EF4-FFF2-40B4-BE49-F238E27FC236}">
-                <a16:creationId xmlns:a16="http://schemas.microsoft.com/office/drawing/2014/main" id="{FFCDB612-D357-42EA-BF8B-086B0F0653E4}"/>
+                <a16:creationId xmlns:a16="http://schemas.microsoft.com/office/drawing/2014/main" id="{D9C18158-1DEA-49D7-95BC-4119698BB02D}"/>
               </a:ext>
             </a:extLst>
           </p:cNvPr>
@@ -14355,7 +15576,7 @@
           <p:cNvPr id="6" name="section-number">
             <a:extLst xmlns:a="http://schemas.openxmlformats.org/drawingml/2006/main">
               <a:ext uri="{FF2B5EF4-FFF2-40B4-BE49-F238E27FC236}">
-                <a16:creationId xmlns:a16="http://schemas.microsoft.com/office/drawing/2014/main" id="{75A9B0D0-5172-48A9-804C-B0A4760C9122}"/>
+                <a16:creationId xmlns:a16="http://schemas.microsoft.com/office/drawing/2014/main" id="{91A2DBAE-065E-4CC4-93D1-FEAAC086D094}"/>
               </a:ext>
             </a:extLst>
           </p:cNvPr>
@@ -14406,7 +15627,7 @@
           <p:cNvPr id="7" name="eyebrow">
             <a:extLst xmlns:a="http://schemas.openxmlformats.org/drawingml/2006/main">
               <a:ext uri="{FF2B5EF4-FFF2-40B4-BE49-F238E27FC236}">
-                <a16:creationId xmlns:a16="http://schemas.microsoft.com/office/drawing/2014/main" id="{9416CCCE-F530-41FB-8BC5-462742C7559D}"/>
+                <a16:creationId xmlns:a16="http://schemas.microsoft.com/office/drawing/2014/main" id="{8D1859C3-8BBE-4343-857D-4B345898A745}"/>
               </a:ext>
             </a:extLst>
           </p:cNvPr>
@@ -14454,10 +15675,69 @@
       </p:sp>
       <p:sp>
         <p:nvSpPr>
-          <p:cNvPr id="8" name="footer-rule">
-            <a:extLst xmlns:a="http://schemas.openxmlformats.org/drawingml/2006/main">
-              <a:ext uri="{FF2B5EF4-FFF2-40B4-BE49-F238E27FC236}">
-                <a16:creationId xmlns:a16="http://schemas.microsoft.com/office/drawing/2014/main" id="{946F4E11-96A7-4EBE-9D8C-B34BE3CEBB2A}"/>
+          <p:cNvPr id="8" name="rescue-point-logo-background">
+            <a:extLst xmlns:a="http://schemas.openxmlformats.org/drawingml/2006/main">
+              <a:ext uri="{FF2B5EF4-FFF2-40B4-BE49-F238E27FC236}">
+                <a16:creationId xmlns:a16="http://schemas.microsoft.com/office/drawing/2014/main" id="{82C97994-7198-4D51-A8F0-F0A22FB0BD51}"/>
+              </a:ext>
+            </a:extLst>
+          </p:cNvPr>
+          <p:cNvSpPr>
+            <a:spLocks xmlns:a="http://schemas.openxmlformats.org/drawingml/2006/main" noGrp="1"/>
+          </p:cNvSpPr>
+          <p:nvPr/>
+        </p:nvSpPr>
+        <p:spPr>
+          <a:xfrm xmlns:a="http://schemas.openxmlformats.org/drawingml/2006/main">
+            <a:off x="9772650" y="133350"/>
+            <a:ext cx="1733550" cy="457200"/>
+          </a:xfrm>
+          <a:prstGeom xmlns:a="http://schemas.openxmlformats.org/drawingml/2006/main" prst="roundRect">
+            <a:avLst>
+              <a:gd name="adj" fmla="val 16667"/>
+            </a:avLst>
+          </a:prstGeom>
+          <a:solidFill xmlns:a="http://schemas.openxmlformats.org/drawingml/2006/main">
+            <a:srgbClr val="06142E"/>
+          </a:solidFill>
+          <a:ln xmlns:a="http://schemas.openxmlformats.org/drawingml/2006/main" w="9525">
+            <a:solidFill>
+              <a:srgbClr val="1EC5FF">
+                <a:alpha val="33333"/>
+              </a:srgbClr>
+            </a:solidFill>
+            <a:prstDash val="solid"/>
+          </a:ln>
+        </p:spPr>
+      </p:sp>
+      <p:pic>
+        <p:nvPicPr>
+          <p:cNvPr id="23" name="" descr="Figura oficial da documentação dbt usada para explicar: O ERD torna cardinalidade visível — Entidades e relações precisam anteceder a agregação.."/>
+          <p:cNvPicPr>
+            <a:picLocks xmlns:a="http://schemas.openxmlformats.org/drawingml/2006/main" noChangeAspect="1"/>
+          </p:cNvPicPr>
+          <p:nvPr/>
+        </p:nvPicPr>
+        <p:blipFill>
+          <a:blip xmlns:r="http://schemas.openxmlformats.org/officeDocument/2006/relationships" xmlns:a="http://schemas.openxmlformats.org/drawingml/2006/main" r:embed="R3dd66f54a45e4942"/>
+          <a:stretch xmlns:a="http://schemas.openxmlformats.org/drawingml/2006/main"/>
+        </p:blipFill>
+        <p:spPr>
+          <a:xfrm xmlns:a="http://schemas.openxmlformats.org/drawingml/2006/main">
+            <a:off x="9893718" y="209550"/>
+            <a:ext cx="1491414" cy="323850"/>
+          </a:xfrm>
+          <a:prstGeom xmlns:a="http://schemas.openxmlformats.org/drawingml/2006/main" prst="rect">
+            <a:avLst/>
+          </a:prstGeom>
+        </p:spPr>
+      </p:pic>
+      <p:sp>
+        <p:nvSpPr>
+          <p:cNvPr id="10" name="footer-rule">
+            <a:extLst xmlns:a="http://schemas.openxmlformats.org/drawingml/2006/main">
+              <a:ext uri="{FF2B5EF4-FFF2-40B4-BE49-F238E27FC236}">
+                <a16:creationId xmlns:a16="http://schemas.microsoft.com/office/drawing/2014/main" id="{010AE193-9A43-4E08-996D-F4A9BB6D4F3E}"/>
               </a:ext>
             </a:extLst>
           </p:cNvPr>
@@ -14487,10 +15767,10 @@
       </p:sp>
       <p:sp>
         <p:nvSpPr>
-          <p:cNvPr id="9" name="footer">
-            <a:extLst xmlns:a="http://schemas.openxmlformats.org/drawingml/2006/main">
-              <a:ext uri="{FF2B5EF4-FFF2-40B4-BE49-F238E27FC236}">
-                <a16:creationId xmlns:a16="http://schemas.microsoft.com/office/drawing/2014/main" id="{8912206F-D047-462E-9724-EF34D42C2122}"/>
+          <p:cNvPr id="11" name="footer">
+            <a:extLst xmlns:a="http://schemas.openxmlformats.org/drawingml/2006/main">
+              <a:ext uri="{FF2B5EF4-FFF2-40B4-BE49-F238E27FC236}">
+                <a16:creationId xmlns:a16="http://schemas.microsoft.com/office/drawing/2014/main" id="{DF3ABFF5-27B0-4FCE-B5F3-D4393ADCCDC6}"/>
               </a:ext>
             </a:extLst>
           </p:cNvPr>
@@ -14542,10 +15822,10 @@
       </p:sp>
       <p:sp>
         <p:nvSpPr>
-          <p:cNvPr id="10" name="page-number">
-            <a:extLst xmlns:a="http://schemas.openxmlformats.org/drawingml/2006/main">
-              <a:ext uri="{FF2B5EF4-FFF2-40B4-BE49-F238E27FC236}">
-                <a16:creationId xmlns:a16="http://schemas.microsoft.com/office/drawing/2014/main" id="{1B6D6AA4-41B4-4FE4-931A-14B8AB7E1AFD}"/>
+          <p:cNvPr id="12" name="page-number">
+            <a:extLst xmlns:a="http://schemas.openxmlformats.org/drawingml/2006/main">
+              <a:ext uri="{FF2B5EF4-FFF2-40B4-BE49-F238E27FC236}">
+                <a16:creationId xmlns:a16="http://schemas.microsoft.com/office/drawing/2014/main" id="{BA6CDA6E-9560-490A-BD0F-5B7E6FB526B1}"/>
               </a:ext>
             </a:extLst>
           </p:cNvPr>
@@ -14598,7 +15878,7 @@
     </p:spTree>
     <p:extLst>
       <p:ext uri="{BB962C8B-B14F-4D97-AF65-F5344CB8AC3E}">
-        <p14:creationId xmlns:p14="http://schemas.microsoft.com/office/powerpoint/2010/main" val="2004230839"/>
+        <p14:creationId xmlns:p14="http://schemas.microsoft.com/office/powerpoint/2010/main" val="393061786"/>
       </p:ext>
     </p:extLst>
   </p:cSld>
